--- a/outputs/GFCC17May2026_Eastertide.pptx
+++ b/outputs/GFCC17May2026_Eastertide.pptx
@@ -78,17 +78,6 @@
     <p:sldId id="326" r:id="rId77"/>
     <p:sldId id="327" r:id="rId78"/>
     <p:sldId id="328" r:id="rId79"/>
-    <p:sldId id="329" r:id="rId80"/>
-    <p:sldId id="330" r:id="rId81"/>
-    <p:sldId id="331" r:id="rId82"/>
-    <p:sldId id="332" r:id="rId83"/>
-    <p:sldId id="333" r:id="rId84"/>
-    <p:sldId id="334" r:id="rId85"/>
-    <p:sldId id="335" r:id="rId86"/>
-    <p:sldId id="336" r:id="rId87"/>
-    <p:sldId id="337" r:id="rId88"/>
-    <p:sldId id="338" r:id="rId89"/>
-    <p:sldId id="339" r:id="rId90"/>
   </p:sldIdLst>
   <p:sldSz cx="18288000" cy="10287000" type="screen4x3"/>
   <p:notesSz cx="6858000" cy="9144000"/>
@@ -15985,7 +15974,7 @@
               </a:defRPr>
             </a:pPr>
             <a:r>
-              <a:t>Awit ng Paghahangad</a:t>
+              <a:t>Pananagutan</a:t>
             </a:r>
           </a:p>
         </p:txBody>
@@ -16027,64 +16016,7 @@
               </a:defRPr>
             </a:pPr>
             <a:r>
-              <a:t>OH DIYOS, IKAW ANG LAGING HANAP</a:t>
-            </a:r>
-          </a:p>
-          <a:p>
-            <a:pPr algn="ctr">
-              <a:lnSpc>
-                <a:spcPct val="105000"/>
-              </a:lnSpc>
-              <a:spcAft>
-                <a:spcPts val="1000"/>
-              </a:spcAft>
-              <a:defRPr sz="5500" b="1" i="0">
-                <a:solidFill>
-                  <a:srgbClr val="FFFFFF"/>
-                </a:solidFill>
-                <a:latin typeface="Arial Black"/>
-              </a:defRPr>
-            </a:pPr>
-            <a:r>
-              <a:t>LOOB KO'Y IKAW ANG TANGING HANGAD</a:t>
-            </a:r>
-          </a:p>
-          <a:p>
-            <a:pPr algn="ctr">
-              <a:lnSpc>
-                <a:spcPct val="105000"/>
-              </a:lnSpc>
-              <a:spcAft>
-                <a:spcPts val="1000"/>
-              </a:spcAft>
-              <a:defRPr sz="5500" b="1" i="0">
-                <a:solidFill>
-                  <a:srgbClr val="FFFFFF"/>
-                </a:solidFill>
-                <a:latin typeface="Arial Black"/>
-              </a:defRPr>
-            </a:pPr>
-            <a:r>
-              <a:t>NAUUHAW AKONG PARANG TIGANG NA LUPA</a:t>
-            </a:r>
-          </a:p>
-          <a:p>
-            <a:pPr algn="ctr">
-              <a:lnSpc>
-                <a:spcPct val="105000"/>
-              </a:lnSpc>
-              <a:spcAft>
-                <a:spcPts val="1000"/>
-              </a:spcAft>
-              <a:defRPr sz="5500" b="1" i="0">
-                <a:solidFill>
-                  <a:srgbClr val="FFFFFF"/>
-                </a:solidFill>
-                <a:latin typeface="Arial Black"/>
-              </a:defRPr>
-            </a:pPr>
-            <a:r>
-              <a:t>SA TUBIG NG 'YONG PAG-AARUGA</a:t>
+              <a:t>(NO LYRICS IN LIBRARY FOR THIS HYMN.)</a:t>
             </a:r>
           </a:p>
         </p:txBody>
@@ -16236,7 +16168,43 @@
         <p:spPr>
           <a:xfrm>
             <a:off x="914400" y="1490472"/>
-            <a:ext cx="16459200" cy="7927848"/>
+            <a:ext cx="16459200" cy="868680"/>
+          </a:xfrm>
+          <a:prstGeom prst="rect">
+            <a:avLst/>
+          </a:prstGeom>
+          <a:noFill/>
+        </p:spPr>
+        <p:txBody>
+          <a:bodyPr wrap="square" lIns="109728" rIns="109728" tIns="73152" bIns="73152">
+            <a:noAutofit/>
+          </a:bodyPr>
+          <a:lstStyle/>
+          <a:p>
+            <a:pPr algn="ctr">
+              <a:defRPr sz="3800" b="1" i="0">
+                <a:solidFill>
+                  <a:srgbClr val="FFCC4D"/>
+                </a:solidFill>
+                <a:latin typeface="Georgia"/>
+              </a:defRPr>
+            </a:pPr>
+            <a:r>
+              <a:t>Tanging Yaman</a:t>
+            </a:r>
+          </a:p>
+        </p:txBody>
+      </p:sp>
+      <p:sp>
+        <p:nvSpPr>
+          <p:cNvPr id="5" name="TextBox 4"/>
+          <p:cNvSpPr txBox="1"/>
+          <p:nvPr/>
+        </p:nvSpPr>
+        <p:spPr>
+          <a:xfrm>
+            <a:off x="914400" y="2587752"/>
+            <a:ext cx="16459200" cy="6830568"/>
           </a:xfrm>
           <a:prstGeom prst="rect">
             <a:avLst/>
@@ -16264,71 +16232,14 @@
               </a:defRPr>
             </a:pPr>
             <a:r>
-              <a:t>IKA'Y PAGMAMASDAN SA DAKONG BANAL</a:t>
-            </a:r>
-          </a:p>
-          <a:p>
-            <a:pPr algn="ctr">
-              <a:lnSpc>
-                <a:spcPct val="105000"/>
-              </a:lnSpc>
-              <a:spcAft>
-                <a:spcPts val="1000"/>
-              </a:spcAft>
-              <a:defRPr sz="5500" b="1" i="0">
-                <a:solidFill>
-                  <a:srgbClr val="FFFFFF"/>
-                </a:solidFill>
-                <a:latin typeface="Arial Black"/>
-              </a:defRPr>
-            </a:pPr>
-            <a:r>
-              <a:t>NANG MAKITA KO ANG 'YONG PAGKARANGAL</a:t>
-            </a:r>
-          </a:p>
-          <a:p>
-            <a:pPr algn="ctr">
-              <a:lnSpc>
-                <a:spcPct val="105000"/>
-              </a:lnSpc>
-              <a:spcAft>
-                <a:spcPts val="1000"/>
-              </a:spcAft>
-              <a:defRPr sz="5500" b="1" i="0">
-                <a:solidFill>
-                  <a:srgbClr val="FFFFFF"/>
-                </a:solidFill>
-                <a:latin typeface="Arial Black"/>
-              </a:defRPr>
-            </a:pPr>
-            <a:r>
-              <a:t>DADALANGIN AKONG NAKATAAS AKING KAMAY</a:t>
-            </a:r>
-          </a:p>
-          <a:p>
-            <a:pPr algn="ctr">
-              <a:lnSpc>
-                <a:spcPct val="105000"/>
-              </a:lnSpc>
-              <a:spcAft>
-                <a:spcPts val="1000"/>
-              </a:spcAft>
-              <a:defRPr sz="5500" b="1" i="0">
-                <a:solidFill>
-                  <a:srgbClr val="FFFFFF"/>
-                </a:solidFill>
-                <a:latin typeface="Arial Black"/>
-              </a:defRPr>
-            </a:pPr>
-            <a:r>
-              <a:t>MAGAGALAK NA AAWIT NG PAPURING IAALAY</a:t>
-            </a:r>
-          </a:p>
-        </p:txBody>
-      </p:sp>
-      <p:sp>
-        <p:nvSpPr>
-          <p:cNvPr id="5" name="TextBox 4"/>
+              <a:t>(NO LYRICS IN LIBRARY FOR THIS HYMN.)</a:t>
+            </a:r>
+          </a:p>
+        </p:txBody>
+      </p:sp>
+      <p:sp>
+        <p:nvSpPr>
+          <p:cNvPr id="6" name="TextBox 5"/>
           <p:cNvSpPr txBox="1"/>
           <p:nvPr/>
         </p:nvSpPr>
@@ -16373,7 +16284,7 @@
               </a:defRPr>
             </a:pPr>
             <a:r>
-              <a:t>Communion (1)</a:t>
+              <a:t>Communion (2)</a:t>
             </a:r>
           </a:p>
         </p:txBody>
@@ -16392,7 +16303,7 @@
     <p:bg>
       <p:bgPr>
         <a:solidFill>
-          <a:srgbClr val="000000"/>
+          <a:srgbClr val="211733"/>
         </a:solidFill>
         <a:effectLst/>
       </p:bgPr>
@@ -16473,92 +16384,70 @@
         <p:spPr>
           <a:xfrm>
             <a:off x="914400" y="1490472"/>
-            <a:ext cx="16459200" cy="7927848"/>
-          </a:xfrm>
-          <a:prstGeom prst="rect">
-            <a:avLst/>
-          </a:prstGeom>
-          <a:noFill/>
-        </p:spPr>
-        <p:txBody>
-          <a:bodyPr wrap="square" lIns="109728" rIns="109728" tIns="73152" bIns="73152" anchor="ctr">
-            <a:noAutofit/>
-          </a:bodyPr>
-          <a:lstStyle/>
-          <a:p>
-            <a:pPr algn="ctr">
-              <a:lnSpc>
-                <a:spcPct val="105000"/>
-              </a:lnSpc>
-              <a:spcAft>
-                <a:spcPts val="1000"/>
-              </a:spcAft>
-              <a:defRPr sz="5500" b="1" i="0">
-                <a:solidFill>
-                  <a:srgbClr val="FFFFFF"/>
-                </a:solidFill>
-                <a:latin typeface="Arial Black"/>
-              </a:defRPr>
-            </a:pPr>
-            <a:r>
-              <a:t>GUNITA KO'Y IKAW HABANG NAHIHIMLAY</a:t>
-            </a:r>
-          </a:p>
-          <a:p>
-            <a:pPr algn="ctr">
-              <a:lnSpc>
-                <a:spcPct val="105000"/>
-              </a:lnSpc>
-              <a:spcAft>
-                <a:spcPts val="1000"/>
-              </a:spcAft>
-              <a:defRPr sz="5500" b="1" i="0">
-                <a:solidFill>
-                  <a:srgbClr val="FFFFFF"/>
-                </a:solidFill>
-                <a:latin typeface="Arial Black"/>
-              </a:defRPr>
-            </a:pPr>
-            <a:r>
-              <a:t>PAGKAT ANG TULONG MO SA TUWINA'Y TAGLAY</a:t>
-            </a:r>
-          </a:p>
-          <a:p>
-            <a:pPr algn="ctr">
-              <a:lnSpc>
-                <a:spcPct val="105000"/>
-              </a:lnSpc>
-              <a:spcAft>
-                <a:spcPts val="1000"/>
-              </a:spcAft>
-              <a:defRPr sz="5500" b="1" i="0">
-                <a:solidFill>
-                  <a:srgbClr val="FFFFFF"/>
-                </a:solidFill>
-                <a:latin typeface="Arial Black"/>
-              </a:defRPr>
-            </a:pPr>
-            <a:r>
-              <a:t>SA LILIM NG IYONG MGA PAKPAK</a:t>
-            </a:r>
-          </a:p>
-          <a:p>
-            <a:pPr algn="ctr">
-              <a:lnSpc>
-                <a:spcPct val="105000"/>
-              </a:lnSpc>
-              <a:spcAft>
-                <a:spcPts val="1000"/>
-              </a:spcAft>
-              <a:defRPr sz="5500" b="1" i="0">
-                <a:solidFill>
-                  <a:srgbClr val="FFFFFF"/>
-                </a:solidFill>
-                <a:latin typeface="Arial Black"/>
-              </a:defRPr>
-            </a:pPr>
-            <a:r>
-              <a:t>UMAAWIT AKONG BUONG GALAK</a:t>
+            <a:ext cx="16459200" cy="7790688"/>
+          </a:xfrm>
+          <a:prstGeom prst="rect">
+            <a:avLst/>
+          </a:prstGeom>
+          <a:noFill/>
+        </p:spPr>
+        <p:txBody>
+          <a:bodyPr wrap="square" lIns="109728" rIns="109728" tIns="73152" bIns="73152">
+            <a:noAutofit/>
+          </a:bodyPr>
+          <a:lstStyle/>
+          <a:p>
+            <a:pPr algn="ctr">
+              <a:spcBef>
+                <a:spcPts val="400"/>
+              </a:spcBef>
+              <a:spcAft>
+                <a:spcPts val="500"/>
+              </a:spcAft>
+              <a:defRPr sz="2000" b="1" i="0">
+                <a:solidFill>
+                  <a:srgbClr val="D8B4FE"/>
+                </a:solidFill>
+                <a:latin typeface="Georgia"/>
+              </a:defRPr>
+            </a:pPr>
+            <a:r>
+              <a:t>Priest: Let us pray.</a:t>
+            </a:r>
+          </a:p>
+          <a:p>
+            <a:pPr algn="ctr">
+              <a:spcAft>
+                <a:spcPts val="500"/>
+              </a:spcAft>
+              <a:defRPr sz="1500" b="0" i="1">
+                <a:solidFill>
+                  <a:srgbClr val="D8B4FE"/>
+                </a:solidFill>
+                <a:latin typeface="Georgia"/>
+              </a:defRPr>
+            </a:pPr>
+            <a:r>
+              <a:t>The Priest says the Post- Communion Prayer for the day in full from the Roman Missal. The people respond at the end.</a:t>
+            </a:r>
+          </a:p>
+          <a:p>
+            <a:pPr algn="ctr">
+              <a:spcBef>
+                <a:spcPts val="400"/>
+              </a:spcBef>
+              <a:spcAft>
+                <a:spcPts val="500"/>
+              </a:spcAft>
+              <a:defRPr sz="2000" b="1" i="0">
+                <a:solidFill>
+                  <a:srgbClr val="FFFFFF"/>
+                </a:solidFill>
+                <a:latin typeface="Georgia"/>
+              </a:defRPr>
+            </a:pPr>
+            <a:r>
+              <a:t>All: Amen.</a:t>
             </a:r>
           </a:p>
         </p:txBody>
@@ -16588,7 +16477,7 @@
             <a:pPr>
               <a:defRPr sz="1300" b="1" i="0">
                 <a:solidFill>
-                  <a:srgbClr val="8C8C91"/>
+                  <a:srgbClr val="F8C66A"/>
                 </a:solidFill>
                 <a:latin typeface="Georgia"/>
               </a:defRPr>
@@ -16604,13 +16493,13 @@
               </a:spcBef>
               <a:defRPr sz="1200" b="0" i="0">
                 <a:solidFill>
-                  <a:srgbClr val="FFCC4D"/>
-                </a:solidFill>
-                <a:latin typeface="Georgia"/>
-              </a:defRPr>
-            </a:pPr>
-            <a:r>
-              <a:t>Communion (1)</a:t>
+                  <a:srgbClr val="D8B4FE"/>
+                </a:solidFill>
+                <a:latin typeface="Georgia"/>
+              </a:defRPr>
+            </a:pPr>
+            <a:r>
+              <a:t>The Communion Rite</a:t>
             </a:r>
           </a:p>
         </p:txBody>
@@ -16626,10 +16515,350 @@
 <file path=ppt/slides/slide57.xml><?xml version="1.0" encoding="utf-8"?>
 <p:sld xmlns:a="http://schemas.openxmlformats.org/drawingml/2006/main" xmlns:p="http://schemas.openxmlformats.org/presentationml/2006/main" xmlns:r="http://schemas.openxmlformats.org/officeDocument/2006/relationships">
   <p:cSld>
+    <p:spTree>
+      <p:nvGrpSpPr>
+        <p:cNvPr id="1" name=""/>
+        <p:cNvGrpSpPr/>
+        <p:nvPr/>
+      </p:nvGrpSpPr>
+      <p:grpSpPr/>
+      <p:pic>
+        <p:nvPicPr>
+          <p:cNvPr id="2" name="Picture 1" descr="GFCC17May2026_Eastertide_16x9.png"/>
+          <p:cNvPicPr>
+            <a:picLocks noChangeAspect="1"/>
+          </p:cNvPicPr>
+          <p:nvPr/>
+        </p:nvPicPr>
+        <p:blipFill>
+          <a:blip r:embed="rId2"/>
+          <a:stretch>
+            <a:fillRect/>
+          </a:stretch>
+        </p:blipFill>
+        <p:spPr>
+          <a:xfrm>
+            <a:off x="0" y="0"/>
+            <a:ext cx="18288000" cy="10287000"/>
+          </a:xfrm>
+          <a:prstGeom prst="rect">
+            <a:avLst/>
+          </a:prstGeom>
+        </p:spPr>
+      </p:pic>
+      <p:pic>
+        <p:nvPicPr>
+          <p:cNvPr id="3" name="Picture 2" descr="community_logo.png"/>
+          <p:cNvPicPr>
+            <a:picLocks noChangeAspect="1"/>
+          </p:cNvPicPr>
+          <p:nvPr/>
+        </p:nvPicPr>
+        <p:blipFill>
+          <a:blip r:embed="rId3"/>
+          <a:stretch>
+            <a:fillRect/>
+          </a:stretch>
+        </p:blipFill>
+        <p:spPr>
+          <a:xfrm>
+            <a:off x="914400" y="256032"/>
+            <a:ext cx="387682" cy="384048"/>
+          </a:xfrm>
+          <a:prstGeom prst="rect">
+            <a:avLst/>
+          </a:prstGeom>
+        </p:spPr>
+      </p:pic>
+      <p:sp>
+        <p:nvSpPr>
+          <p:cNvPr id="4" name="TextBox 3"/>
+          <p:cNvSpPr txBox="1"/>
+          <p:nvPr/>
+        </p:nvSpPr>
+        <p:spPr>
+          <a:xfrm>
+            <a:off x="1430098" y="256032"/>
+            <a:ext cx="15943502" cy="384048"/>
+          </a:xfrm>
+          <a:prstGeom prst="rect">
+            <a:avLst/>
+          </a:prstGeom>
+          <a:noFill/>
+        </p:spPr>
+        <p:txBody>
+          <a:bodyPr wrap="square" lIns="109728" rIns="109728" tIns="73152" bIns="73152" anchor="ctr">
+            <a:noAutofit/>
+          </a:bodyPr>
+          <a:lstStyle/>
+          <a:p>
+            <a:pPr algn="l">
+              <a:defRPr sz="1500" b="1" i="0">
+                <a:solidFill>
+                  <a:srgbClr val="FFFFFF"/>
+                </a:solidFill>
+                <a:latin typeface="Georgia"/>
+              </a:defRPr>
+            </a:pPr>
+            <a:r>
+              <a:t>Gwangju Filipino Catholic Community</a:t>
+            </a:r>
+          </a:p>
+        </p:txBody>
+      </p:sp>
+      <p:sp>
+        <p:nvSpPr>
+          <p:cNvPr id="5" name="TextBox 4"/>
+          <p:cNvSpPr txBox="1"/>
+          <p:nvPr/>
+        </p:nvSpPr>
+        <p:spPr>
+          <a:xfrm>
+            <a:off x="914400" y="1810512"/>
+            <a:ext cx="16459200" cy="5943600"/>
+          </a:xfrm>
+          <a:prstGeom prst="rect">
+            <a:avLst/>
+          </a:prstGeom>
+          <a:noFill/>
+        </p:spPr>
+        <p:txBody>
+          <a:bodyPr wrap="square" lIns="109728" rIns="109728" tIns="73152" bIns="73152">
+            <a:noAutofit/>
+          </a:bodyPr>
+          <a:lstStyle/>
+          <a:p>
+            <a:pPr>
+              <a:spcAft>
+                <a:spcPts val="300"/>
+              </a:spcAft>
+              <a:defRPr sz="2100" b="1" i="0">
+                <a:solidFill>
+                  <a:srgbClr val="D8B4FE"/>
+                </a:solidFill>
+                <a:latin typeface="Georgia"/>
+              </a:defRPr>
+            </a:pPr>
+            <a:r>
+              <a:t>MASS CELEBRANT:</a:t>
+            </a:r>
+          </a:p>
+          <a:p>
+            <a:pPr>
+              <a:spcAft>
+                <a:spcPts val="300"/>
+              </a:spcAft>
+              <a:defRPr sz="2100" b="0" i="0">
+                <a:solidFill>
+                  <a:srgbClr val="FFFFFF"/>
+                </a:solidFill>
+                <a:latin typeface="Georgia"/>
+              </a:defRPr>
+            </a:pPr>
+            <a:r>
+              <a:t>Rev. Fr. Jonrey Lauron, RCJ</a:t>
+            </a:r>
+          </a:p>
+          <a:p>
+            <a:pPr>
+              <a:spcAft>
+                <a:spcPts val="300"/>
+              </a:spcAft>
+              <a:defRPr sz="2100" b="0" i="0">
+                <a:solidFill>
+                  <a:srgbClr val="FFFFFF"/>
+                </a:solidFill>
+                <a:latin typeface="Georgia"/>
+              </a:defRPr>
+            </a:pPr>
+          </a:p>
+          <a:p>
+            <a:pPr>
+              <a:spcAft>
+                <a:spcPts val="300"/>
+              </a:spcAft>
+              <a:defRPr sz="2100" b="0" i="0">
+                <a:solidFill>
+                  <a:srgbClr val="FFFFFF"/>
+                </a:solidFill>
+                <a:latin typeface="Georgia"/>
+              </a:defRPr>
+            </a:pPr>
+            <a:r>
+              <a:t>Gwangju</a:t>
+            </a:r>
+            <a:br/>
+            <a:r>
+              <a:t>Filipino</a:t>
+            </a:r>
+            <a:br/>
+            <a:r>
+              <a:t>Catholic</a:t>
+            </a:r>
+            <a:br/>
+            <a:r>
+              <a:t>Community</a:t>
+            </a:r>
+          </a:p>
+          <a:p>
+            <a:pPr>
+              <a:spcAft>
+                <a:spcPts val="300"/>
+              </a:spcAft>
+              <a:defRPr sz="2100" b="0" i="0">
+                <a:solidFill>
+                  <a:srgbClr val="FFFFFF"/>
+                </a:solidFill>
+                <a:latin typeface="Georgia"/>
+              </a:defRPr>
+            </a:pPr>
+          </a:p>
+          <a:p>
+            <a:pPr>
+              <a:spcAft>
+                <a:spcPts val="300"/>
+              </a:spcAft>
+              <a:defRPr sz="2100" b="0" i="0">
+                <a:solidFill>
+                  <a:srgbClr val="FFFFFF"/>
+                </a:solidFill>
+                <a:latin typeface="Georgia"/>
+              </a:defRPr>
+            </a:pPr>
+            <a:r>
+              <a:t>Gospel (Matthew 28:16-20)</a:t>
+            </a:r>
+          </a:p>
+          <a:p>
+            <a:pPr>
+              <a:spcAft>
+                <a:spcPts val="300"/>
+              </a:spcAft>
+              <a:defRPr sz="2100" b="0" i="0">
+                <a:solidFill>
+                  <a:srgbClr val="FFFFFF"/>
+                </a:solidFill>
+                <a:latin typeface="Georgia"/>
+              </a:defRPr>
+            </a:pPr>
+            <a:r>
+              <a:t>“All authority has been given to me in heaven and on earth.”</a:t>
+            </a:r>
+          </a:p>
+          <a:p>
+            <a:pPr>
+              <a:spcAft>
+                <a:spcPts val="300"/>
+              </a:spcAft>
+              <a:defRPr sz="2100" b="0" i="0">
+                <a:solidFill>
+                  <a:srgbClr val="FFFFFF"/>
+                </a:solidFill>
+                <a:latin typeface="Georgia"/>
+              </a:defRPr>
+            </a:pPr>
+          </a:p>
+          <a:p>
+            <a:pPr>
+              <a:spcAft>
+                <a:spcPts val="300"/>
+              </a:spcAft>
+              <a:defRPr sz="2100" b="0" i="0">
+                <a:solidFill>
+                  <a:srgbClr val="FFFFFF"/>
+                </a:solidFill>
+                <a:latin typeface="Georgia"/>
+              </a:defRPr>
+            </a:pPr>
+            <a:r>
+              <a:t>YEAR A</a:t>
+            </a:r>
+          </a:p>
+          <a:p>
+            <a:pPr>
+              <a:spcAft>
+                <a:spcPts val="300"/>
+              </a:spcAft>
+              <a:defRPr sz="2100" b="0" i="0">
+                <a:solidFill>
+                  <a:srgbClr val="FFFFFF"/>
+                </a:solidFill>
+                <a:latin typeface="Georgia"/>
+              </a:defRPr>
+            </a:pPr>
+            <a:r>
+              <a:t>2026-05-17 · Eastertide</a:t>
+            </a:r>
+          </a:p>
+        </p:txBody>
+      </p:sp>
+      <p:sp>
+        <p:nvSpPr>
+          <p:cNvPr id="6" name="TextBox 5"/>
+          <p:cNvSpPr txBox="1"/>
+          <p:nvPr/>
+        </p:nvSpPr>
+        <p:spPr>
+          <a:xfrm>
+            <a:off x="914400" y="9418320"/>
+            <a:ext cx="16459200" cy="777240"/>
+          </a:xfrm>
+          <a:prstGeom prst="rect">
+            <a:avLst/>
+          </a:prstGeom>
+          <a:noFill/>
+        </p:spPr>
+        <p:txBody>
+          <a:bodyPr wrap="square" lIns="109728" rIns="109728" tIns="73152" bIns="73152">
+            <a:noAutofit/>
+          </a:bodyPr>
+          <a:lstStyle/>
+          <a:p>
+            <a:pPr>
+              <a:defRPr sz="1300" b="1" i="0">
+                <a:solidFill>
+                  <a:srgbClr val="F8C66A"/>
+                </a:solidFill>
+                <a:latin typeface="Georgia"/>
+              </a:defRPr>
+            </a:pPr>
+            <a:r>
+              <a:t>Gwangju Filipino Catholic Community</a:t>
+            </a:r>
+          </a:p>
+          <a:p>
+            <a:pPr>
+              <a:spcBef>
+                <a:spcPts val="200"/>
+              </a:spcBef>
+              <a:defRPr sz="1200" b="0" i="0">
+                <a:solidFill>
+                  <a:srgbClr val="D8B4FE"/>
+                </a:solidFill>
+                <a:latin typeface="Georgia"/>
+              </a:defRPr>
+            </a:pPr>
+            <a:r>
+              <a:t>Mass poster / divider</a:t>
+            </a:r>
+          </a:p>
+        </p:txBody>
+      </p:sp>
+    </p:spTree>
+  </p:cSld>
+  <p:clrMapOvr>
+    <a:masterClrMapping/>
+  </p:clrMapOvr>
+</p:sld>
+</file>
+
+<file path=ppt/slides/slide58.xml><?xml version="1.0" encoding="utf-8"?>
+<p:sld xmlns:a="http://schemas.openxmlformats.org/drawingml/2006/main" xmlns:p="http://schemas.openxmlformats.org/presentationml/2006/main" xmlns:r="http://schemas.openxmlformats.org/officeDocument/2006/relationships">
+  <p:cSld>
     <p:bg>
       <p:bgPr>
         <a:solidFill>
-          <a:srgbClr val="000000"/>
+          <a:srgbClr val="211733"/>
         </a:solidFill>
         <a:effectLst/>
       </p:bgPr>
@@ -16710,92 +16939,64 @@
         <p:spPr>
           <a:xfrm>
             <a:off x="914400" y="1490472"/>
-            <a:ext cx="16459200" cy="7927848"/>
-          </a:xfrm>
-          <a:prstGeom prst="rect">
-            <a:avLst/>
-          </a:prstGeom>
-          <a:noFill/>
-        </p:spPr>
-        <p:txBody>
-          <a:bodyPr wrap="square" lIns="109728" rIns="109728" tIns="73152" bIns="73152" anchor="ctr">
-            <a:noAutofit/>
-          </a:bodyPr>
-          <a:lstStyle/>
-          <a:p>
-            <a:pPr algn="ctr">
-              <a:lnSpc>
-                <a:spcPct val="105000"/>
-              </a:lnSpc>
-              <a:spcAft>
-                <a:spcPts val="1000"/>
-              </a:spcAft>
-              <a:defRPr sz="5000" b="1" i="0">
-                <a:solidFill>
-                  <a:srgbClr val="FFFFFF"/>
-                </a:solidFill>
-                <a:latin typeface="Arial Black"/>
-              </a:defRPr>
-            </a:pPr>
-            <a:r>
-              <a:t>AKING KALULUWA'Y KUMAKAPIT SA 'YO</a:t>
-            </a:r>
-          </a:p>
-          <a:p>
-            <a:pPr algn="ctr">
-              <a:lnSpc>
-                <a:spcPct val="105000"/>
-              </a:lnSpc>
-              <a:spcAft>
-                <a:spcPts val="1000"/>
-              </a:spcAft>
-              <a:defRPr sz="5000" b="1" i="0">
-                <a:solidFill>
-                  <a:srgbClr val="FFFFFF"/>
-                </a:solidFill>
-                <a:latin typeface="Arial Black"/>
-              </a:defRPr>
-            </a:pPr>
-            <a:r>
-              <a:t>KALIGTASA'Y T'YAK KONG HAWAK MO AKO</a:t>
-            </a:r>
-          </a:p>
-          <a:p>
-            <a:pPr algn="ctr">
-              <a:lnSpc>
-                <a:spcPct val="105000"/>
-              </a:lnSpc>
-              <a:spcAft>
-                <a:spcPts val="1000"/>
-              </a:spcAft>
-              <a:defRPr sz="5000" b="1" i="0">
-                <a:solidFill>
-                  <a:srgbClr val="FFFFFF"/>
-                </a:solidFill>
-                <a:latin typeface="Arial Black"/>
-              </a:defRPr>
-            </a:pPr>
-            <a:r>
-              <a:t>MAGDIRIWANG ANG HARI ANG DIYOS S'YANG DAHILAN</a:t>
-            </a:r>
-          </a:p>
-          <a:p>
-            <a:pPr algn="ctr">
-              <a:lnSpc>
-                <a:spcPct val="105000"/>
-              </a:lnSpc>
-              <a:spcAft>
-                <a:spcPts val="1000"/>
-              </a:spcAft>
-              <a:defRPr sz="5000" b="1" i="0">
-                <a:solidFill>
-                  <a:srgbClr val="FFFFFF"/>
-                </a:solidFill>
-                <a:latin typeface="Arial Black"/>
-              </a:defRPr>
-            </a:pPr>
-            <a:r>
-              <a:t>ANG SA IYO AY NANGAKONG GALAK YAONG MAKAKAMTAN</a:t>
+            <a:ext cx="16459200" cy="7790688"/>
+          </a:xfrm>
+          <a:prstGeom prst="rect">
+            <a:avLst/>
+          </a:prstGeom>
+          <a:noFill/>
+        </p:spPr>
+        <p:txBody>
+          <a:bodyPr wrap="square" lIns="109728" rIns="109728" tIns="73152" bIns="73152">
+            <a:noAutofit/>
+          </a:bodyPr>
+          <a:lstStyle/>
+          <a:p>
+            <a:pPr algn="ctr">
+              <a:spcAft>
+                <a:spcPts val="500"/>
+              </a:spcAft>
+              <a:defRPr sz="1900" b="1" i="0">
+                <a:solidFill>
+                  <a:srgbClr val="FFFFFF"/>
+                </a:solidFill>
+                <a:latin typeface="Georgia"/>
+              </a:defRPr>
+            </a:pPr>
+            <a:r>
+              <a:t>MASS COLLECTION</a:t>
+            </a:r>
+          </a:p>
+          <a:p>
+            <a:pPr algn="ctr">
+              <a:spcAft>
+                <a:spcPts val="500"/>
+              </a:spcAft>
+              <a:defRPr sz="1500" b="0" i="1">
+                <a:solidFill>
+                  <a:srgbClr val="D8B4FE"/>
+                </a:solidFill>
+                <a:latin typeface="Georgia"/>
+              </a:defRPr>
+            </a:pPr>
+            <a:r>
+              <a:t>Thank you for your generosity.</a:t>
+            </a:r>
+          </a:p>
+          <a:p>
+            <a:pPr algn="ctr">
+              <a:spcAft>
+                <a:spcPts val="500"/>
+              </a:spcAft>
+              <a:defRPr sz="1500" b="0" i="1">
+                <a:solidFill>
+                  <a:srgbClr val="D8B4FE"/>
+                </a:solidFill>
+                <a:latin typeface="Georgia"/>
+              </a:defRPr>
+            </a:pPr>
+            <a:r>
+              <a:t>Date: Sunday, May 17, 2026</a:t>
             </a:r>
           </a:p>
         </p:txBody>
@@ -16825,7 +17026,7 @@
             <a:pPr>
               <a:defRPr sz="1300" b="1" i="0">
                 <a:solidFill>
-                  <a:srgbClr val="8C8C91"/>
+                  <a:srgbClr val="F8C66A"/>
                 </a:solidFill>
                 <a:latin typeface="Georgia"/>
               </a:defRPr>
@@ -16841,13 +17042,13 @@
               </a:spcBef>
               <a:defRPr sz="1200" b="0" i="0">
                 <a:solidFill>
-                  <a:srgbClr val="FFCC4D"/>
-                </a:solidFill>
-                <a:latin typeface="Georgia"/>
-              </a:defRPr>
-            </a:pPr>
-            <a:r>
-              <a:t>Communion (1)</a:t>
+                  <a:srgbClr val="D8B4FE"/>
+                </a:solidFill>
+                <a:latin typeface="Georgia"/>
+              </a:defRPr>
+            </a:pPr>
+            <a:r>
+              <a:t>Mass Collection</a:t>
             </a:r>
           </a:p>
         </p:txBody>
@@ -16860,13 +17061,13 @@
 </p:sld>
 </file>
 
-<file path=ppt/slides/slide58.xml><?xml version="1.0" encoding="utf-8"?>
+<file path=ppt/slides/slide59.xml><?xml version="1.0" encoding="utf-8"?>
 <p:sld xmlns:a="http://schemas.openxmlformats.org/drawingml/2006/main" xmlns:p="http://schemas.openxmlformats.org/presentationml/2006/main" xmlns:r="http://schemas.openxmlformats.org/officeDocument/2006/relationships">
   <p:cSld>
     <p:bg>
       <p:bgPr>
         <a:solidFill>
-          <a:srgbClr val="000000"/>
+          <a:srgbClr val="211733"/>
         </a:solidFill>
         <a:effectLst/>
       </p:bgPr>
@@ -16947,111 +17148,64 @@
         <p:spPr>
           <a:xfrm>
             <a:off x="914400" y="1490472"/>
-            <a:ext cx="16459200" cy="7927848"/>
-          </a:xfrm>
-          <a:prstGeom prst="rect">
-            <a:avLst/>
-          </a:prstGeom>
-          <a:noFill/>
-        </p:spPr>
-        <p:txBody>
-          <a:bodyPr wrap="square" lIns="109728" rIns="109728" tIns="73152" bIns="73152" anchor="ctr">
-            <a:noAutofit/>
-          </a:bodyPr>
-          <a:lstStyle/>
-          <a:p>
-            <a:pPr algn="ctr">
-              <a:lnSpc>
-                <a:spcPct val="105000"/>
-              </a:lnSpc>
-              <a:spcAft>
-                <a:spcPts val="1000"/>
-              </a:spcAft>
-              <a:defRPr sz="5500" b="1" i="0">
-                <a:solidFill>
-                  <a:srgbClr val="FFFFFF"/>
-                </a:solidFill>
-                <a:latin typeface="Arial Black"/>
-              </a:defRPr>
-            </a:pPr>
-            <a:r>
-              <a:t>VERSE 3 COPY</a:t>
-            </a:r>
-          </a:p>
-          <a:p>
-            <a:pPr algn="ctr">
-              <a:lnSpc>
-                <a:spcPct val="105000"/>
-              </a:lnSpc>
-              <a:spcAft>
-                <a:spcPts val="1000"/>
-              </a:spcAft>
-              <a:defRPr sz="5500" b="1" i="0">
-                <a:solidFill>
-                  <a:srgbClr val="FFFFFF"/>
-                </a:solidFill>
-                <a:latin typeface="Arial Black"/>
-              </a:defRPr>
-            </a:pPr>
-            <a:r>
-              <a:t>GUNITA KO'Y IKAW HABANG NAHIHIMLAY</a:t>
-            </a:r>
-          </a:p>
-          <a:p>
-            <a:pPr algn="ctr">
-              <a:lnSpc>
-                <a:spcPct val="105000"/>
-              </a:lnSpc>
-              <a:spcAft>
-                <a:spcPts val="1000"/>
-              </a:spcAft>
-              <a:defRPr sz="5500" b="1" i="0">
-                <a:solidFill>
-                  <a:srgbClr val="FFFFFF"/>
-                </a:solidFill>
-                <a:latin typeface="Arial Black"/>
-              </a:defRPr>
-            </a:pPr>
-            <a:r>
-              <a:t>PAGKAT ANG TULONG MO SA TUWINA'Y TAGLAY</a:t>
-            </a:r>
-          </a:p>
-          <a:p>
-            <a:pPr algn="ctr">
-              <a:lnSpc>
-                <a:spcPct val="105000"/>
-              </a:lnSpc>
-              <a:spcAft>
-                <a:spcPts val="1000"/>
-              </a:spcAft>
-              <a:defRPr sz="5500" b="1" i="0">
-                <a:solidFill>
-                  <a:srgbClr val="FFFFFF"/>
-                </a:solidFill>
-                <a:latin typeface="Arial Black"/>
-              </a:defRPr>
-            </a:pPr>
-            <a:r>
-              <a:t>SA LILIM NG IYONG MGA PAKPAK</a:t>
-            </a:r>
-          </a:p>
-          <a:p>
-            <a:pPr algn="ctr">
-              <a:lnSpc>
-                <a:spcPct val="105000"/>
-              </a:lnSpc>
-              <a:spcAft>
-                <a:spcPts val="1000"/>
-              </a:spcAft>
-              <a:defRPr sz="5500" b="1" i="0">
-                <a:solidFill>
-                  <a:srgbClr val="FFFFFF"/>
-                </a:solidFill>
-                <a:latin typeface="Arial Black"/>
-              </a:defRPr>
-            </a:pPr>
-            <a:r>
-              <a:t>UMAAWIT AKONG BUONG GALAK</a:t>
+            <a:ext cx="16459200" cy="7790688"/>
+          </a:xfrm>
+          <a:prstGeom prst="rect">
+            <a:avLst/>
+          </a:prstGeom>
+          <a:noFill/>
+        </p:spPr>
+        <p:txBody>
+          <a:bodyPr wrap="square" lIns="109728" rIns="109728" tIns="73152" bIns="73152">
+            <a:noAutofit/>
+          </a:bodyPr>
+          <a:lstStyle/>
+          <a:p>
+            <a:pPr algn="ctr">
+              <a:spcAft>
+                <a:spcPts val="500"/>
+              </a:spcAft>
+              <a:defRPr sz="1900" b="1" i="0">
+                <a:solidFill>
+                  <a:srgbClr val="FFFFFF"/>
+                </a:solidFill>
+                <a:latin typeface="Georgia"/>
+              </a:defRPr>
+            </a:pPr>
+            <a:r>
+              <a:t>FOOD SPONSORS</a:t>
+            </a:r>
+          </a:p>
+          <a:p>
+            <a:pPr algn="ctr">
+              <a:spcAft>
+                <a:spcPts val="500"/>
+              </a:spcAft>
+              <a:defRPr sz="1500" b="0" i="1">
+                <a:solidFill>
+                  <a:srgbClr val="D8B4FE"/>
+                </a:solidFill>
+                <a:latin typeface="Georgia"/>
+              </a:defRPr>
+            </a:pPr>
+            <a:r>
+              <a:t>The community thanks our food sponsors.</a:t>
+            </a:r>
+          </a:p>
+          <a:p>
+            <a:pPr algn="ctr">
+              <a:spcAft>
+                <a:spcPts val="500"/>
+              </a:spcAft>
+              <a:defRPr sz="1500" b="0" i="1">
+                <a:solidFill>
+                  <a:srgbClr val="D8B4FE"/>
+                </a:solidFill>
+                <a:latin typeface="Georgia"/>
+              </a:defRPr>
+            </a:pPr>
+            <a:r>
+              <a:t>(No sponsors listed — add names in Mass Builder.)</a:t>
             </a:r>
           </a:p>
         </p:txBody>
@@ -17081,7 +17235,7 @@
             <a:pPr>
               <a:defRPr sz="1300" b="1" i="0">
                 <a:solidFill>
-                  <a:srgbClr val="8C8C91"/>
+                  <a:srgbClr val="F8C66A"/>
                 </a:solidFill>
                 <a:latin typeface="Georgia"/>
               </a:defRPr>
@@ -17097,212 +17251,13 @@
               </a:spcBef>
               <a:defRPr sz="1200" b="0" i="0">
                 <a:solidFill>
-                  <a:srgbClr val="FFCC4D"/>
-                </a:solidFill>
-                <a:latin typeface="Georgia"/>
-              </a:defRPr>
-            </a:pPr>
-            <a:r>
-              <a:t>Communion (1)</a:t>
-            </a:r>
-          </a:p>
-        </p:txBody>
-      </p:sp>
-    </p:spTree>
-  </p:cSld>
-  <p:clrMapOvr>
-    <a:masterClrMapping/>
-  </p:clrMapOvr>
-</p:sld>
-</file>
-
-<file path=ppt/slides/slide59.xml><?xml version="1.0" encoding="utf-8"?>
-<p:sld xmlns:a="http://schemas.openxmlformats.org/drawingml/2006/main" xmlns:p="http://schemas.openxmlformats.org/presentationml/2006/main" xmlns:r="http://schemas.openxmlformats.org/officeDocument/2006/relationships">
-  <p:cSld>
-    <p:bg>
-      <p:bgPr>
-        <a:solidFill>
-          <a:srgbClr val="000000"/>
-        </a:solidFill>
-        <a:effectLst/>
-      </p:bgPr>
-    </p:bg>
-    <p:spTree>
-      <p:nvGrpSpPr>
-        <p:cNvPr id="1" name=""/>
-        <p:cNvGrpSpPr/>
-        <p:nvPr/>
-      </p:nvGrpSpPr>
-      <p:grpSpPr/>
-      <p:pic>
-        <p:nvPicPr>
-          <p:cNvPr id="2" name="Picture 1" descr="community_logo.png"/>
-          <p:cNvPicPr>
-            <a:picLocks noChangeAspect="1"/>
-          </p:cNvPicPr>
-          <p:nvPr/>
-        </p:nvPicPr>
-        <p:blipFill>
-          <a:blip r:embed="rId2"/>
-          <a:stretch>
-            <a:fillRect/>
-          </a:stretch>
-        </p:blipFill>
-        <p:spPr>
-          <a:xfrm>
-            <a:off x="914400" y="256032"/>
-            <a:ext cx="387682" cy="384048"/>
-          </a:xfrm>
-          <a:prstGeom prst="rect">
-            <a:avLst/>
-          </a:prstGeom>
-        </p:spPr>
-      </p:pic>
-      <p:sp>
-        <p:nvSpPr>
-          <p:cNvPr id="3" name="TextBox 2"/>
-          <p:cNvSpPr txBox="1"/>
-          <p:nvPr/>
-        </p:nvSpPr>
-        <p:spPr>
-          <a:xfrm>
-            <a:off x="1430098" y="256032"/>
-            <a:ext cx="15943502" cy="384048"/>
-          </a:xfrm>
-          <a:prstGeom prst="rect">
-            <a:avLst/>
-          </a:prstGeom>
-          <a:noFill/>
-        </p:spPr>
-        <p:txBody>
-          <a:bodyPr wrap="square" lIns="109728" rIns="109728" tIns="73152" bIns="73152" anchor="ctr">
-            <a:noAutofit/>
-          </a:bodyPr>
-          <a:lstStyle/>
-          <a:p>
-            <a:pPr algn="l">
-              <a:defRPr sz="1500" b="1" i="0">
-                <a:solidFill>
-                  <a:srgbClr val="FFFFFF"/>
-                </a:solidFill>
-                <a:latin typeface="Georgia"/>
-              </a:defRPr>
-            </a:pPr>
-            <a:r>
-              <a:t>Gwangju Filipino Catholic Community</a:t>
-            </a:r>
-          </a:p>
-        </p:txBody>
-      </p:sp>
-      <p:sp>
-        <p:nvSpPr>
-          <p:cNvPr id="4" name="TextBox 3"/>
-          <p:cNvSpPr txBox="1"/>
-          <p:nvPr/>
-        </p:nvSpPr>
-        <p:spPr>
-          <a:xfrm>
-            <a:off x="914400" y="1490472"/>
-            <a:ext cx="16459200" cy="7927848"/>
-          </a:xfrm>
-          <a:prstGeom prst="rect">
-            <a:avLst/>
-          </a:prstGeom>
-          <a:noFill/>
-        </p:spPr>
-        <p:txBody>
-          <a:bodyPr wrap="square" lIns="109728" rIns="109728" tIns="73152" bIns="73152" anchor="ctr">
-            <a:noAutofit/>
-          </a:bodyPr>
-          <a:lstStyle/>
-          <a:p>
-            <a:pPr algn="ctr">
-              <a:lnSpc>
-                <a:spcPct val="105000"/>
-              </a:lnSpc>
-              <a:spcAft>
-                <a:spcPts val="1000"/>
-              </a:spcAft>
-              <a:defRPr sz="5500" b="1" i="0">
-                <a:solidFill>
-                  <a:srgbClr val="FFFFFF"/>
-                </a:solidFill>
-                <a:latin typeface="Arial Black"/>
-              </a:defRPr>
-            </a:pPr>
-            <a:r>
-              <a:t>UMAAWIT, UMAAWIT</a:t>
-            </a:r>
-          </a:p>
-          <a:p>
-            <a:pPr algn="ctr">
-              <a:lnSpc>
-                <a:spcPct val="105000"/>
-              </a:lnSpc>
-              <a:spcAft>
-                <a:spcPts val="1000"/>
-              </a:spcAft>
-              <a:defRPr sz="5500" b="1" i="0">
-                <a:solidFill>
-                  <a:srgbClr val="FFFFFF"/>
-                </a:solidFill>
-                <a:latin typeface="Arial Black"/>
-              </a:defRPr>
-            </a:pPr>
-            <a:r>
-              <a:t>UMAAWIT AKONG BUONG GALAK</a:t>
-            </a:r>
-          </a:p>
-        </p:txBody>
-      </p:sp>
-      <p:sp>
-        <p:nvSpPr>
-          <p:cNvPr id="5" name="TextBox 4"/>
-          <p:cNvSpPr txBox="1"/>
-          <p:nvPr/>
-        </p:nvSpPr>
-        <p:spPr>
-          <a:xfrm>
-            <a:off x="914400" y="9418320"/>
-            <a:ext cx="16459200" cy="777240"/>
-          </a:xfrm>
-          <a:prstGeom prst="rect">
-            <a:avLst/>
-          </a:prstGeom>
-          <a:noFill/>
-        </p:spPr>
-        <p:txBody>
-          <a:bodyPr wrap="square" lIns="109728" rIns="109728" tIns="73152" bIns="73152">
-            <a:noAutofit/>
-          </a:bodyPr>
-          <a:lstStyle/>
-          <a:p>
-            <a:pPr>
-              <a:defRPr sz="1300" b="1" i="0">
-                <a:solidFill>
-                  <a:srgbClr val="8C8C91"/>
-                </a:solidFill>
-                <a:latin typeface="Georgia"/>
-              </a:defRPr>
-            </a:pPr>
-            <a:r>
-              <a:t>Gwangju Filipino Catholic Community</a:t>
-            </a:r>
-          </a:p>
-          <a:p>
-            <a:pPr>
-              <a:spcBef>
-                <a:spcPts val="200"/>
-              </a:spcBef>
-              <a:defRPr sz="1200" b="0" i="0">
-                <a:solidFill>
-                  <a:srgbClr val="FFCC4D"/>
-                </a:solidFill>
-                <a:latin typeface="Georgia"/>
-              </a:defRPr>
-            </a:pPr>
-            <a:r>
-              <a:t>Communion (1)</a:t>
+                  <a:srgbClr val="D8B4FE"/>
+                </a:solidFill>
+                <a:latin typeface="Georgia"/>
+              </a:defRPr>
+            </a:pPr>
+            <a:r>
+              <a:t>Food Sponsors</a:t>
             </a:r>
           </a:p>
         </p:txBody>
@@ -17558,7 +17513,7 @@
     <p:bg>
       <p:bgPr>
         <a:solidFill>
-          <a:srgbClr val="000000"/>
+          <a:srgbClr val="211733"/>
         </a:solidFill>
         <a:effectLst/>
       </p:bgPr>
@@ -17639,7 +17594,7 @@
         <p:spPr>
           <a:xfrm>
             <a:off x="914400" y="1490472"/>
-            <a:ext cx="16459200" cy="868680"/>
+            <a:ext cx="16459200" cy="7790688"/>
           </a:xfrm>
           <a:prstGeom prst="rect">
             <a:avLst/>
@@ -17653,15 +17608,34 @@
           <a:lstStyle/>
           <a:p>
             <a:pPr algn="ctr">
-              <a:defRPr sz="3800" b="1" i="0">
-                <a:solidFill>
-                  <a:srgbClr val="FFCC4D"/>
-                </a:solidFill>
-                <a:latin typeface="Georgia"/>
-              </a:defRPr>
-            </a:pPr>
-            <a:r>
-              <a:t>Eat This Bread</a:t>
+              <a:spcAft>
+                <a:spcPts val="500"/>
+              </a:spcAft>
+              <a:defRPr sz="1900" b="1" i="0">
+                <a:solidFill>
+                  <a:srgbClr val="FFFFFF"/>
+                </a:solidFill>
+                <a:latin typeface="Georgia"/>
+              </a:defRPr>
+            </a:pPr>
+            <a:r>
+              <a:t>CHURCH ANNOUNCEMENTS</a:t>
+            </a:r>
+          </a:p>
+          <a:p>
+            <a:pPr algn="ctr">
+              <a:spcAft>
+                <a:spcPts val="500"/>
+              </a:spcAft>
+              <a:defRPr sz="1500" b="0" i="1">
+                <a:solidFill>
+                  <a:srgbClr val="D8B4FE"/>
+                </a:solidFill>
+                <a:latin typeface="Georgia"/>
+              </a:defRPr>
+            </a:pPr>
+            <a:r>
+              <a:t>Insert bulletin points with complete sentences on the following slides or edit this deck.</a:t>
             </a:r>
           </a:p>
         </p:txBody>
@@ -17669,143 +17643,6 @@
       <p:sp>
         <p:nvSpPr>
           <p:cNvPr id="5" name="TextBox 4"/>
-          <p:cNvSpPr txBox="1"/>
-          <p:nvPr/>
-        </p:nvSpPr>
-        <p:spPr>
-          <a:xfrm>
-            <a:off x="914400" y="2587752"/>
-            <a:ext cx="16459200" cy="6830568"/>
-          </a:xfrm>
-          <a:prstGeom prst="rect">
-            <a:avLst/>
-          </a:prstGeom>
-          <a:noFill/>
-        </p:spPr>
-        <p:txBody>
-          <a:bodyPr wrap="square" lIns="109728" rIns="109728" tIns="73152" bIns="73152" anchor="ctr">
-            <a:noAutofit/>
-          </a:bodyPr>
-          <a:lstStyle/>
-          <a:p>
-            <a:pPr algn="ctr">
-              <a:lnSpc>
-                <a:spcPct val="105000"/>
-              </a:lnSpc>
-              <a:spcAft>
-                <a:spcPts val="1000"/>
-              </a:spcAft>
-              <a:defRPr sz="5500" b="1" i="0">
-                <a:solidFill>
-                  <a:srgbClr val="FFFFFF"/>
-                </a:solidFill>
-                <a:latin typeface="Arial Black"/>
-              </a:defRPr>
-            </a:pPr>
-            <a:r>
-              <a:t>EAT THIS BREAD,</a:t>
-            </a:r>
-          </a:p>
-          <a:p>
-            <a:pPr algn="ctr">
-              <a:lnSpc>
-                <a:spcPct val="105000"/>
-              </a:lnSpc>
-              <a:spcAft>
-                <a:spcPts val="1000"/>
-              </a:spcAft>
-              <a:defRPr sz="5500" b="1" i="0">
-                <a:solidFill>
-                  <a:srgbClr val="FFFFFF"/>
-                </a:solidFill>
-                <a:latin typeface="Arial Black"/>
-              </a:defRPr>
-            </a:pPr>
-            <a:r>
-              <a:t>DRINK THIS CUP,</a:t>
-            </a:r>
-          </a:p>
-          <a:p>
-            <a:pPr algn="ctr">
-              <a:lnSpc>
-                <a:spcPct val="105000"/>
-              </a:lnSpc>
-              <a:spcAft>
-                <a:spcPts val="1000"/>
-              </a:spcAft>
-              <a:defRPr sz="5500" b="1" i="0">
-                <a:solidFill>
-                  <a:srgbClr val="FFFFFF"/>
-                </a:solidFill>
-                <a:latin typeface="Arial Black"/>
-              </a:defRPr>
-            </a:pPr>
-            <a:r>
-              <a:t>COME TO ME AND NEVER BE HUNGRY.</a:t>
-            </a:r>
-          </a:p>
-          <a:p>
-            <a:pPr algn="ctr">
-              <a:lnSpc>
-                <a:spcPct val="105000"/>
-              </a:lnSpc>
-              <a:spcAft>
-                <a:spcPts val="1000"/>
-              </a:spcAft>
-              <a:defRPr sz="5500" b="1" i="0">
-                <a:solidFill>
-                  <a:srgbClr val="FFFFFF"/>
-                </a:solidFill>
-                <a:latin typeface="Arial Black"/>
-              </a:defRPr>
-            </a:pPr>
-            <a:r>
-              <a:t>EAT THIS BREAD,</a:t>
-            </a:r>
-          </a:p>
-          <a:p>
-            <a:pPr algn="ctr">
-              <a:lnSpc>
-                <a:spcPct val="105000"/>
-              </a:lnSpc>
-              <a:spcAft>
-                <a:spcPts val="1000"/>
-              </a:spcAft>
-              <a:defRPr sz="5500" b="1" i="0">
-                <a:solidFill>
-                  <a:srgbClr val="FFFFFF"/>
-                </a:solidFill>
-                <a:latin typeface="Arial Black"/>
-              </a:defRPr>
-            </a:pPr>
-            <a:r>
-              <a:t>DRINK THIS CUP,</a:t>
-            </a:r>
-          </a:p>
-          <a:p>
-            <a:pPr algn="ctr">
-              <a:lnSpc>
-                <a:spcPct val="105000"/>
-              </a:lnSpc>
-              <a:spcAft>
-                <a:spcPts val="1000"/>
-              </a:spcAft>
-              <a:defRPr sz="5500" b="1" i="0">
-                <a:solidFill>
-                  <a:srgbClr val="FFFFFF"/>
-                </a:solidFill>
-                <a:latin typeface="Arial Black"/>
-              </a:defRPr>
-            </a:pPr>
-            <a:r>
-              <a:t>TRUST IN ME AND YOU WILL NOT THIRST.</a:t>
-            </a:r>
-          </a:p>
-        </p:txBody>
-      </p:sp>
-      <p:sp>
-        <p:nvSpPr>
-          <p:cNvPr id="6" name="TextBox 5"/>
           <p:cNvSpPr txBox="1"/>
           <p:nvPr/>
         </p:nvSpPr>
@@ -17828,7 +17665,7 @@
             <a:pPr>
               <a:defRPr sz="1300" b="1" i="0">
                 <a:solidFill>
-                  <a:srgbClr val="8C8C91"/>
+                  <a:srgbClr val="F8C66A"/>
                 </a:solidFill>
                 <a:latin typeface="Georgia"/>
               </a:defRPr>
@@ -17844,13 +17681,13 @@
               </a:spcBef>
               <a:defRPr sz="1200" b="0" i="0">
                 <a:solidFill>
-                  <a:srgbClr val="FFCC4D"/>
-                </a:solidFill>
-                <a:latin typeface="Georgia"/>
-              </a:defRPr>
-            </a:pPr>
-            <a:r>
-              <a:t>Communion (2)</a:t>
+                  <a:srgbClr val="D8B4FE"/>
+                </a:solidFill>
+                <a:latin typeface="Georgia"/>
+              </a:defRPr>
+            </a:pPr>
+            <a:r>
+              <a:t>Announcements</a:t>
             </a:r>
           </a:p>
         </p:txBody>
@@ -17864,6 +17701,860 @@
 </file>
 
 <file path=ppt/slides/slide61.xml><?xml version="1.0" encoding="utf-8"?>
+<p:sld xmlns:a="http://schemas.openxmlformats.org/drawingml/2006/main" xmlns:p="http://schemas.openxmlformats.org/presentationml/2006/main" xmlns:r="http://schemas.openxmlformats.org/officeDocument/2006/relationships">
+  <p:cSld>
+    <p:bg>
+      <p:bgPr>
+        <a:solidFill>
+          <a:srgbClr val="211733"/>
+        </a:solidFill>
+        <a:effectLst/>
+      </p:bgPr>
+    </p:bg>
+    <p:spTree>
+      <p:nvGrpSpPr>
+        <p:cNvPr id="1" name=""/>
+        <p:cNvGrpSpPr/>
+        <p:nvPr/>
+      </p:nvGrpSpPr>
+      <p:grpSpPr/>
+      <p:pic>
+        <p:nvPicPr>
+          <p:cNvPr id="2" name="Picture 1" descr="community_logo.png"/>
+          <p:cNvPicPr>
+            <a:picLocks noChangeAspect="1"/>
+          </p:cNvPicPr>
+          <p:nvPr/>
+        </p:nvPicPr>
+        <p:blipFill>
+          <a:blip r:embed="rId2"/>
+          <a:stretch>
+            <a:fillRect/>
+          </a:stretch>
+        </p:blipFill>
+        <p:spPr>
+          <a:xfrm>
+            <a:off x="914400" y="256032"/>
+            <a:ext cx="387682" cy="384048"/>
+          </a:xfrm>
+          <a:prstGeom prst="rect">
+            <a:avLst/>
+          </a:prstGeom>
+        </p:spPr>
+      </p:pic>
+      <p:sp>
+        <p:nvSpPr>
+          <p:cNvPr id="3" name="TextBox 2"/>
+          <p:cNvSpPr txBox="1"/>
+          <p:nvPr/>
+        </p:nvSpPr>
+        <p:spPr>
+          <a:xfrm>
+            <a:off x="1430098" y="256032"/>
+            <a:ext cx="15943502" cy="384048"/>
+          </a:xfrm>
+          <a:prstGeom prst="rect">
+            <a:avLst/>
+          </a:prstGeom>
+          <a:noFill/>
+        </p:spPr>
+        <p:txBody>
+          <a:bodyPr wrap="square" lIns="109728" rIns="109728" tIns="73152" bIns="73152" anchor="ctr">
+            <a:noAutofit/>
+          </a:bodyPr>
+          <a:lstStyle/>
+          <a:p>
+            <a:pPr algn="l">
+              <a:defRPr sz="1500" b="1" i="0">
+                <a:solidFill>
+                  <a:srgbClr val="FFFFFF"/>
+                </a:solidFill>
+                <a:latin typeface="Georgia"/>
+              </a:defRPr>
+            </a:pPr>
+            <a:r>
+              <a:t>Gwangju Filipino Catholic Community</a:t>
+            </a:r>
+          </a:p>
+        </p:txBody>
+      </p:sp>
+      <p:sp>
+        <p:nvSpPr>
+          <p:cNvPr id="4" name="TextBox 3"/>
+          <p:cNvSpPr txBox="1"/>
+          <p:nvPr/>
+        </p:nvSpPr>
+        <p:spPr>
+          <a:xfrm>
+            <a:off x="914400" y="1490472"/>
+            <a:ext cx="16459200" cy="7790688"/>
+          </a:xfrm>
+          <a:prstGeom prst="rect">
+            <a:avLst/>
+          </a:prstGeom>
+          <a:noFill/>
+        </p:spPr>
+        <p:txBody>
+          <a:bodyPr wrap="square" lIns="109728" rIns="109728" tIns="73152" bIns="73152">
+            <a:noAutofit/>
+          </a:bodyPr>
+          <a:lstStyle/>
+          <a:p>
+            <a:pPr algn="ctr">
+              <a:spcAft>
+                <a:spcPts val="500"/>
+              </a:spcAft>
+              <a:defRPr sz="1900" b="1" i="0">
+                <a:solidFill>
+                  <a:srgbClr val="FFFFFF"/>
+                </a:solidFill>
+                <a:latin typeface="Georgia"/>
+              </a:defRPr>
+            </a:pPr>
+            <a:r>
+              <a:t>Welcome newcomers!</a:t>
+            </a:r>
+          </a:p>
+          <a:p>
+            <a:pPr algn="ctr">
+              <a:spcAft>
+                <a:spcPts val="500"/>
+              </a:spcAft>
+              <a:defRPr sz="1500" b="0" i="1">
+                <a:solidFill>
+                  <a:srgbClr val="D8B4FE"/>
+                </a:solidFill>
+                <a:latin typeface="Georgia"/>
+              </a:defRPr>
+            </a:pPr>
+            <a:r>
+              <a:t>Photo collage optional.</a:t>
+            </a:r>
+          </a:p>
+        </p:txBody>
+      </p:sp>
+      <p:sp>
+        <p:nvSpPr>
+          <p:cNvPr id="5" name="TextBox 4"/>
+          <p:cNvSpPr txBox="1"/>
+          <p:nvPr/>
+        </p:nvSpPr>
+        <p:spPr>
+          <a:xfrm>
+            <a:off x="914400" y="9418320"/>
+            <a:ext cx="16459200" cy="777240"/>
+          </a:xfrm>
+          <a:prstGeom prst="rect">
+            <a:avLst/>
+          </a:prstGeom>
+          <a:noFill/>
+        </p:spPr>
+        <p:txBody>
+          <a:bodyPr wrap="square" lIns="109728" rIns="109728" tIns="73152" bIns="73152">
+            <a:noAutofit/>
+          </a:bodyPr>
+          <a:lstStyle/>
+          <a:p>
+            <a:pPr>
+              <a:defRPr sz="1300" b="1" i="0">
+                <a:solidFill>
+                  <a:srgbClr val="F8C66A"/>
+                </a:solidFill>
+                <a:latin typeface="Georgia"/>
+              </a:defRPr>
+            </a:pPr>
+            <a:r>
+              <a:t>Gwangju Filipino Catholic Community</a:t>
+            </a:r>
+          </a:p>
+          <a:p>
+            <a:pPr>
+              <a:spcBef>
+                <a:spcPts val="200"/>
+              </a:spcBef>
+              <a:defRPr sz="1200" b="0" i="0">
+                <a:solidFill>
+                  <a:srgbClr val="D8B4FE"/>
+                </a:solidFill>
+                <a:latin typeface="Georgia"/>
+              </a:defRPr>
+            </a:pPr>
+            <a:r>
+              <a:t>Announcements</a:t>
+            </a:r>
+          </a:p>
+        </p:txBody>
+      </p:sp>
+    </p:spTree>
+  </p:cSld>
+  <p:clrMapOvr>
+    <a:masterClrMapping/>
+  </p:clrMapOvr>
+</p:sld>
+</file>
+
+<file path=ppt/slides/slide62.xml><?xml version="1.0" encoding="utf-8"?>
+<p:sld xmlns:a="http://schemas.openxmlformats.org/drawingml/2006/main" xmlns:p="http://schemas.openxmlformats.org/presentationml/2006/main" xmlns:r="http://schemas.openxmlformats.org/officeDocument/2006/relationships">
+  <p:cSld>
+    <p:bg>
+      <p:bgPr>
+        <a:solidFill>
+          <a:srgbClr val="211733"/>
+        </a:solidFill>
+        <a:effectLst/>
+      </p:bgPr>
+    </p:bg>
+    <p:spTree>
+      <p:nvGrpSpPr>
+        <p:cNvPr id="1" name=""/>
+        <p:cNvGrpSpPr/>
+        <p:nvPr/>
+      </p:nvGrpSpPr>
+      <p:grpSpPr/>
+      <p:pic>
+        <p:nvPicPr>
+          <p:cNvPr id="2" name="Picture 1" descr="community_logo.png"/>
+          <p:cNvPicPr>
+            <a:picLocks noChangeAspect="1"/>
+          </p:cNvPicPr>
+          <p:nvPr/>
+        </p:nvPicPr>
+        <p:blipFill>
+          <a:blip r:embed="rId2"/>
+          <a:stretch>
+            <a:fillRect/>
+          </a:stretch>
+        </p:blipFill>
+        <p:spPr>
+          <a:xfrm>
+            <a:off x="914400" y="256032"/>
+            <a:ext cx="387682" cy="384048"/>
+          </a:xfrm>
+          <a:prstGeom prst="rect">
+            <a:avLst/>
+          </a:prstGeom>
+        </p:spPr>
+      </p:pic>
+      <p:sp>
+        <p:nvSpPr>
+          <p:cNvPr id="3" name="TextBox 2"/>
+          <p:cNvSpPr txBox="1"/>
+          <p:nvPr/>
+        </p:nvSpPr>
+        <p:spPr>
+          <a:xfrm>
+            <a:off x="1430098" y="256032"/>
+            <a:ext cx="15943502" cy="384048"/>
+          </a:xfrm>
+          <a:prstGeom prst="rect">
+            <a:avLst/>
+          </a:prstGeom>
+          <a:noFill/>
+        </p:spPr>
+        <p:txBody>
+          <a:bodyPr wrap="square" lIns="109728" rIns="109728" tIns="73152" bIns="73152" anchor="ctr">
+            <a:noAutofit/>
+          </a:bodyPr>
+          <a:lstStyle/>
+          <a:p>
+            <a:pPr algn="l">
+              <a:defRPr sz="1500" b="1" i="0">
+                <a:solidFill>
+                  <a:srgbClr val="FFFFFF"/>
+                </a:solidFill>
+                <a:latin typeface="Georgia"/>
+              </a:defRPr>
+            </a:pPr>
+            <a:r>
+              <a:t>Gwangju Filipino Catholic Community</a:t>
+            </a:r>
+          </a:p>
+        </p:txBody>
+      </p:sp>
+      <p:sp>
+        <p:nvSpPr>
+          <p:cNvPr id="4" name="TextBox 3"/>
+          <p:cNvSpPr txBox="1"/>
+          <p:nvPr/>
+        </p:nvSpPr>
+        <p:spPr>
+          <a:xfrm>
+            <a:off x="914400" y="1490472"/>
+            <a:ext cx="16459200" cy="7790688"/>
+          </a:xfrm>
+          <a:prstGeom prst="rect">
+            <a:avLst/>
+          </a:prstGeom>
+          <a:noFill/>
+        </p:spPr>
+        <p:txBody>
+          <a:bodyPr wrap="square" lIns="109728" rIns="109728" tIns="73152" bIns="73152">
+            <a:noAutofit/>
+          </a:bodyPr>
+          <a:lstStyle/>
+          <a:p>
+            <a:pPr algn="ctr">
+              <a:spcAft>
+                <a:spcPts val="500"/>
+              </a:spcAft>
+              <a:defRPr sz="1900" b="1" i="0">
+                <a:solidFill>
+                  <a:srgbClr val="FFFFFF"/>
+                </a:solidFill>
+                <a:latin typeface="Georgia"/>
+              </a:defRPr>
+            </a:pPr>
+            <a:r>
+              <a:t>Sacrament of Confession</a:t>
+            </a:r>
+          </a:p>
+          <a:p>
+            <a:pPr algn="ctr">
+              <a:spcAft>
+                <a:spcPts val="500"/>
+              </a:spcAft>
+              <a:defRPr sz="1500" b="0" i="1">
+                <a:solidFill>
+                  <a:srgbClr val="D8B4FE"/>
+                </a:solidFill>
+                <a:latin typeface="Georgia"/>
+              </a:defRPr>
+            </a:pPr>
+            <a:r>
+              <a:t>The Lord never tires of forgiving us; we are the ones who tire of seeking his mercy. — Pope Francis</a:t>
+            </a:r>
+          </a:p>
+        </p:txBody>
+      </p:sp>
+      <p:sp>
+        <p:nvSpPr>
+          <p:cNvPr id="5" name="TextBox 4"/>
+          <p:cNvSpPr txBox="1"/>
+          <p:nvPr/>
+        </p:nvSpPr>
+        <p:spPr>
+          <a:xfrm>
+            <a:off x="914400" y="9418320"/>
+            <a:ext cx="16459200" cy="777240"/>
+          </a:xfrm>
+          <a:prstGeom prst="rect">
+            <a:avLst/>
+          </a:prstGeom>
+          <a:noFill/>
+        </p:spPr>
+        <p:txBody>
+          <a:bodyPr wrap="square" lIns="109728" rIns="109728" tIns="73152" bIns="73152">
+            <a:noAutofit/>
+          </a:bodyPr>
+          <a:lstStyle/>
+          <a:p>
+            <a:pPr>
+              <a:defRPr sz="1300" b="1" i="0">
+                <a:solidFill>
+                  <a:srgbClr val="F8C66A"/>
+                </a:solidFill>
+                <a:latin typeface="Georgia"/>
+              </a:defRPr>
+            </a:pPr>
+            <a:r>
+              <a:t>Gwangju Filipino Catholic Community</a:t>
+            </a:r>
+          </a:p>
+          <a:p>
+            <a:pPr>
+              <a:spcBef>
+                <a:spcPts val="200"/>
+              </a:spcBef>
+              <a:defRPr sz="1200" b="0" i="0">
+                <a:solidFill>
+                  <a:srgbClr val="D8B4FE"/>
+                </a:solidFill>
+                <a:latin typeface="Georgia"/>
+              </a:defRPr>
+            </a:pPr>
+            <a:r>
+              <a:t>Announcements</a:t>
+            </a:r>
+          </a:p>
+        </p:txBody>
+      </p:sp>
+    </p:spTree>
+  </p:cSld>
+  <p:clrMapOvr>
+    <a:masterClrMapping/>
+  </p:clrMapOvr>
+</p:sld>
+</file>
+
+<file path=ppt/slides/slide63.xml><?xml version="1.0" encoding="utf-8"?>
+<p:sld xmlns:a="http://schemas.openxmlformats.org/drawingml/2006/main" xmlns:p="http://schemas.openxmlformats.org/presentationml/2006/main" xmlns:r="http://schemas.openxmlformats.org/officeDocument/2006/relationships">
+  <p:cSld>
+    <p:bg>
+      <p:bgPr>
+        <a:solidFill>
+          <a:srgbClr val="211733"/>
+        </a:solidFill>
+        <a:effectLst/>
+      </p:bgPr>
+    </p:bg>
+    <p:spTree>
+      <p:nvGrpSpPr>
+        <p:cNvPr id="1" name=""/>
+        <p:cNvGrpSpPr/>
+        <p:nvPr/>
+      </p:nvGrpSpPr>
+      <p:grpSpPr/>
+      <p:pic>
+        <p:nvPicPr>
+          <p:cNvPr id="2" name="Picture 1" descr="community_logo.png"/>
+          <p:cNvPicPr>
+            <a:picLocks noChangeAspect="1"/>
+          </p:cNvPicPr>
+          <p:nvPr/>
+        </p:nvPicPr>
+        <p:blipFill>
+          <a:blip r:embed="rId2"/>
+          <a:stretch>
+            <a:fillRect/>
+          </a:stretch>
+        </p:blipFill>
+        <p:spPr>
+          <a:xfrm>
+            <a:off x="914400" y="256032"/>
+            <a:ext cx="387682" cy="384048"/>
+          </a:xfrm>
+          <a:prstGeom prst="rect">
+            <a:avLst/>
+          </a:prstGeom>
+        </p:spPr>
+      </p:pic>
+      <p:sp>
+        <p:nvSpPr>
+          <p:cNvPr id="3" name="TextBox 2"/>
+          <p:cNvSpPr txBox="1"/>
+          <p:nvPr/>
+        </p:nvSpPr>
+        <p:spPr>
+          <a:xfrm>
+            <a:off x="1430098" y="256032"/>
+            <a:ext cx="15943502" cy="384048"/>
+          </a:xfrm>
+          <a:prstGeom prst="rect">
+            <a:avLst/>
+          </a:prstGeom>
+          <a:noFill/>
+        </p:spPr>
+        <p:txBody>
+          <a:bodyPr wrap="square" lIns="109728" rIns="109728" tIns="73152" bIns="73152" anchor="ctr">
+            <a:noAutofit/>
+          </a:bodyPr>
+          <a:lstStyle/>
+          <a:p>
+            <a:pPr algn="l">
+              <a:defRPr sz="1500" b="1" i="0">
+                <a:solidFill>
+                  <a:srgbClr val="FFFFFF"/>
+                </a:solidFill>
+                <a:latin typeface="Georgia"/>
+              </a:defRPr>
+            </a:pPr>
+            <a:r>
+              <a:t>Gwangju Filipino Catholic Community</a:t>
+            </a:r>
+          </a:p>
+        </p:txBody>
+      </p:sp>
+      <p:sp>
+        <p:nvSpPr>
+          <p:cNvPr id="4" name="TextBox 3"/>
+          <p:cNvSpPr txBox="1"/>
+          <p:nvPr/>
+        </p:nvSpPr>
+        <p:spPr>
+          <a:xfrm>
+            <a:off x="914400" y="1490472"/>
+            <a:ext cx="16459200" cy="7790688"/>
+          </a:xfrm>
+          <a:prstGeom prst="rect">
+            <a:avLst/>
+          </a:prstGeom>
+          <a:noFill/>
+        </p:spPr>
+        <p:txBody>
+          <a:bodyPr wrap="square" lIns="109728" rIns="109728" tIns="73152" bIns="73152">
+            <a:noAutofit/>
+          </a:bodyPr>
+          <a:lstStyle/>
+          <a:p>
+            <a:pPr algn="ctr">
+              <a:spcAft>
+                <a:spcPts val="500"/>
+              </a:spcAft>
+              <a:defRPr sz="1900" b="1" i="0">
+                <a:solidFill>
+                  <a:srgbClr val="FFFFFF"/>
+                </a:solidFill>
+                <a:latin typeface="Georgia"/>
+              </a:defRPr>
+            </a:pPr>
+            <a:r>
+              <a:t>Updates and Announcements</a:t>
+            </a:r>
+          </a:p>
+          <a:p>
+            <a:pPr algn="ctr">
+              <a:spcAft>
+                <a:spcPts val="500"/>
+              </a:spcAft>
+              <a:defRPr sz="1500" b="0" i="1">
+                <a:solidFill>
+                  <a:srgbClr val="D8B4FE"/>
+                </a:solidFill>
+                <a:latin typeface="Georgia"/>
+              </a:defRPr>
+            </a:pPr>
+            <a:r>
+              <a:t>Name your community page and invitation to follow in full; add a QR code to the slide master if you wish.</a:t>
+            </a:r>
+          </a:p>
+        </p:txBody>
+      </p:sp>
+      <p:sp>
+        <p:nvSpPr>
+          <p:cNvPr id="5" name="TextBox 4"/>
+          <p:cNvSpPr txBox="1"/>
+          <p:nvPr/>
+        </p:nvSpPr>
+        <p:spPr>
+          <a:xfrm>
+            <a:off x="914400" y="9418320"/>
+            <a:ext cx="16459200" cy="777240"/>
+          </a:xfrm>
+          <a:prstGeom prst="rect">
+            <a:avLst/>
+          </a:prstGeom>
+          <a:noFill/>
+        </p:spPr>
+        <p:txBody>
+          <a:bodyPr wrap="square" lIns="109728" rIns="109728" tIns="73152" bIns="73152">
+            <a:noAutofit/>
+          </a:bodyPr>
+          <a:lstStyle/>
+          <a:p>
+            <a:pPr>
+              <a:defRPr sz="1300" b="1" i="0">
+                <a:solidFill>
+                  <a:srgbClr val="F8C66A"/>
+                </a:solidFill>
+                <a:latin typeface="Georgia"/>
+              </a:defRPr>
+            </a:pPr>
+            <a:r>
+              <a:t>Gwangju Filipino Catholic Community</a:t>
+            </a:r>
+          </a:p>
+          <a:p>
+            <a:pPr>
+              <a:spcBef>
+                <a:spcPts val="200"/>
+              </a:spcBef>
+              <a:defRPr sz="1200" b="0" i="0">
+                <a:solidFill>
+                  <a:srgbClr val="D8B4FE"/>
+                </a:solidFill>
+                <a:latin typeface="Georgia"/>
+              </a:defRPr>
+            </a:pPr>
+            <a:r>
+              <a:t>Announcements</a:t>
+            </a:r>
+          </a:p>
+        </p:txBody>
+      </p:sp>
+    </p:spTree>
+  </p:cSld>
+  <p:clrMapOvr>
+    <a:masterClrMapping/>
+  </p:clrMapOvr>
+</p:sld>
+</file>
+
+<file path=ppt/slides/slide64.xml><?xml version="1.0" encoding="utf-8"?>
+<p:sld xmlns:a="http://schemas.openxmlformats.org/drawingml/2006/main" xmlns:p="http://schemas.openxmlformats.org/presentationml/2006/main" xmlns:r="http://schemas.openxmlformats.org/officeDocument/2006/relationships">
+  <p:cSld>
+    <p:bg>
+      <p:bgPr>
+        <a:solidFill>
+          <a:srgbClr val="211733"/>
+        </a:solidFill>
+        <a:effectLst/>
+      </p:bgPr>
+    </p:bg>
+    <p:spTree>
+      <p:nvGrpSpPr>
+        <p:cNvPr id="1" name=""/>
+        <p:cNvGrpSpPr/>
+        <p:nvPr/>
+      </p:nvGrpSpPr>
+      <p:grpSpPr/>
+      <p:pic>
+        <p:nvPicPr>
+          <p:cNvPr id="2" name="Picture 1" descr="community_logo.png"/>
+          <p:cNvPicPr>
+            <a:picLocks noChangeAspect="1"/>
+          </p:cNvPicPr>
+          <p:nvPr/>
+        </p:nvPicPr>
+        <p:blipFill>
+          <a:blip r:embed="rId2"/>
+          <a:stretch>
+            <a:fillRect/>
+          </a:stretch>
+        </p:blipFill>
+        <p:spPr>
+          <a:xfrm>
+            <a:off x="914400" y="256032"/>
+            <a:ext cx="387682" cy="384048"/>
+          </a:xfrm>
+          <a:prstGeom prst="rect">
+            <a:avLst/>
+          </a:prstGeom>
+        </p:spPr>
+      </p:pic>
+      <p:sp>
+        <p:nvSpPr>
+          <p:cNvPr id="3" name="TextBox 2"/>
+          <p:cNvSpPr txBox="1"/>
+          <p:nvPr/>
+        </p:nvSpPr>
+        <p:spPr>
+          <a:xfrm>
+            <a:off x="1430098" y="256032"/>
+            <a:ext cx="15943502" cy="384048"/>
+          </a:xfrm>
+          <a:prstGeom prst="rect">
+            <a:avLst/>
+          </a:prstGeom>
+          <a:noFill/>
+        </p:spPr>
+        <p:txBody>
+          <a:bodyPr wrap="square" lIns="109728" rIns="109728" tIns="73152" bIns="73152" anchor="ctr">
+            <a:noAutofit/>
+          </a:bodyPr>
+          <a:lstStyle/>
+          <a:p>
+            <a:pPr algn="l">
+              <a:defRPr sz="1500" b="1" i="0">
+                <a:solidFill>
+                  <a:srgbClr val="FFFFFF"/>
+                </a:solidFill>
+                <a:latin typeface="Georgia"/>
+              </a:defRPr>
+            </a:pPr>
+            <a:r>
+              <a:t>Gwangju Filipino Catholic Community</a:t>
+            </a:r>
+          </a:p>
+        </p:txBody>
+      </p:sp>
+      <p:sp>
+        <p:nvSpPr>
+          <p:cNvPr id="4" name="TextBox 3"/>
+          <p:cNvSpPr txBox="1"/>
+          <p:nvPr/>
+        </p:nvSpPr>
+        <p:spPr>
+          <a:xfrm>
+            <a:off x="914400" y="1490472"/>
+            <a:ext cx="16459200" cy="7790688"/>
+          </a:xfrm>
+          <a:prstGeom prst="rect">
+            <a:avLst/>
+          </a:prstGeom>
+          <a:noFill/>
+        </p:spPr>
+        <p:txBody>
+          <a:bodyPr wrap="square" lIns="109728" rIns="109728" tIns="73152" bIns="73152">
+            <a:noAutofit/>
+          </a:bodyPr>
+          <a:lstStyle/>
+          <a:p>
+            <a:pPr algn="ctr">
+              <a:spcBef>
+                <a:spcPts val="400"/>
+              </a:spcBef>
+              <a:spcAft>
+                <a:spcPts val="500"/>
+              </a:spcAft>
+              <a:defRPr sz="2000" b="1" i="0">
+                <a:solidFill>
+                  <a:srgbClr val="D8B4FE"/>
+                </a:solidFill>
+                <a:latin typeface="Georgia"/>
+              </a:defRPr>
+            </a:pPr>
+            <a:r>
+              <a:t>Priest: The Lord be with you.</a:t>
+            </a:r>
+          </a:p>
+          <a:p>
+            <a:pPr algn="ctr">
+              <a:spcBef>
+                <a:spcPts val="400"/>
+              </a:spcBef>
+              <a:spcAft>
+                <a:spcPts val="500"/>
+              </a:spcAft>
+              <a:defRPr sz="2000" b="1" i="0">
+                <a:solidFill>
+                  <a:srgbClr val="FFFFFF"/>
+                </a:solidFill>
+                <a:latin typeface="Georgia"/>
+              </a:defRPr>
+            </a:pPr>
+            <a:r>
+              <a:t>All: And with your spirit.</a:t>
+            </a:r>
+          </a:p>
+          <a:p>
+            <a:pPr algn="ctr">
+              <a:spcBef>
+                <a:spcPts val="400"/>
+              </a:spcBef>
+              <a:spcAft>
+                <a:spcPts val="500"/>
+              </a:spcAft>
+              <a:defRPr sz="2000" b="1" i="0">
+                <a:solidFill>
+                  <a:srgbClr val="D8B4FE"/>
+                </a:solidFill>
+                <a:latin typeface="Georgia"/>
+              </a:defRPr>
+            </a:pPr>
+            <a:r>
+              <a:t>Priest: May almighty God bless you, the Father, and the Son, and the Holy Spirit.</a:t>
+            </a:r>
+          </a:p>
+          <a:p>
+            <a:pPr algn="ctr">
+              <a:spcBef>
+                <a:spcPts val="400"/>
+              </a:spcBef>
+              <a:spcAft>
+                <a:spcPts val="500"/>
+              </a:spcAft>
+              <a:defRPr sz="2000" b="1" i="0">
+                <a:solidFill>
+                  <a:srgbClr val="FFFFFF"/>
+                </a:solidFill>
+                <a:latin typeface="Georgia"/>
+              </a:defRPr>
+            </a:pPr>
+            <a:r>
+              <a:t>All: Amen.</a:t>
+            </a:r>
+          </a:p>
+          <a:p>
+            <a:pPr algn="ctr">
+              <a:spcBef>
+                <a:spcPts val="400"/>
+              </a:spcBef>
+              <a:spcAft>
+                <a:spcPts val="500"/>
+              </a:spcAft>
+              <a:defRPr sz="2000" b="1" i="0">
+                <a:solidFill>
+                  <a:srgbClr val="D8B4FE"/>
+                </a:solidFill>
+                <a:latin typeface="Georgia"/>
+              </a:defRPr>
+            </a:pPr>
+            <a:r>
+              <a:t>Priest: Go in peace, glorifying the Lord by your life.</a:t>
+            </a:r>
+          </a:p>
+          <a:p>
+            <a:pPr algn="ctr">
+              <a:spcBef>
+                <a:spcPts val="400"/>
+              </a:spcBef>
+              <a:spcAft>
+                <a:spcPts val="500"/>
+              </a:spcAft>
+              <a:defRPr sz="2000" b="1" i="0">
+                <a:solidFill>
+                  <a:srgbClr val="FFFFFF"/>
+                </a:solidFill>
+                <a:latin typeface="Georgia"/>
+              </a:defRPr>
+            </a:pPr>
+            <a:r>
+              <a:t>All: Thanks be to God.</a:t>
+            </a:r>
+          </a:p>
+        </p:txBody>
+      </p:sp>
+      <p:sp>
+        <p:nvSpPr>
+          <p:cNvPr id="5" name="TextBox 4"/>
+          <p:cNvSpPr txBox="1"/>
+          <p:nvPr/>
+        </p:nvSpPr>
+        <p:spPr>
+          <a:xfrm>
+            <a:off x="914400" y="9418320"/>
+            <a:ext cx="16459200" cy="777240"/>
+          </a:xfrm>
+          <a:prstGeom prst="rect">
+            <a:avLst/>
+          </a:prstGeom>
+          <a:noFill/>
+        </p:spPr>
+        <p:txBody>
+          <a:bodyPr wrap="square" lIns="109728" rIns="109728" tIns="73152" bIns="73152">
+            <a:noAutofit/>
+          </a:bodyPr>
+          <a:lstStyle/>
+          <a:p>
+            <a:pPr>
+              <a:defRPr sz="1300" b="1" i="0">
+                <a:solidFill>
+                  <a:srgbClr val="F8C66A"/>
+                </a:solidFill>
+                <a:latin typeface="Georgia"/>
+              </a:defRPr>
+            </a:pPr>
+            <a:r>
+              <a:t>Gwangju Filipino Catholic Community</a:t>
+            </a:r>
+          </a:p>
+          <a:p>
+            <a:pPr>
+              <a:spcBef>
+                <a:spcPts val="200"/>
+              </a:spcBef>
+              <a:defRPr sz="1200" b="0" i="0">
+                <a:solidFill>
+                  <a:srgbClr val="D8B4FE"/>
+                </a:solidFill>
+                <a:latin typeface="Georgia"/>
+              </a:defRPr>
+            </a:pPr>
+            <a:r>
+              <a:t>Final Blessing</a:t>
+            </a:r>
+          </a:p>
+        </p:txBody>
+      </p:sp>
+    </p:spTree>
+  </p:cSld>
+  <p:clrMapOvr>
+    <a:masterClrMapping/>
+  </p:clrMapOvr>
+</p:sld>
+</file>
+
+<file path=ppt/slides/slide65.xml><?xml version="1.0" encoding="utf-8"?>
 <p:sld xmlns:a="http://schemas.openxmlformats.org/drawingml/2006/main" xmlns:p="http://schemas.openxmlformats.org/presentationml/2006/main" xmlns:r="http://schemas.openxmlformats.org/officeDocument/2006/relationships">
   <p:cSld>
     <p:bg>
@@ -17950,7 +18641,43 @@
         <p:spPr>
           <a:xfrm>
             <a:off x="914400" y="1490472"/>
-            <a:ext cx="16459200" cy="7927848"/>
+            <a:ext cx="16459200" cy="868680"/>
+          </a:xfrm>
+          <a:prstGeom prst="rect">
+            <a:avLst/>
+          </a:prstGeom>
+          <a:noFill/>
+        </p:spPr>
+        <p:txBody>
+          <a:bodyPr wrap="square" lIns="109728" rIns="109728" tIns="73152" bIns="73152">
+            <a:noAutofit/>
+          </a:bodyPr>
+          <a:lstStyle/>
+          <a:p>
+            <a:pPr algn="ctr">
+              <a:defRPr sz="3800" b="1" i="0">
+                <a:solidFill>
+                  <a:srgbClr val="FFCC4D"/>
+                </a:solidFill>
+                <a:latin typeface="Georgia"/>
+              </a:defRPr>
+            </a:pPr>
+            <a:r>
+              <a:t>Alleluia! Sing to Jesus</a:t>
+            </a:r>
+          </a:p>
+        </p:txBody>
+      </p:sp>
+      <p:sp>
+        <p:nvSpPr>
+          <p:cNvPr id="5" name="TextBox 4"/>
+          <p:cNvSpPr txBox="1"/>
+          <p:nvPr/>
+        </p:nvSpPr>
+        <p:spPr>
+          <a:xfrm>
+            <a:off x="914400" y="2587752"/>
+            <a:ext cx="16459200" cy="6830568"/>
           </a:xfrm>
           <a:prstGeom prst="rect">
             <a:avLst/>
@@ -17970,7 +18697,7 @@
               <a:spcAft>
                 <a:spcPts val="1000"/>
               </a:spcAft>
-              <a:defRPr sz="5000" b="1" i="0">
+              <a:defRPr sz="5500" b="1" i="0">
                 <a:solidFill>
                   <a:srgbClr val="FFFFFF"/>
                 </a:solidFill>
@@ -17978,7 +18705,7 @@
               </a:defRPr>
             </a:pPr>
             <a:r>
-              <a:t>IF YOU EAT THIS BREAD,</a:t>
+              <a:t>ALLELUIA! SING TO JESUS!</a:t>
             </a:r>
           </a:p>
           <a:p>
@@ -17989,7 +18716,7 @@
               <a:spcAft>
                 <a:spcPts val="1000"/>
               </a:spcAft>
-              <a:defRPr sz="5000" b="1" i="0">
+              <a:defRPr sz="5500" b="1" i="0">
                 <a:solidFill>
                   <a:srgbClr val="FFFFFF"/>
                 </a:solidFill>
@@ -17997,7 +18724,7 @@
               </a:defRPr>
             </a:pPr>
             <a:r>
-              <a:t>IF YOU DRINK THIS CUP,</a:t>
+              <a:t>HIS THE SCEPTER, HIS THE THRONE;</a:t>
             </a:r>
           </a:p>
           <a:p>
@@ -18008,7 +18735,7 @@
               <a:spcAft>
                 <a:spcPts val="1000"/>
               </a:spcAft>
-              <a:defRPr sz="5000" b="1" i="0">
+              <a:defRPr sz="5500" b="1" i="0">
                 <a:solidFill>
                   <a:srgbClr val="FFFFFF"/>
                 </a:solidFill>
@@ -18016,14 +18743,33 @@
               </a:defRPr>
             </a:pPr>
             <a:r>
-              <a:t>YOU WILL HAVE ETERNAL LIFE, ETERNAL LIFE.</a:t>
-            </a:r>
-          </a:p>
-        </p:txBody>
-      </p:sp>
-      <p:sp>
-        <p:nvSpPr>
-          <p:cNvPr id="5" name="TextBox 4"/>
+              <a:t>ALLELUIA! HIS THE TRIUMPH,</a:t>
+            </a:r>
+          </a:p>
+          <a:p>
+            <a:pPr algn="ctr">
+              <a:lnSpc>
+                <a:spcPct val="105000"/>
+              </a:lnSpc>
+              <a:spcAft>
+                <a:spcPts val="1000"/>
+              </a:spcAft>
+              <a:defRPr sz="5500" b="1" i="0">
+                <a:solidFill>
+                  <a:srgbClr val="FFFFFF"/>
+                </a:solidFill>
+                <a:latin typeface="Arial Black"/>
+              </a:defRPr>
+            </a:pPr>
+            <a:r>
+              <a:t>HIS THE VICTORY ALONE.</a:t>
+            </a:r>
+          </a:p>
+        </p:txBody>
+      </p:sp>
+      <p:sp>
+        <p:nvSpPr>
+          <p:cNvPr id="6" name="TextBox 5"/>
           <p:cNvSpPr txBox="1"/>
           <p:nvPr/>
         </p:nvSpPr>
@@ -18068,7 +18814,7 @@
               </a:defRPr>
             </a:pPr>
             <a:r>
-              <a:t>Communion (2)</a:t>
+              <a:t>Recessional</a:t>
             </a:r>
           </a:p>
         </p:txBody>
@@ -18081,7 +18827,7 @@
 </p:sld>
 </file>
 
-<file path=ppt/slides/slide62.xml><?xml version="1.0" encoding="utf-8"?>
+<file path=ppt/slides/slide66.xml><?xml version="1.0" encoding="utf-8"?>
 <p:sld xmlns:a="http://schemas.openxmlformats.org/drawingml/2006/main" xmlns:p="http://schemas.openxmlformats.org/presentationml/2006/main" xmlns:r="http://schemas.openxmlformats.org/officeDocument/2006/relationships">
   <p:cSld>
     <p:bg>
@@ -18196,7 +18942,7 @@
               </a:defRPr>
             </a:pPr>
             <a:r>
-              <a:t>EAT THIS BREAD,</a:t>
+              <a:t>HARK! THE SONGS OF PEACEFUL ZION</a:t>
             </a:r>
           </a:p>
           <a:p>
@@ -18215,7 +18961,7 @@
               </a:defRPr>
             </a:pPr>
             <a:r>
-              <a:t>DRINK THIS CUP,</a:t>
+              <a:t>THUNDER LIKE A MIGHTY FLOOD;</a:t>
             </a:r>
           </a:p>
           <a:p>
@@ -18234,7 +18980,7 @@
               </a:defRPr>
             </a:pPr>
             <a:r>
-              <a:t>COME TO ME AND NEVER BE HUNGRY.</a:t>
+              <a:t>JESUS OUT OF EVERY NATION</a:t>
             </a:r>
           </a:p>
           <a:p>
@@ -18253,45 +18999,7 @@
               </a:defRPr>
             </a:pPr>
             <a:r>
-              <a:t>EAT THIS BREAD,</a:t>
-            </a:r>
-          </a:p>
-          <a:p>
-            <a:pPr algn="ctr">
-              <a:lnSpc>
-                <a:spcPct val="105000"/>
-              </a:lnSpc>
-              <a:spcAft>
-                <a:spcPts val="1000"/>
-              </a:spcAft>
-              <a:defRPr sz="5500" b="1" i="0">
-                <a:solidFill>
-                  <a:srgbClr val="FFFFFF"/>
-                </a:solidFill>
-                <a:latin typeface="Arial Black"/>
-              </a:defRPr>
-            </a:pPr>
-            <a:r>
-              <a:t>DRINK THIS CUP,</a:t>
-            </a:r>
-          </a:p>
-          <a:p>
-            <a:pPr algn="ctr">
-              <a:lnSpc>
-                <a:spcPct val="105000"/>
-              </a:lnSpc>
-              <a:spcAft>
-                <a:spcPts val="1000"/>
-              </a:spcAft>
-              <a:defRPr sz="5500" b="1" i="0">
-                <a:solidFill>
-                  <a:srgbClr val="FFFFFF"/>
-                </a:solidFill>
-                <a:latin typeface="Arial Black"/>
-              </a:defRPr>
-            </a:pPr>
-            <a:r>
-              <a:t>TRUST IN ME AND YOU WILL NOT THIRST.</a:t>
+              <a:t>HATH REDEEMED US BY HIS BLOOD.</a:t>
             </a:r>
           </a:p>
         </p:txBody>
@@ -18343,7 +19051,7 @@
               </a:defRPr>
             </a:pPr>
             <a:r>
-              <a:t>Communion (2)</a:t>
+              <a:t>Recessional</a:t>
             </a:r>
           </a:p>
         </p:txBody>
@@ -18356,7 +19064,7 @@
 </p:sld>
 </file>
 
-<file path=ppt/slides/slide63.xml><?xml version="1.0" encoding="utf-8"?>
+<file path=ppt/slides/slide67.xml><?xml version="1.0" encoding="utf-8"?>
 <p:sld xmlns:a="http://schemas.openxmlformats.org/drawingml/2006/main" xmlns:p="http://schemas.openxmlformats.org/presentationml/2006/main" xmlns:r="http://schemas.openxmlformats.org/officeDocument/2006/relationships">
   <p:cSld>
     <p:bg>
@@ -18471,7 +19179,7 @@
               </a:defRPr>
             </a:pPr>
             <a:r>
-              <a:t>COME! COME! COME TO THE FEAST OF LIFE.</a:t>
+              <a:t>ALLELUIA! NOT AS ORPHANS</a:t>
             </a:r>
           </a:p>
           <a:p>
@@ -18490,7 +19198,64 @@
               </a:defRPr>
             </a:pPr>
             <a:r>
-              <a:t>COME! COME! COME TO THE FATHER'S TABLE.</a:t>
+              <a:t>ARE WE LEFT IN SORROW SORE;</a:t>
+            </a:r>
+          </a:p>
+          <a:p>
+            <a:pPr algn="ctr">
+              <a:lnSpc>
+                <a:spcPct val="105000"/>
+              </a:lnSpc>
+              <a:spcAft>
+                <a:spcPts val="1000"/>
+              </a:spcAft>
+              <a:defRPr sz="5500" b="1" i="0">
+                <a:solidFill>
+                  <a:srgbClr val="FFFFFF"/>
+                </a:solidFill>
+                <a:latin typeface="Arial Black"/>
+              </a:defRPr>
+            </a:pPr>
+            <a:r>
+              <a:t>ONE WITH LOVE EXCEEDING FATHER,</a:t>
+            </a:r>
+          </a:p>
+          <a:p>
+            <a:pPr algn="ctr">
+              <a:lnSpc>
+                <a:spcPct val="105000"/>
+              </a:lnSpc>
+              <a:spcAft>
+                <a:spcPts val="1000"/>
+              </a:spcAft>
+              <a:defRPr sz="5500" b="1" i="0">
+                <a:solidFill>
+                  <a:srgbClr val="FFFFFF"/>
+                </a:solidFill>
+                <a:latin typeface="Arial Black"/>
+              </a:defRPr>
+            </a:pPr>
+            <a:r>
+              <a:t>ONE WITH LOVE EXCEEDING MOTHER,</a:t>
+            </a:r>
+          </a:p>
+          <a:p>
+            <a:pPr algn="ctr">
+              <a:lnSpc>
+                <a:spcPct val="105000"/>
+              </a:lnSpc>
+              <a:spcAft>
+                <a:spcPts val="1000"/>
+              </a:spcAft>
+              <a:defRPr sz="5500" b="1" i="0">
+                <a:solidFill>
+                  <a:srgbClr val="FFFFFF"/>
+                </a:solidFill>
+                <a:latin typeface="Arial Black"/>
+              </a:defRPr>
+            </a:pPr>
+            <a:r>
+              <a:t>HE HATH GONE BEFORE.</a:t>
             </a:r>
           </a:p>
         </p:txBody>
@@ -18542,7 +19307,7 @@
               </a:defRPr>
             </a:pPr>
             <a:r>
-              <a:t>Communion (2)</a:t>
+              <a:t>Recessional</a:t>
             </a:r>
           </a:p>
         </p:txBody>
@@ -18555,7 +19320,7 @@
 </p:sld>
 </file>
 
-<file path=ppt/slides/slide64.xml><?xml version="1.0" encoding="utf-8"?>
+<file path=ppt/slides/slide68.xml><?xml version="1.0" encoding="utf-8"?>
 <p:sld xmlns:a="http://schemas.openxmlformats.org/drawingml/2006/main" xmlns:p="http://schemas.openxmlformats.org/presentationml/2006/main" xmlns:r="http://schemas.openxmlformats.org/officeDocument/2006/relationships">
   <p:cSld>
     <p:bg>
@@ -18670,7 +19435,7 @@
               </a:defRPr>
             </a:pPr>
             <a:r>
-              <a:t>EAT THIS BREAD,</a:t>
+              <a:t>ALLELUIA! BREAD OF ANGELS,</a:t>
             </a:r>
           </a:p>
           <a:p>
@@ -18689,7 +19454,7 @@
               </a:defRPr>
             </a:pPr>
             <a:r>
-              <a:t>DRINK THIS CUP,</a:t>
+              <a:t>THOU ON EARTH OUR FOOD, OUR STAY;</a:t>
             </a:r>
           </a:p>
           <a:p>
@@ -18708,7 +19473,7 @@
               </a:defRPr>
             </a:pPr>
             <a:r>
-              <a:t>COME TO ME AND NEVER BE HUNGRY.</a:t>
+              <a:t>ALLELUIA! HERE THE SINFUL</a:t>
             </a:r>
           </a:p>
           <a:p>
@@ -18727,45 +19492,7 @@
               </a:defRPr>
             </a:pPr>
             <a:r>
-              <a:t>EAT THIS BREAD,</a:t>
-            </a:r>
-          </a:p>
-          <a:p>
-            <a:pPr algn="ctr">
-              <a:lnSpc>
-                <a:spcPct val="105000"/>
-              </a:lnSpc>
-              <a:spcAft>
-                <a:spcPts val="1000"/>
-              </a:spcAft>
-              <a:defRPr sz="5500" b="1" i="0">
-                <a:solidFill>
-                  <a:srgbClr val="FFFFFF"/>
-                </a:solidFill>
-                <a:latin typeface="Arial Black"/>
-              </a:defRPr>
-            </a:pPr>
-            <a:r>
-              <a:t>DRINK THIS CUP,</a:t>
-            </a:r>
-          </a:p>
-          <a:p>
-            <a:pPr algn="ctr">
-              <a:lnSpc>
-                <a:spcPct val="105000"/>
-              </a:lnSpc>
-              <a:spcAft>
-                <a:spcPts val="1000"/>
-              </a:spcAft>
-              <a:defRPr sz="5500" b="1" i="0">
-                <a:solidFill>
-                  <a:srgbClr val="FFFFFF"/>
-                </a:solidFill>
-                <a:latin typeface="Arial Black"/>
-              </a:defRPr>
-            </a:pPr>
-            <a:r>
-              <a:t>TRUST IN ME AND YOU WILL NOT THIRST.</a:t>
+              <a:t>TO THY PRESENCE SING ALWAY.</a:t>
             </a:r>
           </a:p>
         </p:txBody>
@@ -18817,7 +19544,7 @@
               </a:defRPr>
             </a:pPr>
             <a:r>
-              <a:t>Communion (2)</a:t>
+              <a:t>Recessional</a:t>
             </a:r>
           </a:p>
         </p:txBody>
@@ -18830,13 +19557,13 @@
 </p:sld>
 </file>
 
-<file path=ppt/slides/slide65.xml><?xml version="1.0" encoding="utf-8"?>
+<file path=ppt/slides/slide69.xml><?xml version="1.0" encoding="utf-8"?>
 <p:sld xmlns:a="http://schemas.openxmlformats.org/drawingml/2006/main" xmlns:p="http://schemas.openxmlformats.org/presentationml/2006/main" xmlns:r="http://schemas.openxmlformats.org/officeDocument/2006/relationships">
   <p:cSld>
     <p:bg>
       <p:bgPr>
         <a:solidFill>
-          <a:srgbClr val="211733"/>
+          <a:srgbClr val="000000"/>
         </a:solidFill>
         <a:effectLst/>
       </p:bgPr>
@@ -18917,70 +19644,111 @@
         <p:spPr>
           <a:xfrm>
             <a:off x="914400" y="1490472"/>
-            <a:ext cx="16459200" cy="7790688"/>
-          </a:xfrm>
-          <a:prstGeom prst="rect">
-            <a:avLst/>
-          </a:prstGeom>
-          <a:noFill/>
-        </p:spPr>
-        <p:txBody>
-          <a:bodyPr wrap="square" lIns="109728" rIns="109728" tIns="73152" bIns="73152">
-            <a:noAutofit/>
-          </a:bodyPr>
-          <a:lstStyle/>
-          <a:p>
-            <a:pPr algn="ctr">
-              <a:spcBef>
-                <a:spcPts val="400"/>
-              </a:spcBef>
-              <a:spcAft>
-                <a:spcPts val="500"/>
-              </a:spcAft>
-              <a:defRPr sz="2000" b="1" i="0">
-                <a:solidFill>
-                  <a:srgbClr val="D8B4FE"/>
-                </a:solidFill>
-                <a:latin typeface="Georgia"/>
-              </a:defRPr>
-            </a:pPr>
-            <a:r>
-              <a:t>Priest: Let us pray.</a:t>
-            </a:r>
-          </a:p>
-          <a:p>
-            <a:pPr algn="ctr">
-              <a:spcAft>
-                <a:spcPts val="500"/>
-              </a:spcAft>
-              <a:defRPr sz="1500" b="0" i="1">
-                <a:solidFill>
-                  <a:srgbClr val="D8B4FE"/>
-                </a:solidFill>
-                <a:latin typeface="Georgia"/>
-              </a:defRPr>
-            </a:pPr>
-            <a:r>
-              <a:t>The Priest says the Post- Communion Prayer for the day in full from the Roman Missal. The people respond at the end.</a:t>
-            </a:r>
-          </a:p>
-          <a:p>
-            <a:pPr algn="ctr">
-              <a:spcBef>
-                <a:spcPts val="400"/>
-              </a:spcBef>
-              <a:spcAft>
-                <a:spcPts val="500"/>
-              </a:spcAft>
-              <a:defRPr sz="2000" b="1" i="0">
-                <a:solidFill>
-                  <a:srgbClr val="FFFFFF"/>
-                </a:solidFill>
-                <a:latin typeface="Georgia"/>
-              </a:defRPr>
-            </a:pPr>
-            <a:r>
-              <a:t>All: Amen.</a:t>
+            <a:ext cx="16459200" cy="7927848"/>
+          </a:xfrm>
+          <a:prstGeom prst="rect">
+            <a:avLst/>
+          </a:prstGeom>
+          <a:noFill/>
+        </p:spPr>
+        <p:txBody>
+          <a:bodyPr wrap="square" lIns="109728" rIns="109728" tIns="73152" bIns="73152" anchor="ctr">
+            <a:noAutofit/>
+          </a:bodyPr>
+          <a:lstStyle/>
+          <a:p>
+            <a:pPr algn="ctr">
+              <a:lnSpc>
+                <a:spcPct val="105000"/>
+              </a:lnSpc>
+              <a:spcAft>
+                <a:spcPts val="1000"/>
+              </a:spcAft>
+              <a:defRPr sz="5500" b="1" i="0">
+                <a:solidFill>
+                  <a:srgbClr val="FFFFFF"/>
+                </a:solidFill>
+                <a:latin typeface="Arial Black"/>
+              </a:defRPr>
+            </a:pPr>
+            <a:r>
+              <a:t>ALLELUIA! KING ETERNAL,</a:t>
+            </a:r>
+          </a:p>
+          <a:p>
+            <a:pPr algn="ctr">
+              <a:lnSpc>
+                <a:spcPct val="105000"/>
+              </a:lnSpc>
+              <a:spcAft>
+                <a:spcPts val="1000"/>
+              </a:spcAft>
+              <a:defRPr sz="5500" b="1" i="0">
+                <a:solidFill>
+                  <a:srgbClr val="FFFFFF"/>
+                </a:solidFill>
+                <a:latin typeface="Arial Black"/>
+              </a:defRPr>
+            </a:pPr>
+            <a:r>
+              <a:t>THOU THE LORD WHOM WE ADORE;</a:t>
+            </a:r>
+          </a:p>
+          <a:p>
+            <a:pPr algn="ctr">
+              <a:lnSpc>
+                <a:spcPct val="105000"/>
+              </a:lnSpc>
+              <a:spcAft>
+                <a:spcPts val="1000"/>
+              </a:spcAft>
+              <a:defRPr sz="5500" b="1" i="0">
+                <a:solidFill>
+                  <a:srgbClr val="FFFFFF"/>
+                </a:solidFill>
+                <a:latin typeface="Arial Black"/>
+              </a:defRPr>
+            </a:pPr>
+            <a:r>
+              <a:t>ALLELUIA! SON AND FATHER,</a:t>
+            </a:r>
+          </a:p>
+          <a:p>
+            <a:pPr algn="ctr">
+              <a:lnSpc>
+                <a:spcPct val="105000"/>
+              </a:lnSpc>
+              <a:spcAft>
+                <a:spcPts val="1000"/>
+              </a:spcAft>
+              <a:defRPr sz="5500" b="1" i="0">
+                <a:solidFill>
+                  <a:srgbClr val="FFFFFF"/>
+                </a:solidFill>
+                <a:latin typeface="Arial Black"/>
+              </a:defRPr>
+            </a:pPr>
+            <a:r>
+              <a:t>HOLY SPIRIT, ONE FOREVERMORE,</a:t>
+            </a:r>
+          </a:p>
+          <a:p>
+            <a:pPr algn="ctr">
+              <a:lnSpc>
+                <a:spcPct val="105000"/>
+              </a:lnSpc>
+              <a:spcAft>
+                <a:spcPts val="1000"/>
+              </a:spcAft>
+              <a:defRPr sz="5500" b="1" i="0">
+                <a:solidFill>
+                  <a:srgbClr val="FFFFFF"/>
+                </a:solidFill>
+                <a:latin typeface="Arial Black"/>
+              </a:defRPr>
+            </a:pPr>
+            <a:r>
+              <a:t>WE WOULD BOW BEFORE.</a:t>
             </a:r>
           </a:p>
         </p:txBody>
@@ -19010,7 +19778,7 @@
             <a:pPr>
               <a:defRPr sz="1300" b="1" i="0">
                 <a:solidFill>
-                  <a:srgbClr val="F8C66A"/>
+                  <a:srgbClr val="8C8C91"/>
                 </a:solidFill>
                 <a:latin typeface="Georgia"/>
               </a:defRPr>
@@ -19026,980 +19794,13 @@
               </a:spcBef>
               <a:defRPr sz="1200" b="0" i="0">
                 <a:solidFill>
-                  <a:srgbClr val="D8B4FE"/>
-                </a:solidFill>
-                <a:latin typeface="Georgia"/>
-              </a:defRPr>
-            </a:pPr>
-            <a:r>
-              <a:t>The Communion Rite</a:t>
-            </a:r>
-          </a:p>
-        </p:txBody>
-      </p:sp>
-    </p:spTree>
-  </p:cSld>
-  <p:clrMapOvr>
-    <a:masterClrMapping/>
-  </p:clrMapOvr>
-</p:sld>
-</file>
-
-<file path=ppt/slides/slide66.xml><?xml version="1.0" encoding="utf-8"?>
-<p:sld xmlns:a="http://schemas.openxmlformats.org/drawingml/2006/main" xmlns:p="http://schemas.openxmlformats.org/presentationml/2006/main" xmlns:r="http://schemas.openxmlformats.org/officeDocument/2006/relationships">
-  <p:cSld>
-    <p:spTree>
-      <p:nvGrpSpPr>
-        <p:cNvPr id="1" name=""/>
-        <p:cNvGrpSpPr/>
-        <p:nvPr/>
-      </p:nvGrpSpPr>
-      <p:grpSpPr/>
-      <p:pic>
-        <p:nvPicPr>
-          <p:cNvPr id="2" name="Picture 1" descr="GFCC17May2026_Eastertide_16x9.png"/>
-          <p:cNvPicPr>
-            <a:picLocks noChangeAspect="1"/>
-          </p:cNvPicPr>
-          <p:nvPr/>
-        </p:nvPicPr>
-        <p:blipFill>
-          <a:blip r:embed="rId2"/>
-          <a:stretch>
-            <a:fillRect/>
-          </a:stretch>
-        </p:blipFill>
-        <p:spPr>
-          <a:xfrm>
-            <a:off x="0" y="0"/>
-            <a:ext cx="18288000" cy="10287000"/>
-          </a:xfrm>
-          <a:prstGeom prst="rect">
-            <a:avLst/>
-          </a:prstGeom>
-        </p:spPr>
-      </p:pic>
-      <p:pic>
-        <p:nvPicPr>
-          <p:cNvPr id="3" name="Picture 2" descr="community_logo.png"/>
-          <p:cNvPicPr>
-            <a:picLocks noChangeAspect="1"/>
-          </p:cNvPicPr>
-          <p:nvPr/>
-        </p:nvPicPr>
-        <p:blipFill>
-          <a:blip r:embed="rId3"/>
-          <a:stretch>
-            <a:fillRect/>
-          </a:stretch>
-        </p:blipFill>
-        <p:spPr>
-          <a:xfrm>
-            <a:off x="914400" y="256032"/>
-            <a:ext cx="387682" cy="384048"/>
-          </a:xfrm>
-          <a:prstGeom prst="rect">
-            <a:avLst/>
-          </a:prstGeom>
-        </p:spPr>
-      </p:pic>
-      <p:sp>
-        <p:nvSpPr>
-          <p:cNvPr id="4" name="TextBox 3"/>
-          <p:cNvSpPr txBox="1"/>
-          <p:nvPr/>
-        </p:nvSpPr>
-        <p:spPr>
-          <a:xfrm>
-            <a:off x="1430098" y="256032"/>
-            <a:ext cx="15943502" cy="384048"/>
-          </a:xfrm>
-          <a:prstGeom prst="rect">
-            <a:avLst/>
-          </a:prstGeom>
-          <a:noFill/>
-        </p:spPr>
-        <p:txBody>
-          <a:bodyPr wrap="square" lIns="109728" rIns="109728" tIns="73152" bIns="73152" anchor="ctr">
-            <a:noAutofit/>
-          </a:bodyPr>
-          <a:lstStyle/>
-          <a:p>
-            <a:pPr algn="l">
-              <a:defRPr sz="1500" b="1" i="0">
-                <a:solidFill>
-                  <a:srgbClr val="FFFFFF"/>
-                </a:solidFill>
-                <a:latin typeface="Georgia"/>
-              </a:defRPr>
-            </a:pPr>
-            <a:r>
-              <a:t>Gwangju Filipino Catholic Community</a:t>
-            </a:r>
-          </a:p>
-        </p:txBody>
-      </p:sp>
-      <p:sp>
-        <p:nvSpPr>
-          <p:cNvPr id="5" name="TextBox 4"/>
-          <p:cNvSpPr txBox="1"/>
-          <p:nvPr/>
-        </p:nvSpPr>
-        <p:spPr>
-          <a:xfrm>
-            <a:off x="914400" y="1810512"/>
-            <a:ext cx="16459200" cy="5943600"/>
-          </a:xfrm>
-          <a:prstGeom prst="rect">
-            <a:avLst/>
-          </a:prstGeom>
-          <a:noFill/>
-        </p:spPr>
-        <p:txBody>
-          <a:bodyPr wrap="square" lIns="109728" rIns="109728" tIns="73152" bIns="73152">
-            <a:noAutofit/>
-          </a:bodyPr>
-          <a:lstStyle/>
-          <a:p>
-            <a:pPr>
-              <a:spcAft>
-                <a:spcPts val="300"/>
-              </a:spcAft>
-              <a:defRPr sz="2100" b="1" i="0">
-                <a:solidFill>
-                  <a:srgbClr val="D8B4FE"/>
-                </a:solidFill>
-                <a:latin typeface="Georgia"/>
-              </a:defRPr>
-            </a:pPr>
-            <a:r>
-              <a:t>MASS CELEBRANT:</a:t>
-            </a:r>
-          </a:p>
-          <a:p>
-            <a:pPr>
-              <a:spcAft>
-                <a:spcPts val="300"/>
-              </a:spcAft>
-              <a:defRPr sz="2100" b="0" i="0">
-                <a:solidFill>
-                  <a:srgbClr val="FFFFFF"/>
-                </a:solidFill>
-                <a:latin typeface="Georgia"/>
-              </a:defRPr>
-            </a:pPr>
-            <a:r>
-              <a:t>Rev. Fr. Jonrey Lauron, RCJ</a:t>
-            </a:r>
-          </a:p>
-          <a:p>
-            <a:pPr>
-              <a:spcAft>
-                <a:spcPts val="300"/>
-              </a:spcAft>
-              <a:defRPr sz="2100" b="0" i="0">
-                <a:solidFill>
-                  <a:srgbClr val="FFFFFF"/>
-                </a:solidFill>
-                <a:latin typeface="Georgia"/>
-              </a:defRPr>
-            </a:pPr>
-          </a:p>
-          <a:p>
-            <a:pPr>
-              <a:spcAft>
-                <a:spcPts val="300"/>
-              </a:spcAft>
-              <a:defRPr sz="2100" b="0" i="0">
-                <a:solidFill>
-                  <a:srgbClr val="FFFFFF"/>
-                </a:solidFill>
-                <a:latin typeface="Georgia"/>
-              </a:defRPr>
-            </a:pPr>
-            <a:r>
-              <a:t>Gwangju</a:t>
-            </a:r>
-            <a:br/>
-            <a:r>
-              <a:t>Filipino</a:t>
-            </a:r>
-            <a:br/>
-            <a:r>
-              <a:t>Catholic</a:t>
-            </a:r>
-            <a:br/>
-            <a:r>
-              <a:t>Community</a:t>
-            </a:r>
-          </a:p>
-          <a:p>
-            <a:pPr>
-              <a:spcAft>
-                <a:spcPts val="300"/>
-              </a:spcAft>
-              <a:defRPr sz="2100" b="0" i="0">
-                <a:solidFill>
-                  <a:srgbClr val="FFFFFF"/>
-                </a:solidFill>
-                <a:latin typeface="Georgia"/>
-              </a:defRPr>
-            </a:pPr>
-          </a:p>
-          <a:p>
-            <a:pPr>
-              <a:spcAft>
-                <a:spcPts val="300"/>
-              </a:spcAft>
-              <a:defRPr sz="2100" b="0" i="0">
-                <a:solidFill>
-                  <a:srgbClr val="FFFFFF"/>
-                </a:solidFill>
-                <a:latin typeface="Georgia"/>
-              </a:defRPr>
-            </a:pPr>
-            <a:r>
-              <a:t>Gospel (Matthew 28:16-20)</a:t>
-            </a:r>
-          </a:p>
-          <a:p>
-            <a:pPr>
-              <a:spcAft>
-                <a:spcPts val="300"/>
-              </a:spcAft>
-              <a:defRPr sz="2100" b="0" i="0">
-                <a:solidFill>
-                  <a:srgbClr val="FFFFFF"/>
-                </a:solidFill>
-                <a:latin typeface="Georgia"/>
-              </a:defRPr>
-            </a:pPr>
-            <a:r>
-              <a:t>“All authority has been given to me in heaven and on earth.”</a:t>
-            </a:r>
-          </a:p>
-          <a:p>
-            <a:pPr>
-              <a:spcAft>
-                <a:spcPts val="300"/>
-              </a:spcAft>
-              <a:defRPr sz="2100" b="0" i="0">
-                <a:solidFill>
-                  <a:srgbClr val="FFFFFF"/>
-                </a:solidFill>
-                <a:latin typeface="Georgia"/>
-              </a:defRPr>
-            </a:pPr>
-          </a:p>
-          <a:p>
-            <a:pPr>
-              <a:spcAft>
-                <a:spcPts val="300"/>
-              </a:spcAft>
-              <a:defRPr sz="2100" b="0" i="0">
-                <a:solidFill>
-                  <a:srgbClr val="FFFFFF"/>
-                </a:solidFill>
-                <a:latin typeface="Georgia"/>
-              </a:defRPr>
-            </a:pPr>
-            <a:r>
-              <a:t>YEAR A</a:t>
-            </a:r>
-          </a:p>
-          <a:p>
-            <a:pPr>
-              <a:spcAft>
-                <a:spcPts val="300"/>
-              </a:spcAft>
-              <a:defRPr sz="2100" b="0" i="0">
-                <a:solidFill>
-                  <a:srgbClr val="FFFFFF"/>
-                </a:solidFill>
-                <a:latin typeface="Georgia"/>
-              </a:defRPr>
-            </a:pPr>
-            <a:r>
-              <a:t>2026-05-17 · Eastertide</a:t>
-            </a:r>
-          </a:p>
-        </p:txBody>
-      </p:sp>
-      <p:sp>
-        <p:nvSpPr>
-          <p:cNvPr id="6" name="TextBox 5"/>
-          <p:cNvSpPr txBox="1"/>
-          <p:nvPr/>
-        </p:nvSpPr>
-        <p:spPr>
-          <a:xfrm>
-            <a:off x="914400" y="9418320"/>
-            <a:ext cx="16459200" cy="777240"/>
-          </a:xfrm>
-          <a:prstGeom prst="rect">
-            <a:avLst/>
-          </a:prstGeom>
-          <a:noFill/>
-        </p:spPr>
-        <p:txBody>
-          <a:bodyPr wrap="square" lIns="109728" rIns="109728" tIns="73152" bIns="73152">
-            <a:noAutofit/>
-          </a:bodyPr>
-          <a:lstStyle/>
-          <a:p>
-            <a:pPr>
-              <a:defRPr sz="1300" b="1" i="0">
-                <a:solidFill>
-                  <a:srgbClr val="F8C66A"/>
-                </a:solidFill>
-                <a:latin typeface="Georgia"/>
-              </a:defRPr>
-            </a:pPr>
-            <a:r>
-              <a:t>Gwangju Filipino Catholic Community</a:t>
-            </a:r>
-          </a:p>
-          <a:p>
-            <a:pPr>
-              <a:spcBef>
-                <a:spcPts val="200"/>
-              </a:spcBef>
-              <a:defRPr sz="1200" b="0" i="0">
-                <a:solidFill>
-                  <a:srgbClr val="D8B4FE"/>
-                </a:solidFill>
-                <a:latin typeface="Georgia"/>
-              </a:defRPr>
-            </a:pPr>
-            <a:r>
-              <a:t>Mass poster / divider</a:t>
-            </a:r>
-          </a:p>
-        </p:txBody>
-      </p:sp>
-    </p:spTree>
-  </p:cSld>
-  <p:clrMapOvr>
-    <a:masterClrMapping/>
-  </p:clrMapOvr>
-</p:sld>
-</file>
-
-<file path=ppt/slides/slide67.xml><?xml version="1.0" encoding="utf-8"?>
-<p:sld xmlns:a="http://schemas.openxmlformats.org/drawingml/2006/main" xmlns:p="http://schemas.openxmlformats.org/presentationml/2006/main" xmlns:r="http://schemas.openxmlformats.org/officeDocument/2006/relationships">
-  <p:cSld>
-    <p:bg>
-      <p:bgPr>
-        <a:solidFill>
-          <a:srgbClr val="211733"/>
-        </a:solidFill>
-        <a:effectLst/>
-      </p:bgPr>
-    </p:bg>
-    <p:spTree>
-      <p:nvGrpSpPr>
-        <p:cNvPr id="1" name=""/>
-        <p:cNvGrpSpPr/>
-        <p:nvPr/>
-      </p:nvGrpSpPr>
-      <p:grpSpPr/>
-      <p:pic>
-        <p:nvPicPr>
-          <p:cNvPr id="2" name="Picture 1" descr="community_logo.png"/>
-          <p:cNvPicPr>
-            <a:picLocks noChangeAspect="1"/>
-          </p:cNvPicPr>
-          <p:nvPr/>
-        </p:nvPicPr>
-        <p:blipFill>
-          <a:blip r:embed="rId2"/>
-          <a:stretch>
-            <a:fillRect/>
-          </a:stretch>
-        </p:blipFill>
-        <p:spPr>
-          <a:xfrm>
-            <a:off x="914400" y="256032"/>
-            <a:ext cx="387682" cy="384048"/>
-          </a:xfrm>
-          <a:prstGeom prst="rect">
-            <a:avLst/>
-          </a:prstGeom>
-        </p:spPr>
-      </p:pic>
-      <p:sp>
-        <p:nvSpPr>
-          <p:cNvPr id="3" name="TextBox 2"/>
-          <p:cNvSpPr txBox="1"/>
-          <p:nvPr/>
-        </p:nvSpPr>
-        <p:spPr>
-          <a:xfrm>
-            <a:off x="1430098" y="256032"/>
-            <a:ext cx="15943502" cy="384048"/>
-          </a:xfrm>
-          <a:prstGeom prst="rect">
-            <a:avLst/>
-          </a:prstGeom>
-          <a:noFill/>
-        </p:spPr>
-        <p:txBody>
-          <a:bodyPr wrap="square" lIns="109728" rIns="109728" tIns="73152" bIns="73152" anchor="ctr">
-            <a:noAutofit/>
-          </a:bodyPr>
-          <a:lstStyle/>
-          <a:p>
-            <a:pPr algn="l">
-              <a:defRPr sz="1500" b="1" i="0">
-                <a:solidFill>
-                  <a:srgbClr val="FFFFFF"/>
-                </a:solidFill>
-                <a:latin typeface="Georgia"/>
-              </a:defRPr>
-            </a:pPr>
-            <a:r>
-              <a:t>Gwangju Filipino Catholic Community</a:t>
-            </a:r>
-          </a:p>
-        </p:txBody>
-      </p:sp>
-      <p:sp>
-        <p:nvSpPr>
-          <p:cNvPr id="4" name="TextBox 3"/>
-          <p:cNvSpPr txBox="1"/>
-          <p:nvPr/>
-        </p:nvSpPr>
-        <p:spPr>
-          <a:xfrm>
-            <a:off x="914400" y="1490472"/>
-            <a:ext cx="16459200" cy="7790688"/>
-          </a:xfrm>
-          <a:prstGeom prst="rect">
-            <a:avLst/>
-          </a:prstGeom>
-          <a:noFill/>
-        </p:spPr>
-        <p:txBody>
-          <a:bodyPr wrap="square" lIns="109728" rIns="109728" tIns="73152" bIns="73152">
-            <a:noAutofit/>
-          </a:bodyPr>
-          <a:lstStyle/>
-          <a:p>
-            <a:pPr algn="ctr">
-              <a:spcAft>
-                <a:spcPts val="500"/>
-              </a:spcAft>
-              <a:defRPr sz="1900" b="1" i="0">
-                <a:solidFill>
-                  <a:srgbClr val="FFFFFF"/>
-                </a:solidFill>
-                <a:latin typeface="Georgia"/>
-              </a:defRPr>
-            </a:pPr>
-            <a:r>
-              <a:t>MASS COLLECTION</a:t>
-            </a:r>
-          </a:p>
-          <a:p>
-            <a:pPr algn="ctr">
-              <a:spcAft>
-                <a:spcPts val="500"/>
-              </a:spcAft>
-              <a:defRPr sz="1500" b="0" i="1">
-                <a:solidFill>
-                  <a:srgbClr val="D8B4FE"/>
-                </a:solidFill>
-                <a:latin typeface="Georgia"/>
-              </a:defRPr>
-            </a:pPr>
-            <a:r>
-              <a:t>Thank you for your generosity.</a:t>
-            </a:r>
-          </a:p>
-          <a:p>
-            <a:pPr algn="ctr">
-              <a:spcAft>
-                <a:spcPts val="500"/>
-              </a:spcAft>
-              <a:defRPr sz="1500" b="0" i="1">
-                <a:solidFill>
-                  <a:srgbClr val="D8B4FE"/>
-                </a:solidFill>
-                <a:latin typeface="Georgia"/>
-              </a:defRPr>
-            </a:pPr>
-            <a:r>
-              <a:t>Amount: 430,000</a:t>
-            </a:r>
-          </a:p>
-          <a:p>
-            <a:pPr algn="ctr">
-              <a:spcAft>
-                <a:spcPts val="500"/>
-              </a:spcAft>
-              <a:defRPr sz="1500" b="0" i="1">
-                <a:solidFill>
-                  <a:srgbClr val="D8B4FE"/>
-                </a:solidFill>
-                <a:latin typeface="Georgia"/>
-              </a:defRPr>
-            </a:pPr>
-            <a:r>
-              <a:t>Date: Sunday, May 10, 2026</a:t>
-            </a:r>
-          </a:p>
-        </p:txBody>
-      </p:sp>
-      <p:sp>
-        <p:nvSpPr>
-          <p:cNvPr id="5" name="TextBox 4"/>
-          <p:cNvSpPr txBox="1"/>
-          <p:nvPr/>
-        </p:nvSpPr>
-        <p:spPr>
-          <a:xfrm>
-            <a:off x="914400" y="9418320"/>
-            <a:ext cx="16459200" cy="777240"/>
-          </a:xfrm>
-          <a:prstGeom prst="rect">
-            <a:avLst/>
-          </a:prstGeom>
-          <a:noFill/>
-        </p:spPr>
-        <p:txBody>
-          <a:bodyPr wrap="square" lIns="109728" rIns="109728" tIns="73152" bIns="73152">
-            <a:noAutofit/>
-          </a:bodyPr>
-          <a:lstStyle/>
-          <a:p>
-            <a:pPr>
-              <a:defRPr sz="1300" b="1" i="0">
-                <a:solidFill>
-                  <a:srgbClr val="F8C66A"/>
-                </a:solidFill>
-                <a:latin typeface="Georgia"/>
-              </a:defRPr>
-            </a:pPr>
-            <a:r>
-              <a:t>Gwangju Filipino Catholic Community</a:t>
-            </a:r>
-          </a:p>
-          <a:p>
-            <a:pPr>
-              <a:spcBef>
-                <a:spcPts val="200"/>
-              </a:spcBef>
-              <a:defRPr sz="1200" b="0" i="0">
-                <a:solidFill>
-                  <a:srgbClr val="D8B4FE"/>
-                </a:solidFill>
-                <a:latin typeface="Georgia"/>
-              </a:defRPr>
-            </a:pPr>
-            <a:r>
-              <a:t>Mass Collection</a:t>
-            </a:r>
-          </a:p>
-        </p:txBody>
-      </p:sp>
-    </p:spTree>
-  </p:cSld>
-  <p:clrMapOvr>
-    <a:masterClrMapping/>
-  </p:clrMapOvr>
-</p:sld>
-</file>
-
-<file path=ppt/slides/slide68.xml><?xml version="1.0" encoding="utf-8"?>
-<p:sld xmlns:a="http://schemas.openxmlformats.org/drawingml/2006/main" xmlns:p="http://schemas.openxmlformats.org/presentationml/2006/main" xmlns:r="http://schemas.openxmlformats.org/officeDocument/2006/relationships">
-  <p:cSld>
-    <p:bg>
-      <p:bgPr>
-        <a:solidFill>
-          <a:srgbClr val="211733"/>
-        </a:solidFill>
-        <a:effectLst/>
-      </p:bgPr>
-    </p:bg>
-    <p:spTree>
-      <p:nvGrpSpPr>
-        <p:cNvPr id="1" name=""/>
-        <p:cNvGrpSpPr/>
-        <p:nvPr/>
-      </p:nvGrpSpPr>
-      <p:grpSpPr/>
-      <p:pic>
-        <p:nvPicPr>
-          <p:cNvPr id="2" name="Picture 1" descr="community_logo.png"/>
-          <p:cNvPicPr>
-            <a:picLocks noChangeAspect="1"/>
-          </p:cNvPicPr>
-          <p:nvPr/>
-        </p:nvPicPr>
-        <p:blipFill>
-          <a:blip r:embed="rId2"/>
-          <a:stretch>
-            <a:fillRect/>
-          </a:stretch>
-        </p:blipFill>
-        <p:spPr>
-          <a:xfrm>
-            <a:off x="914400" y="256032"/>
-            <a:ext cx="387682" cy="384048"/>
-          </a:xfrm>
-          <a:prstGeom prst="rect">
-            <a:avLst/>
-          </a:prstGeom>
-        </p:spPr>
-      </p:pic>
-      <p:sp>
-        <p:nvSpPr>
-          <p:cNvPr id="3" name="TextBox 2"/>
-          <p:cNvSpPr txBox="1"/>
-          <p:nvPr/>
-        </p:nvSpPr>
-        <p:spPr>
-          <a:xfrm>
-            <a:off x="1430098" y="256032"/>
-            <a:ext cx="15943502" cy="384048"/>
-          </a:xfrm>
-          <a:prstGeom prst="rect">
-            <a:avLst/>
-          </a:prstGeom>
-          <a:noFill/>
-        </p:spPr>
-        <p:txBody>
-          <a:bodyPr wrap="square" lIns="109728" rIns="109728" tIns="73152" bIns="73152" anchor="ctr">
-            <a:noAutofit/>
-          </a:bodyPr>
-          <a:lstStyle/>
-          <a:p>
-            <a:pPr algn="l">
-              <a:defRPr sz="1500" b="1" i="0">
-                <a:solidFill>
-                  <a:srgbClr val="FFFFFF"/>
-                </a:solidFill>
-                <a:latin typeface="Georgia"/>
-              </a:defRPr>
-            </a:pPr>
-            <a:r>
-              <a:t>Gwangju Filipino Catholic Community</a:t>
-            </a:r>
-          </a:p>
-        </p:txBody>
-      </p:sp>
-      <p:sp>
-        <p:nvSpPr>
-          <p:cNvPr id="4" name="TextBox 3"/>
-          <p:cNvSpPr txBox="1"/>
-          <p:nvPr/>
-        </p:nvSpPr>
-        <p:spPr>
-          <a:xfrm>
-            <a:off x="914400" y="1490472"/>
-            <a:ext cx="16459200" cy="7790688"/>
-          </a:xfrm>
-          <a:prstGeom prst="rect">
-            <a:avLst/>
-          </a:prstGeom>
-          <a:noFill/>
-        </p:spPr>
-        <p:txBody>
-          <a:bodyPr wrap="square" lIns="109728" rIns="109728" tIns="73152" bIns="73152">
-            <a:noAutofit/>
-          </a:bodyPr>
-          <a:lstStyle/>
-          <a:p>
-            <a:pPr algn="ctr">
-              <a:spcAft>
-                <a:spcPts val="500"/>
-              </a:spcAft>
-              <a:defRPr sz="1900" b="1" i="0">
-                <a:solidFill>
-                  <a:srgbClr val="FFFFFF"/>
-                </a:solidFill>
-                <a:latin typeface="Georgia"/>
-              </a:defRPr>
-            </a:pPr>
-            <a:r>
-              <a:t>FOOD SPONSORS</a:t>
-            </a:r>
-          </a:p>
-          <a:p>
-            <a:pPr algn="ctr">
-              <a:spcAft>
-                <a:spcPts val="500"/>
-              </a:spcAft>
-              <a:defRPr sz="1500" b="0" i="1">
-                <a:solidFill>
-                  <a:srgbClr val="D8B4FE"/>
-                </a:solidFill>
-                <a:latin typeface="Georgia"/>
-              </a:defRPr>
-            </a:pPr>
-            <a:r>
-              <a:t>The community thanks our food sponsors.</a:t>
-            </a:r>
-          </a:p>
-          <a:p>
-            <a:pPr algn="ctr">
-              <a:spcAft>
-                <a:spcPts val="500"/>
-              </a:spcAft>
-              <a:defRPr sz="1500" b="0" i="1">
-                <a:solidFill>
-                  <a:srgbClr val="D8B4FE"/>
-                </a:solidFill>
-                <a:latin typeface="Georgia"/>
-              </a:defRPr>
-            </a:pPr>
-            <a:r>
-              <a:t>• Keshi Gonzales</a:t>
-            </a:r>
-          </a:p>
-        </p:txBody>
-      </p:sp>
-      <p:sp>
-        <p:nvSpPr>
-          <p:cNvPr id="5" name="TextBox 4"/>
-          <p:cNvSpPr txBox="1"/>
-          <p:nvPr/>
-        </p:nvSpPr>
-        <p:spPr>
-          <a:xfrm>
-            <a:off x="914400" y="9418320"/>
-            <a:ext cx="16459200" cy="777240"/>
-          </a:xfrm>
-          <a:prstGeom prst="rect">
-            <a:avLst/>
-          </a:prstGeom>
-          <a:noFill/>
-        </p:spPr>
-        <p:txBody>
-          <a:bodyPr wrap="square" lIns="109728" rIns="109728" tIns="73152" bIns="73152">
-            <a:noAutofit/>
-          </a:bodyPr>
-          <a:lstStyle/>
-          <a:p>
-            <a:pPr>
-              <a:defRPr sz="1300" b="1" i="0">
-                <a:solidFill>
-                  <a:srgbClr val="F8C66A"/>
-                </a:solidFill>
-                <a:latin typeface="Georgia"/>
-              </a:defRPr>
-            </a:pPr>
-            <a:r>
-              <a:t>Gwangju Filipino Catholic Community</a:t>
-            </a:r>
-          </a:p>
-          <a:p>
-            <a:pPr>
-              <a:spcBef>
-                <a:spcPts val="200"/>
-              </a:spcBef>
-              <a:defRPr sz="1200" b="0" i="0">
-                <a:solidFill>
-                  <a:srgbClr val="D8B4FE"/>
-                </a:solidFill>
-                <a:latin typeface="Georgia"/>
-              </a:defRPr>
-            </a:pPr>
-            <a:r>
-              <a:t>Food Sponsors</a:t>
-            </a:r>
-          </a:p>
-        </p:txBody>
-      </p:sp>
-    </p:spTree>
-  </p:cSld>
-  <p:clrMapOvr>
-    <a:masterClrMapping/>
-  </p:clrMapOvr>
-</p:sld>
-</file>
-
-<file path=ppt/slides/slide69.xml><?xml version="1.0" encoding="utf-8"?>
-<p:sld xmlns:a="http://schemas.openxmlformats.org/drawingml/2006/main" xmlns:p="http://schemas.openxmlformats.org/presentationml/2006/main" xmlns:r="http://schemas.openxmlformats.org/officeDocument/2006/relationships">
-  <p:cSld>
-    <p:bg>
-      <p:bgPr>
-        <a:solidFill>
-          <a:srgbClr val="211733"/>
-        </a:solidFill>
-        <a:effectLst/>
-      </p:bgPr>
-    </p:bg>
-    <p:spTree>
-      <p:nvGrpSpPr>
-        <p:cNvPr id="1" name=""/>
-        <p:cNvGrpSpPr/>
-        <p:nvPr/>
-      </p:nvGrpSpPr>
-      <p:grpSpPr/>
-      <p:pic>
-        <p:nvPicPr>
-          <p:cNvPr id="2" name="Picture 1" descr="community_logo.png"/>
-          <p:cNvPicPr>
-            <a:picLocks noChangeAspect="1"/>
-          </p:cNvPicPr>
-          <p:nvPr/>
-        </p:nvPicPr>
-        <p:blipFill>
-          <a:blip r:embed="rId2"/>
-          <a:stretch>
-            <a:fillRect/>
-          </a:stretch>
-        </p:blipFill>
-        <p:spPr>
-          <a:xfrm>
-            <a:off x="914400" y="256032"/>
-            <a:ext cx="387682" cy="384048"/>
-          </a:xfrm>
-          <a:prstGeom prst="rect">
-            <a:avLst/>
-          </a:prstGeom>
-        </p:spPr>
-      </p:pic>
-      <p:sp>
-        <p:nvSpPr>
-          <p:cNvPr id="3" name="TextBox 2"/>
-          <p:cNvSpPr txBox="1"/>
-          <p:nvPr/>
-        </p:nvSpPr>
-        <p:spPr>
-          <a:xfrm>
-            <a:off x="1430098" y="256032"/>
-            <a:ext cx="15943502" cy="384048"/>
-          </a:xfrm>
-          <a:prstGeom prst="rect">
-            <a:avLst/>
-          </a:prstGeom>
-          <a:noFill/>
-        </p:spPr>
-        <p:txBody>
-          <a:bodyPr wrap="square" lIns="109728" rIns="109728" tIns="73152" bIns="73152" anchor="ctr">
-            <a:noAutofit/>
-          </a:bodyPr>
-          <a:lstStyle/>
-          <a:p>
-            <a:pPr algn="l">
-              <a:defRPr sz="1500" b="1" i="0">
-                <a:solidFill>
-                  <a:srgbClr val="FFFFFF"/>
-                </a:solidFill>
-                <a:latin typeface="Georgia"/>
-              </a:defRPr>
-            </a:pPr>
-            <a:r>
-              <a:t>Gwangju Filipino Catholic Community</a:t>
-            </a:r>
-          </a:p>
-        </p:txBody>
-      </p:sp>
-      <p:sp>
-        <p:nvSpPr>
-          <p:cNvPr id="4" name="TextBox 3"/>
-          <p:cNvSpPr txBox="1"/>
-          <p:nvPr/>
-        </p:nvSpPr>
-        <p:spPr>
-          <a:xfrm>
-            <a:off x="914400" y="1490472"/>
-            <a:ext cx="16459200" cy="7790688"/>
-          </a:xfrm>
-          <a:prstGeom prst="rect">
-            <a:avLst/>
-          </a:prstGeom>
-          <a:noFill/>
-        </p:spPr>
-        <p:txBody>
-          <a:bodyPr wrap="square" lIns="109728" rIns="109728" tIns="73152" bIns="73152">
-            <a:noAutofit/>
-          </a:bodyPr>
-          <a:lstStyle/>
-          <a:p>
-            <a:pPr algn="ctr">
-              <a:spcAft>
-                <a:spcPts val="500"/>
-              </a:spcAft>
-              <a:defRPr sz="1900" b="1" i="0">
-                <a:solidFill>
-                  <a:srgbClr val="FFFFFF"/>
-                </a:solidFill>
-                <a:latin typeface="Georgia"/>
-              </a:defRPr>
-            </a:pPr>
-            <a:r>
-              <a:t>CHURCH ANNOUNCEMENTS</a:t>
-            </a:r>
-          </a:p>
-          <a:p>
-            <a:pPr algn="ctr">
-              <a:spcAft>
-                <a:spcPts val="500"/>
-              </a:spcAft>
-              <a:defRPr sz="1500" b="0" i="1">
-                <a:solidFill>
-                  <a:srgbClr val="D8B4FE"/>
-                </a:solidFill>
-                <a:latin typeface="Georgia"/>
-              </a:defRPr>
-            </a:pPr>
-            <a:r>
-              <a:t>Insert bulletin points with complete sentences on the following slides or edit this deck.</a:t>
-            </a:r>
-          </a:p>
-        </p:txBody>
-      </p:sp>
-      <p:sp>
-        <p:nvSpPr>
-          <p:cNvPr id="5" name="TextBox 4"/>
-          <p:cNvSpPr txBox="1"/>
-          <p:nvPr/>
-        </p:nvSpPr>
-        <p:spPr>
-          <a:xfrm>
-            <a:off x="914400" y="9418320"/>
-            <a:ext cx="16459200" cy="777240"/>
-          </a:xfrm>
-          <a:prstGeom prst="rect">
-            <a:avLst/>
-          </a:prstGeom>
-          <a:noFill/>
-        </p:spPr>
-        <p:txBody>
-          <a:bodyPr wrap="square" lIns="109728" rIns="109728" tIns="73152" bIns="73152">
-            <a:noAutofit/>
-          </a:bodyPr>
-          <a:lstStyle/>
-          <a:p>
-            <a:pPr>
-              <a:defRPr sz="1300" b="1" i="0">
-                <a:solidFill>
-                  <a:srgbClr val="F8C66A"/>
-                </a:solidFill>
-                <a:latin typeface="Georgia"/>
-              </a:defRPr>
-            </a:pPr>
-            <a:r>
-              <a:t>Gwangju Filipino Catholic Community</a:t>
-            </a:r>
-          </a:p>
-          <a:p>
-            <a:pPr>
-              <a:spcBef>
-                <a:spcPts val="200"/>
-              </a:spcBef>
-              <a:defRPr sz="1200" b="0" i="0">
-                <a:solidFill>
-                  <a:srgbClr val="D8B4FE"/>
-                </a:solidFill>
-                <a:latin typeface="Georgia"/>
-              </a:defRPr>
-            </a:pPr>
-            <a:r>
-              <a:t>Announcements</a:t>
+                  <a:srgbClr val="FFCC4D"/>
+                </a:solidFill>
+                <a:latin typeface="Georgia"/>
+              </a:defRPr>
+            </a:pPr>
+            <a:r>
+              <a:t>Recessional</a:t>
             </a:r>
           </a:p>
         </p:txBody>
@@ -20255,7 +20056,7 @@
     <p:bg>
       <p:bgPr>
         <a:solidFill>
-          <a:srgbClr val="211733"/>
+          <a:srgbClr val="000000"/>
         </a:solidFill>
         <a:effectLst/>
       </p:bgPr>
@@ -20336,48 +20137,92 @@
         <p:spPr>
           <a:xfrm>
             <a:off x="914400" y="1490472"/>
-            <a:ext cx="16459200" cy="7790688"/>
-          </a:xfrm>
-          <a:prstGeom prst="rect">
-            <a:avLst/>
-          </a:prstGeom>
-          <a:noFill/>
-        </p:spPr>
-        <p:txBody>
-          <a:bodyPr wrap="square" lIns="109728" rIns="109728" tIns="73152" bIns="73152">
-            <a:noAutofit/>
-          </a:bodyPr>
-          <a:lstStyle/>
-          <a:p>
-            <a:pPr algn="ctr">
-              <a:spcAft>
-                <a:spcPts val="500"/>
-              </a:spcAft>
-              <a:defRPr sz="1900" b="1" i="0">
-                <a:solidFill>
-                  <a:srgbClr val="FFFFFF"/>
-                </a:solidFill>
-                <a:latin typeface="Georgia"/>
-              </a:defRPr>
-            </a:pPr>
-            <a:r>
-              <a:t>Welcome newcomers!</a:t>
-            </a:r>
-          </a:p>
-          <a:p>
-            <a:pPr algn="ctr">
-              <a:spcAft>
-                <a:spcPts val="500"/>
-              </a:spcAft>
-              <a:defRPr sz="1500" b="0" i="1">
-                <a:solidFill>
-                  <a:srgbClr val="D8B4FE"/>
-                </a:solidFill>
-                <a:latin typeface="Georgia"/>
-              </a:defRPr>
-            </a:pPr>
-            <a:r>
-              <a:t>Photo collage optional.</a:t>
+            <a:ext cx="16459200" cy="7927848"/>
+          </a:xfrm>
+          <a:prstGeom prst="rect">
+            <a:avLst/>
+          </a:prstGeom>
+          <a:noFill/>
+        </p:spPr>
+        <p:txBody>
+          <a:bodyPr wrap="square" lIns="109728" rIns="109728" tIns="73152" bIns="73152" anchor="ctr">
+            <a:noAutofit/>
+          </a:bodyPr>
+          <a:lstStyle/>
+          <a:p>
+            <a:pPr algn="ctr">
+              <a:lnSpc>
+                <a:spcPct val="105000"/>
+              </a:lnSpc>
+              <a:spcAft>
+                <a:spcPts val="1000"/>
+              </a:spcAft>
+              <a:defRPr sz="5500" b="1" i="0">
+                <a:solidFill>
+                  <a:srgbClr val="FFFFFF"/>
+                </a:solidFill>
+                <a:latin typeface="Arial Black"/>
+              </a:defRPr>
+            </a:pPr>
+            <a:r>
+              <a:t>ALLELUIA! SING TO JESUS!</a:t>
+            </a:r>
+          </a:p>
+          <a:p>
+            <a:pPr algn="ctr">
+              <a:lnSpc>
+                <a:spcPct val="105000"/>
+              </a:lnSpc>
+              <a:spcAft>
+                <a:spcPts val="1000"/>
+              </a:spcAft>
+              <a:defRPr sz="5500" b="1" i="0">
+                <a:solidFill>
+                  <a:srgbClr val="FFFFFF"/>
+                </a:solidFill>
+                <a:latin typeface="Arial Black"/>
+              </a:defRPr>
+            </a:pPr>
+            <a:r>
+              <a:t>HIS THE SCEPTER, HIS THE THRONE;</a:t>
+            </a:r>
+          </a:p>
+          <a:p>
+            <a:pPr algn="ctr">
+              <a:lnSpc>
+                <a:spcPct val="105000"/>
+              </a:lnSpc>
+              <a:spcAft>
+                <a:spcPts val="1000"/>
+              </a:spcAft>
+              <a:defRPr sz="5500" b="1" i="0">
+                <a:solidFill>
+                  <a:srgbClr val="FFFFFF"/>
+                </a:solidFill>
+                <a:latin typeface="Arial Black"/>
+              </a:defRPr>
+            </a:pPr>
+            <a:r>
+              <a:t>ALLELUIA! HIS THE TRIUMPH,</a:t>
+            </a:r>
+          </a:p>
+          <a:p>
+            <a:pPr algn="ctr">
+              <a:lnSpc>
+                <a:spcPct val="105000"/>
+              </a:lnSpc>
+              <a:spcAft>
+                <a:spcPts val="1000"/>
+              </a:spcAft>
+              <a:defRPr sz="5500" b="1" i="0">
+                <a:solidFill>
+                  <a:srgbClr val="FFFFFF"/>
+                </a:solidFill>
+                <a:latin typeface="Arial Black"/>
+              </a:defRPr>
+            </a:pPr>
+            <a:r>
+              <a:t>HIS THE VICTORY ALONE.</a:t>
             </a:r>
           </a:p>
         </p:txBody>
@@ -20407,7 +20252,7 @@
             <a:pPr>
               <a:defRPr sz="1300" b="1" i="0">
                 <a:solidFill>
-                  <a:srgbClr val="F8C66A"/>
+                  <a:srgbClr val="8C8C91"/>
                 </a:solidFill>
                 <a:latin typeface="Georgia"/>
               </a:defRPr>
@@ -20423,13 +20268,13 @@
               </a:spcBef>
               <a:defRPr sz="1200" b="0" i="0">
                 <a:solidFill>
-                  <a:srgbClr val="D8B4FE"/>
-                </a:solidFill>
-                <a:latin typeface="Georgia"/>
-              </a:defRPr>
-            </a:pPr>
-            <a:r>
-              <a:t>Announcements</a:t>
+                  <a:srgbClr val="FFCC4D"/>
+                </a:solidFill>
+                <a:latin typeface="Georgia"/>
+              </a:defRPr>
+            </a:pPr>
+            <a:r>
+              <a:t>Recessional</a:t>
             </a:r>
           </a:p>
         </p:txBody>
@@ -20445,14 +20290,6 @@
 <file path=ppt/slides/slide71.xml><?xml version="1.0" encoding="utf-8"?>
 <p:sld xmlns:a="http://schemas.openxmlformats.org/drawingml/2006/main" xmlns:p="http://schemas.openxmlformats.org/presentationml/2006/main" xmlns:r="http://schemas.openxmlformats.org/officeDocument/2006/relationships">
   <p:cSld>
-    <p:bg>
-      <p:bgPr>
-        <a:solidFill>
-          <a:srgbClr val="211733"/>
-        </a:solidFill>
-        <a:effectLst/>
-      </p:bgPr>
-    </p:bg>
     <p:spTree>
       <p:nvGrpSpPr>
         <p:cNvPr id="1" name=""/>
@@ -20462,7 +20299,7 @@
       <p:grpSpPr/>
       <p:pic>
         <p:nvPicPr>
-          <p:cNvPr id="2" name="Picture 1" descr="community_logo.png"/>
+          <p:cNvPr id="2" name="Picture 1" descr="GFCC17May2026_Eastertide_16x9.png"/>
           <p:cNvPicPr>
             <a:picLocks noChangeAspect="1"/>
           </p:cNvPicPr>
@@ -20476,6 +20313,30 @@
         </p:blipFill>
         <p:spPr>
           <a:xfrm>
+            <a:off x="0" y="0"/>
+            <a:ext cx="18288000" cy="10287000"/>
+          </a:xfrm>
+          <a:prstGeom prst="rect">
+            <a:avLst/>
+          </a:prstGeom>
+        </p:spPr>
+      </p:pic>
+      <p:pic>
+        <p:nvPicPr>
+          <p:cNvPr id="3" name="Picture 2" descr="community_logo.png"/>
+          <p:cNvPicPr>
+            <a:picLocks noChangeAspect="1"/>
+          </p:cNvPicPr>
+          <p:nvPr/>
+        </p:nvPicPr>
+        <p:blipFill>
+          <a:blip r:embed="rId3"/>
+          <a:stretch>
+            <a:fillRect/>
+          </a:stretch>
+        </p:blipFill>
+        <p:spPr>
+          <a:xfrm>
             <a:off x="914400" y="256032"/>
             <a:ext cx="387682" cy="384048"/>
           </a:xfrm>
@@ -20486,7 +20347,7 @@
       </p:pic>
       <p:sp>
         <p:nvSpPr>
-          <p:cNvPr id="3" name="TextBox 2"/>
+          <p:cNvPr id="4" name="TextBox 3"/>
           <p:cNvSpPr txBox="1"/>
           <p:nvPr/>
         </p:nvSpPr>
@@ -20522,14 +20383,14 @@
       </p:sp>
       <p:sp>
         <p:nvSpPr>
-          <p:cNvPr id="4" name="TextBox 3"/>
-          <p:cNvSpPr txBox="1"/>
-          <p:nvPr/>
-        </p:nvSpPr>
-        <p:spPr>
-          <a:xfrm>
-            <a:off x="914400" y="1490472"/>
-            <a:ext cx="16459200" cy="7790688"/>
+          <p:cNvPr id="5" name="TextBox 4"/>
+          <p:cNvSpPr txBox="1"/>
+          <p:nvPr/>
+        </p:nvSpPr>
+        <p:spPr>
+          <a:xfrm>
+            <a:off x="914400" y="1810512"/>
+            <a:ext cx="16459200" cy="5943600"/>
           </a:xfrm>
           <a:prstGeom prst="rect">
             <a:avLst/>
@@ -20542,27 +20403,11 @@
           </a:bodyPr>
           <a:lstStyle/>
           <a:p>
-            <a:pPr algn="ctr">
-              <a:spcAft>
-                <a:spcPts val="500"/>
-              </a:spcAft>
-              <a:defRPr sz="1900" b="1" i="0">
-                <a:solidFill>
-                  <a:srgbClr val="FFFFFF"/>
-                </a:solidFill>
-                <a:latin typeface="Georgia"/>
-              </a:defRPr>
-            </a:pPr>
-            <a:r>
-              <a:t>Sacrament of Confession</a:t>
-            </a:r>
-          </a:p>
-          <a:p>
-            <a:pPr algn="ctr">
-              <a:spcAft>
-                <a:spcPts val="500"/>
-              </a:spcAft>
-              <a:defRPr sz="1500" b="0" i="1">
+            <a:pPr>
+              <a:spcAft>
+                <a:spcPts val="300"/>
+              </a:spcAft>
+              <a:defRPr sz="2100" b="1" i="0">
                 <a:solidFill>
                   <a:srgbClr val="D8B4FE"/>
                 </a:solidFill>
@@ -20570,14 +20415,161 @@
               </a:defRPr>
             </a:pPr>
             <a:r>
-              <a:t>The Lord never tires of forgiving us; we are the ones who tire of seeking his mercy. — Pope Francis</a:t>
-            </a:r>
-          </a:p>
-        </p:txBody>
-      </p:sp>
-      <p:sp>
-        <p:nvSpPr>
-          <p:cNvPr id="5" name="TextBox 4"/>
+              <a:t>MASS CELEBRANT:</a:t>
+            </a:r>
+          </a:p>
+          <a:p>
+            <a:pPr>
+              <a:spcAft>
+                <a:spcPts val="300"/>
+              </a:spcAft>
+              <a:defRPr sz="2100" b="0" i="0">
+                <a:solidFill>
+                  <a:srgbClr val="FFFFFF"/>
+                </a:solidFill>
+                <a:latin typeface="Georgia"/>
+              </a:defRPr>
+            </a:pPr>
+            <a:r>
+              <a:t>Rev. Fr. Jonrey Lauron, RCJ</a:t>
+            </a:r>
+          </a:p>
+          <a:p>
+            <a:pPr>
+              <a:spcAft>
+                <a:spcPts val="300"/>
+              </a:spcAft>
+              <a:defRPr sz="2100" b="0" i="0">
+                <a:solidFill>
+                  <a:srgbClr val="FFFFFF"/>
+                </a:solidFill>
+                <a:latin typeface="Georgia"/>
+              </a:defRPr>
+            </a:pPr>
+          </a:p>
+          <a:p>
+            <a:pPr>
+              <a:spcAft>
+                <a:spcPts val="300"/>
+              </a:spcAft>
+              <a:defRPr sz="2100" b="0" i="0">
+                <a:solidFill>
+                  <a:srgbClr val="FFFFFF"/>
+                </a:solidFill>
+                <a:latin typeface="Georgia"/>
+              </a:defRPr>
+            </a:pPr>
+            <a:r>
+              <a:t>Gwangju</a:t>
+            </a:r>
+            <a:br/>
+            <a:r>
+              <a:t>Filipino</a:t>
+            </a:r>
+            <a:br/>
+            <a:r>
+              <a:t>Catholic</a:t>
+            </a:r>
+            <a:br/>
+            <a:r>
+              <a:t>Community</a:t>
+            </a:r>
+          </a:p>
+          <a:p>
+            <a:pPr>
+              <a:spcAft>
+                <a:spcPts val="300"/>
+              </a:spcAft>
+              <a:defRPr sz="2100" b="0" i="0">
+                <a:solidFill>
+                  <a:srgbClr val="FFFFFF"/>
+                </a:solidFill>
+                <a:latin typeface="Georgia"/>
+              </a:defRPr>
+            </a:pPr>
+          </a:p>
+          <a:p>
+            <a:pPr>
+              <a:spcAft>
+                <a:spcPts val="300"/>
+              </a:spcAft>
+              <a:defRPr sz="2100" b="0" i="0">
+                <a:solidFill>
+                  <a:srgbClr val="FFFFFF"/>
+                </a:solidFill>
+                <a:latin typeface="Georgia"/>
+              </a:defRPr>
+            </a:pPr>
+            <a:r>
+              <a:t>Gospel (Matthew 28:16-20)</a:t>
+            </a:r>
+          </a:p>
+          <a:p>
+            <a:pPr>
+              <a:spcAft>
+                <a:spcPts val="300"/>
+              </a:spcAft>
+              <a:defRPr sz="2100" b="0" i="0">
+                <a:solidFill>
+                  <a:srgbClr val="FFFFFF"/>
+                </a:solidFill>
+                <a:latin typeface="Georgia"/>
+              </a:defRPr>
+            </a:pPr>
+            <a:r>
+              <a:t>“All authority has been given to me in heaven and on earth.”</a:t>
+            </a:r>
+          </a:p>
+          <a:p>
+            <a:pPr>
+              <a:spcAft>
+                <a:spcPts val="300"/>
+              </a:spcAft>
+              <a:defRPr sz="2100" b="0" i="0">
+                <a:solidFill>
+                  <a:srgbClr val="FFFFFF"/>
+                </a:solidFill>
+                <a:latin typeface="Georgia"/>
+              </a:defRPr>
+            </a:pPr>
+          </a:p>
+          <a:p>
+            <a:pPr>
+              <a:spcAft>
+                <a:spcPts val="300"/>
+              </a:spcAft>
+              <a:defRPr sz="2100" b="0" i="0">
+                <a:solidFill>
+                  <a:srgbClr val="FFFFFF"/>
+                </a:solidFill>
+                <a:latin typeface="Georgia"/>
+              </a:defRPr>
+            </a:pPr>
+            <a:r>
+              <a:t>YEAR A</a:t>
+            </a:r>
+          </a:p>
+          <a:p>
+            <a:pPr>
+              <a:spcAft>
+                <a:spcPts val="300"/>
+              </a:spcAft>
+              <a:defRPr sz="2100" b="0" i="0">
+                <a:solidFill>
+                  <a:srgbClr val="FFFFFF"/>
+                </a:solidFill>
+                <a:latin typeface="Georgia"/>
+              </a:defRPr>
+            </a:pPr>
+            <a:r>
+              <a:t>2026-05-17 · Eastertide</a:t>
+            </a:r>
+          </a:p>
+        </p:txBody>
+      </p:sp>
+      <p:sp>
+        <p:nvSpPr>
+          <p:cNvPr id="6" name="TextBox 5"/>
           <p:cNvSpPr txBox="1"/>
           <p:nvPr/>
         </p:nvSpPr>
@@ -20622,7 +20614,7 @@
               </a:defRPr>
             </a:pPr>
             <a:r>
-              <a:t>Announcements</a:t>
+              <a:t>Mass poster / divider</a:t>
             </a:r>
           </a:p>
         </p:txBody>
@@ -20638,14 +20630,6 @@
 <file path=ppt/slides/slide72.xml><?xml version="1.0" encoding="utf-8"?>
 <p:sld xmlns:a="http://schemas.openxmlformats.org/drawingml/2006/main" xmlns:p="http://schemas.openxmlformats.org/presentationml/2006/main" xmlns:r="http://schemas.openxmlformats.org/officeDocument/2006/relationships">
   <p:cSld>
-    <p:bg>
-      <p:bgPr>
-        <a:solidFill>
-          <a:srgbClr val="211733"/>
-        </a:solidFill>
-        <a:effectLst/>
-      </p:bgPr>
-    </p:bg>
     <p:spTree>
       <p:nvGrpSpPr>
         <p:cNvPr id="1" name=""/>
@@ -20655,7 +20639,7 @@
       <p:grpSpPr/>
       <p:pic>
         <p:nvPicPr>
-          <p:cNvPr id="2" name="Picture 1" descr="community_logo.png"/>
+          <p:cNvPr id="2" name="Picture 1" descr="GFCC17May2026_Eastertide_16x9.png"/>
           <p:cNvPicPr>
             <a:picLocks noChangeAspect="1"/>
           </p:cNvPicPr>
@@ -20669,157 +20653,14 @@
         </p:blipFill>
         <p:spPr>
           <a:xfrm>
-            <a:off x="914400" y="256032"/>
-            <a:ext cx="387682" cy="384048"/>
+            <a:off x="0" y="0"/>
+            <a:ext cx="18288000" cy="10287000"/>
           </a:xfrm>
           <a:prstGeom prst="rect">
             <a:avLst/>
           </a:prstGeom>
         </p:spPr>
       </p:pic>
-      <p:sp>
-        <p:nvSpPr>
-          <p:cNvPr id="3" name="TextBox 2"/>
-          <p:cNvSpPr txBox="1"/>
-          <p:nvPr/>
-        </p:nvSpPr>
-        <p:spPr>
-          <a:xfrm>
-            <a:off x="1430098" y="256032"/>
-            <a:ext cx="15943502" cy="384048"/>
-          </a:xfrm>
-          <a:prstGeom prst="rect">
-            <a:avLst/>
-          </a:prstGeom>
-          <a:noFill/>
-        </p:spPr>
-        <p:txBody>
-          <a:bodyPr wrap="square" lIns="109728" rIns="109728" tIns="73152" bIns="73152" anchor="ctr">
-            <a:noAutofit/>
-          </a:bodyPr>
-          <a:lstStyle/>
-          <a:p>
-            <a:pPr algn="l">
-              <a:defRPr sz="1500" b="1" i="0">
-                <a:solidFill>
-                  <a:srgbClr val="FFFFFF"/>
-                </a:solidFill>
-                <a:latin typeface="Georgia"/>
-              </a:defRPr>
-            </a:pPr>
-            <a:r>
-              <a:t>Gwangju Filipino Catholic Community</a:t>
-            </a:r>
-          </a:p>
-        </p:txBody>
-      </p:sp>
-      <p:sp>
-        <p:nvSpPr>
-          <p:cNvPr id="4" name="TextBox 3"/>
-          <p:cNvSpPr txBox="1"/>
-          <p:nvPr/>
-        </p:nvSpPr>
-        <p:spPr>
-          <a:xfrm>
-            <a:off x="914400" y="1490472"/>
-            <a:ext cx="16459200" cy="7790688"/>
-          </a:xfrm>
-          <a:prstGeom prst="rect">
-            <a:avLst/>
-          </a:prstGeom>
-          <a:noFill/>
-        </p:spPr>
-        <p:txBody>
-          <a:bodyPr wrap="square" lIns="109728" rIns="109728" tIns="73152" bIns="73152">
-            <a:noAutofit/>
-          </a:bodyPr>
-          <a:lstStyle/>
-          <a:p>
-            <a:pPr algn="ctr">
-              <a:spcAft>
-                <a:spcPts val="500"/>
-              </a:spcAft>
-              <a:defRPr sz="1900" b="1" i="0">
-                <a:solidFill>
-                  <a:srgbClr val="FFFFFF"/>
-                </a:solidFill>
-                <a:latin typeface="Georgia"/>
-              </a:defRPr>
-            </a:pPr>
-            <a:r>
-              <a:t>Updates and Announcements</a:t>
-            </a:r>
-          </a:p>
-          <a:p>
-            <a:pPr algn="ctr">
-              <a:spcAft>
-                <a:spcPts val="500"/>
-              </a:spcAft>
-              <a:defRPr sz="1500" b="0" i="1">
-                <a:solidFill>
-                  <a:srgbClr val="D8B4FE"/>
-                </a:solidFill>
-                <a:latin typeface="Georgia"/>
-              </a:defRPr>
-            </a:pPr>
-            <a:r>
-              <a:t>Name your community page and invitation to follow in full; add a QR code to the slide master if you wish.</a:t>
-            </a:r>
-          </a:p>
-        </p:txBody>
-      </p:sp>
-      <p:sp>
-        <p:nvSpPr>
-          <p:cNvPr id="5" name="TextBox 4"/>
-          <p:cNvSpPr txBox="1"/>
-          <p:nvPr/>
-        </p:nvSpPr>
-        <p:spPr>
-          <a:xfrm>
-            <a:off x="914400" y="9418320"/>
-            <a:ext cx="16459200" cy="777240"/>
-          </a:xfrm>
-          <a:prstGeom prst="rect">
-            <a:avLst/>
-          </a:prstGeom>
-          <a:noFill/>
-        </p:spPr>
-        <p:txBody>
-          <a:bodyPr wrap="square" lIns="109728" rIns="109728" tIns="73152" bIns="73152">
-            <a:noAutofit/>
-          </a:bodyPr>
-          <a:lstStyle/>
-          <a:p>
-            <a:pPr>
-              <a:defRPr sz="1300" b="1" i="0">
-                <a:solidFill>
-                  <a:srgbClr val="F8C66A"/>
-                </a:solidFill>
-                <a:latin typeface="Georgia"/>
-              </a:defRPr>
-            </a:pPr>
-            <a:r>
-              <a:t>Gwangju Filipino Catholic Community</a:t>
-            </a:r>
-          </a:p>
-          <a:p>
-            <a:pPr>
-              <a:spcBef>
-                <a:spcPts val="200"/>
-              </a:spcBef>
-              <a:defRPr sz="1200" b="0" i="0">
-                <a:solidFill>
-                  <a:srgbClr val="D8B4FE"/>
-                </a:solidFill>
-                <a:latin typeface="Georgia"/>
-              </a:defRPr>
-            </a:pPr>
-            <a:r>
-              <a:t>Announcements</a:t>
-            </a:r>
-          </a:p>
-        </p:txBody>
-      </p:sp>
     </p:spTree>
   </p:cSld>
   <p:clrMapOvr>
@@ -20929,13 +20770,10 @@
           <a:lstStyle/>
           <a:p>
             <a:pPr algn="ctr">
-              <a:spcBef>
-                <a:spcPts val="400"/>
-              </a:spcBef>
               <a:spcAft>
                 <a:spcPts val="500"/>
               </a:spcAft>
-              <a:defRPr sz="2000" b="1" i="0">
+              <a:defRPr sz="1500" b="0" i="1">
                 <a:solidFill>
                   <a:srgbClr val="D8B4FE"/>
                 </a:solidFill>
@@ -20943,102 +20781,7 @@
               </a:defRPr>
             </a:pPr>
             <a:r>
-              <a:t>Priest: The Lord be with you.</a:t>
-            </a:r>
-          </a:p>
-          <a:p>
-            <a:pPr algn="ctr">
-              <a:spcBef>
-                <a:spcPts val="400"/>
-              </a:spcBef>
-              <a:spcAft>
-                <a:spcPts val="500"/>
-              </a:spcAft>
-              <a:defRPr sz="2000" b="1" i="0">
-                <a:solidFill>
-                  <a:srgbClr val="FFFFFF"/>
-                </a:solidFill>
-                <a:latin typeface="Georgia"/>
-              </a:defRPr>
-            </a:pPr>
-            <a:r>
-              <a:t>All: And with your spirit.</a:t>
-            </a:r>
-          </a:p>
-          <a:p>
-            <a:pPr algn="ctr">
-              <a:spcBef>
-                <a:spcPts val="400"/>
-              </a:spcBef>
-              <a:spcAft>
-                <a:spcPts val="500"/>
-              </a:spcAft>
-              <a:defRPr sz="2000" b="1" i="0">
-                <a:solidFill>
-                  <a:srgbClr val="D8B4FE"/>
-                </a:solidFill>
-                <a:latin typeface="Georgia"/>
-              </a:defRPr>
-            </a:pPr>
-            <a:r>
-              <a:t>Priest: May almighty God bless you, the Father, and the Son, and the Holy Spirit.</a:t>
-            </a:r>
-          </a:p>
-          <a:p>
-            <a:pPr algn="ctr">
-              <a:spcBef>
-                <a:spcPts val="400"/>
-              </a:spcBef>
-              <a:spcAft>
-                <a:spcPts val="500"/>
-              </a:spcAft>
-              <a:defRPr sz="2000" b="1" i="0">
-                <a:solidFill>
-                  <a:srgbClr val="FFFFFF"/>
-                </a:solidFill>
-                <a:latin typeface="Georgia"/>
-              </a:defRPr>
-            </a:pPr>
-            <a:r>
-              <a:t>All: Amen.</a:t>
-            </a:r>
-          </a:p>
-          <a:p>
-            <a:pPr algn="ctr">
-              <a:spcBef>
-                <a:spcPts val="400"/>
-              </a:spcBef>
-              <a:spcAft>
-                <a:spcPts val="500"/>
-              </a:spcAft>
-              <a:defRPr sz="2000" b="1" i="0">
-                <a:solidFill>
-                  <a:srgbClr val="D8B4FE"/>
-                </a:solidFill>
-                <a:latin typeface="Georgia"/>
-              </a:defRPr>
-            </a:pPr>
-            <a:r>
-              <a:t>Priest: Go in peace, glorifying the Lord by your life.</a:t>
-            </a:r>
-          </a:p>
-          <a:p>
-            <a:pPr algn="ctr">
-              <a:spcBef>
-                <a:spcPts val="400"/>
-              </a:spcBef>
-              <a:spcAft>
-                <a:spcPts val="500"/>
-              </a:spcAft>
-              <a:defRPr sz="2000" b="1" i="0">
-                <a:solidFill>
-                  <a:srgbClr val="FFFFFF"/>
-                </a:solidFill>
-                <a:latin typeface="Georgia"/>
-              </a:defRPr>
-            </a:pPr>
-            <a:r>
-              <a:t>All: Thanks be to God.</a:t>
+              <a:t>Below: World English Bible (WEB) fallback — verify NABRE on bible.usccb.org.</a:t>
             </a:r>
           </a:p>
         </p:txBody>
@@ -21090,1579 +20833,7 @@
               </a:defRPr>
             </a:pPr>
             <a:r>
-              <a:t>Final Blessing</a:t>
-            </a:r>
-          </a:p>
-        </p:txBody>
-      </p:sp>
-    </p:spTree>
-  </p:cSld>
-  <p:clrMapOvr>
-    <a:masterClrMapping/>
-  </p:clrMapOvr>
-</p:sld>
-</file>
-
-<file path=ppt/slides/slide74.xml><?xml version="1.0" encoding="utf-8"?>
-<p:sld xmlns:a="http://schemas.openxmlformats.org/drawingml/2006/main" xmlns:p="http://schemas.openxmlformats.org/presentationml/2006/main" xmlns:r="http://schemas.openxmlformats.org/officeDocument/2006/relationships">
-  <p:cSld>
-    <p:bg>
-      <p:bgPr>
-        <a:solidFill>
-          <a:srgbClr val="000000"/>
-        </a:solidFill>
-        <a:effectLst/>
-      </p:bgPr>
-    </p:bg>
-    <p:spTree>
-      <p:nvGrpSpPr>
-        <p:cNvPr id="1" name=""/>
-        <p:cNvGrpSpPr/>
-        <p:nvPr/>
-      </p:nvGrpSpPr>
-      <p:grpSpPr/>
-      <p:pic>
-        <p:nvPicPr>
-          <p:cNvPr id="2" name="Picture 1" descr="community_logo.png"/>
-          <p:cNvPicPr>
-            <a:picLocks noChangeAspect="1"/>
-          </p:cNvPicPr>
-          <p:nvPr/>
-        </p:nvPicPr>
-        <p:blipFill>
-          <a:blip r:embed="rId2"/>
-          <a:stretch>
-            <a:fillRect/>
-          </a:stretch>
-        </p:blipFill>
-        <p:spPr>
-          <a:xfrm>
-            <a:off x="914400" y="256032"/>
-            <a:ext cx="387682" cy="384048"/>
-          </a:xfrm>
-          <a:prstGeom prst="rect">
-            <a:avLst/>
-          </a:prstGeom>
-        </p:spPr>
-      </p:pic>
-      <p:sp>
-        <p:nvSpPr>
-          <p:cNvPr id="3" name="TextBox 2"/>
-          <p:cNvSpPr txBox="1"/>
-          <p:nvPr/>
-        </p:nvSpPr>
-        <p:spPr>
-          <a:xfrm>
-            <a:off x="1430098" y="256032"/>
-            <a:ext cx="15943502" cy="384048"/>
-          </a:xfrm>
-          <a:prstGeom prst="rect">
-            <a:avLst/>
-          </a:prstGeom>
-          <a:noFill/>
-        </p:spPr>
-        <p:txBody>
-          <a:bodyPr wrap="square" lIns="109728" rIns="109728" tIns="73152" bIns="73152" anchor="ctr">
-            <a:noAutofit/>
-          </a:bodyPr>
-          <a:lstStyle/>
-          <a:p>
-            <a:pPr algn="l">
-              <a:defRPr sz="1500" b="1" i="0">
-                <a:solidFill>
-                  <a:srgbClr val="FFFFFF"/>
-                </a:solidFill>
-                <a:latin typeface="Georgia"/>
-              </a:defRPr>
-            </a:pPr>
-            <a:r>
-              <a:t>Gwangju Filipino Catholic Community</a:t>
-            </a:r>
-          </a:p>
-        </p:txBody>
-      </p:sp>
-      <p:sp>
-        <p:nvSpPr>
-          <p:cNvPr id="4" name="TextBox 3"/>
-          <p:cNvSpPr txBox="1"/>
-          <p:nvPr/>
-        </p:nvSpPr>
-        <p:spPr>
-          <a:xfrm>
-            <a:off x="914400" y="1490472"/>
-            <a:ext cx="16459200" cy="868680"/>
-          </a:xfrm>
-          <a:prstGeom prst="rect">
-            <a:avLst/>
-          </a:prstGeom>
-          <a:noFill/>
-        </p:spPr>
-        <p:txBody>
-          <a:bodyPr wrap="square" lIns="109728" rIns="109728" tIns="73152" bIns="73152">
-            <a:noAutofit/>
-          </a:bodyPr>
-          <a:lstStyle/>
-          <a:p>
-            <a:pPr algn="ctr">
-              <a:defRPr sz="3800" b="1" i="0">
-                <a:solidFill>
-                  <a:srgbClr val="FFCC4D"/>
-                </a:solidFill>
-                <a:latin typeface="Georgia"/>
-              </a:defRPr>
-            </a:pPr>
-            <a:r>
-              <a:t>Shine Jesus Shine</a:t>
-            </a:r>
-          </a:p>
-        </p:txBody>
-      </p:sp>
-      <p:sp>
-        <p:nvSpPr>
-          <p:cNvPr id="5" name="TextBox 4"/>
-          <p:cNvSpPr txBox="1"/>
-          <p:nvPr/>
-        </p:nvSpPr>
-        <p:spPr>
-          <a:xfrm>
-            <a:off x="914400" y="2587752"/>
-            <a:ext cx="16459200" cy="6830568"/>
-          </a:xfrm>
-          <a:prstGeom prst="rect">
-            <a:avLst/>
-          </a:prstGeom>
-          <a:noFill/>
-        </p:spPr>
-        <p:txBody>
-          <a:bodyPr wrap="square" lIns="109728" rIns="109728" tIns="73152" bIns="73152" anchor="ctr">
-            <a:noAutofit/>
-          </a:bodyPr>
-          <a:lstStyle/>
-          <a:p>
-            <a:pPr algn="ctr">
-              <a:lnSpc>
-                <a:spcPct val="105000"/>
-              </a:lnSpc>
-              <a:spcAft>
-                <a:spcPts val="1000"/>
-              </a:spcAft>
-              <a:defRPr sz="5000" b="1" i="0">
-                <a:solidFill>
-                  <a:srgbClr val="FFFFFF"/>
-                </a:solidFill>
-                <a:latin typeface="Arial Black"/>
-              </a:defRPr>
-            </a:pPr>
-            <a:r>
-              <a:t>LORD, THE LIGHT OF YOUR LOVE IS SHINING</a:t>
-            </a:r>
-          </a:p>
-          <a:p>
-            <a:pPr algn="ctr">
-              <a:lnSpc>
-                <a:spcPct val="105000"/>
-              </a:lnSpc>
-              <a:spcAft>
-                <a:spcPts val="1000"/>
-              </a:spcAft>
-              <a:defRPr sz="5000" b="1" i="0">
-                <a:solidFill>
-                  <a:srgbClr val="FFFFFF"/>
-                </a:solidFill>
-                <a:latin typeface="Arial Black"/>
-              </a:defRPr>
-            </a:pPr>
-            <a:r>
-              <a:t>IN THE MIDST OF THE DARKNESS, SHINING</a:t>
-            </a:r>
-          </a:p>
-          <a:p>
-            <a:pPr algn="ctr">
-              <a:lnSpc>
-                <a:spcPct val="105000"/>
-              </a:lnSpc>
-              <a:spcAft>
-                <a:spcPts val="1000"/>
-              </a:spcAft>
-              <a:defRPr sz="5000" b="1" i="0">
-                <a:solidFill>
-                  <a:srgbClr val="FFFFFF"/>
-                </a:solidFill>
-                <a:latin typeface="Arial Black"/>
-              </a:defRPr>
-            </a:pPr>
-            <a:r>
-              <a:t>JESUS, LIGHT OF THE WORLD, SHINE UPON US</a:t>
-            </a:r>
-          </a:p>
-          <a:p>
-            <a:pPr algn="ctr">
-              <a:lnSpc>
-                <a:spcPct val="105000"/>
-              </a:lnSpc>
-              <a:spcAft>
-                <a:spcPts val="1000"/>
-              </a:spcAft>
-              <a:defRPr sz="5000" b="1" i="0">
-                <a:solidFill>
-                  <a:srgbClr val="FFFFFF"/>
-                </a:solidFill>
-                <a:latin typeface="Arial Black"/>
-              </a:defRPr>
-            </a:pPr>
-            <a:r>
-              <a:t>SET US FREE BY THE TRUTH YOU NOW BRING US</a:t>
-            </a:r>
-          </a:p>
-          <a:p>
-            <a:pPr algn="ctr">
-              <a:lnSpc>
-                <a:spcPct val="105000"/>
-              </a:lnSpc>
-              <a:spcAft>
-                <a:spcPts val="1000"/>
-              </a:spcAft>
-              <a:defRPr sz="5000" b="1" i="0">
-                <a:solidFill>
-                  <a:srgbClr val="FFFFFF"/>
-                </a:solidFill>
-                <a:latin typeface="Arial Black"/>
-              </a:defRPr>
-            </a:pPr>
-            <a:r>
-              <a:t>SHINE ON ME, SHINE ON ME</a:t>
-            </a:r>
-          </a:p>
-        </p:txBody>
-      </p:sp>
-      <p:sp>
-        <p:nvSpPr>
-          <p:cNvPr id="6" name="TextBox 5"/>
-          <p:cNvSpPr txBox="1"/>
-          <p:nvPr/>
-        </p:nvSpPr>
-        <p:spPr>
-          <a:xfrm>
-            <a:off x="914400" y="9418320"/>
-            <a:ext cx="16459200" cy="777240"/>
-          </a:xfrm>
-          <a:prstGeom prst="rect">
-            <a:avLst/>
-          </a:prstGeom>
-          <a:noFill/>
-        </p:spPr>
-        <p:txBody>
-          <a:bodyPr wrap="square" lIns="109728" rIns="109728" tIns="73152" bIns="73152">
-            <a:noAutofit/>
-          </a:bodyPr>
-          <a:lstStyle/>
-          <a:p>
-            <a:pPr>
-              <a:defRPr sz="1300" b="1" i="0">
-                <a:solidFill>
-                  <a:srgbClr val="8C8C91"/>
-                </a:solidFill>
-                <a:latin typeface="Georgia"/>
-              </a:defRPr>
-            </a:pPr>
-            <a:r>
-              <a:t>Gwangju Filipino Catholic Community</a:t>
-            </a:r>
-          </a:p>
-          <a:p>
-            <a:pPr>
-              <a:spcBef>
-                <a:spcPts val="200"/>
-              </a:spcBef>
-              <a:defRPr sz="1200" b="0" i="0">
-                <a:solidFill>
-                  <a:srgbClr val="FFCC4D"/>
-                </a:solidFill>
-                <a:latin typeface="Georgia"/>
-              </a:defRPr>
-            </a:pPr>
-            <a:r>
-              <a:t>Recessional</a:t>
-            </a:r>
-          </a:p>
-        </p:txBody>
-      </p:sp>
-    </p:spTree>
-  </p:cSld>
-  <p:clrMapOvr>
-    <a:masterClrMapping/>
-  </p:clrMapOvr>
-</p:sld>
-</file>
-
-<file path=ppt/slides/slide75.xml><?xml version="1.0" encoding="utf-8"?>
-<p:sld xmlns:a="http://schemas.openxmlformats.org/drawingml/2006/main" xmlns:p="http://schemas.openxmlformats.org/presentationml/2006/main" xmlns:r="http://schemas.openxmlformats.org/officeDocument/2006/relationships">
-  <p:cSld>
-    <p:bg>
-      <p:bgPr>
-        <a:solidFill>
-          <a:srgbClr val="000000"/>
-        </a:solidFill>
-        <a:effectLst/>
-      </p:bgPr>
-    </p:bg>
-    <p:spTree>
-      <p:nvGrpSpPr>
-        <p:cNvPr id="1" name=""/>
-        <p:cNvGrpSpPr/>
-        <p:nvPr/>
-      </p:nvGrpSpPr>
-      <p:grpSpPr/>
-      <p:pic>
-        <p:nvPicPr>
-          <p:cNvPr id="2" name="Picture 1" descr="community_logo.png"/>
-          <p:cNvPicPr>
-            <a:picLocks noChangeAspect="1"/>
-          </p:cNvPicPr>
-          <p:nvPr/>
-        </p:nvPicPr>
-        <p:blipFill>
-          <a:blip r:embed="rId2"/>
-          <a:stretch>
-            <a:fillRect/>
-          </a:stretch>
-        </p:blipFill>
-        <p:spPr>
-          <a:xfrm>
-            <a:off x="914400" y="256032"/>
-            <a:ext cx="387682" cy="384048"/>
-          </a:xfrm>
-          <a:prstGeom prst="rect">
-            <a:avLst/>
-          </a:prstGeom>
-        </p:spPr>
-      </p:pic>
-      <p:sp>
-        <p:nvSpPr>
-          <p:cNvPr id="3" name="TextBox 2"/>
-          <p:cNvSpPr txBox="1"/>
-          <p:nvPr/>
-        </p:nvSpPr>
-        <p:spPr>
-          <a:xfrm>
-            <a:off x="1430098" y="256032"/>
-            <a:ext cx="15943502" cy="384048"/>
-          </a:xfrm>
-          <a:prstGeom prst="rect">
-            <a:avLst/>
-          </a:prstGeom>
-          <a:noFill/>
-        </p:spPr>
-        <p:txBody>
-          <a:bodyPr wrap="square" lIns="109728" rIns="109728" tIns="73152" bIns="73152" anchor="ctr">
-            <a:noAutofit/>
-          </a:bodyPr>
-          <a:lstStyle/>
-          <a:p>
-            <a:pPr algn="l">
-              <a:defRPr sz="1500" b="1" i="0">
-                <a:solidFill>
-                  <a:srgbClr val="FFFFFF"/>
-                </a:solidFill>
-                <a:latin typeface="Georgia"/>
-              </a:defRPr>
-            </a:pPr>
-            <a:r>
-              <a:t>Gwangju Filipino Catholic Community</a:t>
-            </a:r>
-          </a:p>
-        </p:txBody>
-      </p:sp>
-      <p:sp>
-        <p:nvSpPr>
-          <p:cNvPr id="4" name="TextBox 3"/>
-          <p:cNvSpPr txBox="1"/>
-          <p:nvPr/>
-        </p:nvSpPr>
-        <p:spPr>
-          <a:xfrm>
-            <a:off x="914400" y="1490472"/>
-            <a:ext cx="16459200" cy="7927848"/>
-          </a:xfrm>
-          <a:prstGeom prst="rect">
-            <a:avLst/>
-          </a:prstGeom>
-          <a:noFill/>
-        </p:spPr>
-        <p:txBody>
-          <a:bodyPr wrap="square" lIns="109728" rIns="109728" tIns="73152" bIns="73152" anchor="ctr">
-            <a:noAutofit/>
-          </a:bodyPr>
-          <a:lstStyle/>
-          <a:p>
-            <a:pPr algn="ctr">
-              <a:lnSpc>
-                <a:spcPct val="105000"/>
-              </a:lnSpc>
-              <a:spcAft>
-                <a:spcPts val="1000"/>
-              </a:spcAft>
-              <a:defRPr sz="3800" b="1" i="0">
-                <a:solidFill>
-                  <a:srgbClr val="FFFFFF"/>
-                </a:solidFill>
-                <a:latin typeface="Arial Black"/>
-              </a:defRPr>
-            </a:pPr>
-            <a:r>
-              <a:t>SHINE, JESUS, SHINE, FILL THIS LAND WITH THE FATHER'S GLORY</a:t>
-            </a:r>
-          </a:p>
-          <a:p>
-            <a:pPr algn="ctr">
-              <a:lnSpc>
-                <a:spcPct val="105000"/>
-              </a:lnSpc>
-              <a:spcAft>
-                <a:spcPts val="1000"/>
-              </a:spcAft>
-              <a:defRPr sz="3800" b="1" i="0">
-                <a:solidFill>
-                  <a:srgbClr val="FFFFFF"/>
-                </a:solidFill>
-                <a:latin typeface="Arial Black"/>
-              </a:defRPr>
-            </a:pPr>
-            <a:r>
-              <a:t>BLAZE, SPIRIT, BLAZE, SET OUR HEARTS ON FIRE</a:t>
-            </a:r>
-          </a:p>
-          <a:p>
-            <a:pPr algn="ctr">
-              <a:lnSpc>
-                <a:spcPct val="105000"/>
-              </a:lnSpc>
-              <a:spcAft>
-                <a:spcPts val="1000"/>
-              </a:spcAft>
-              <a:defRPr sz="3800" b="1" i="0">
-                <a:solidFill>
-                  <a:srgbClr val="FFFFFF"/>
-                </a:solidFill>
-                <a:latin typeface="Arial Black"/>
-              </a:defRPr>
-            </a:pPr>
-            <a:r>
-              <a:t>FLOW, RIVER, FLOW, FLOOD THE NATIONS WITH GRACE AND MERCY</a:t>
-            </a:r>
-          </a:p>
-          <a:p>
-            <a:pPr algn="ctr">
-              <a:lnSpc>
-                <a:spcPct val="105000"/>
-              </a:lnSpc>
-              <a:spcAft>
-                <a:spcPts val="1000"/>
-              </a:spcAft>
-              <a:defRPr sz="3800" b="1" i="0">
-                <a:solidFill>
-                  <a:srgbClr val="FFFFFF"/>
-                </a:solidFill>
-                <a:latin typeface="Arial Black"/>
-              </a:defRPr>
-            </a:pPr>
-            <a:r>
-              <a:t>SEND FORTH YOUR WORD, LORD, AND LET THERE BE LIGHT</a:t>
-            </a:r>
-          </a:p>
-        </p:txBody>
-      </p:sp>
-      <p:sp>
-        <p:nvSpPr>
-          <p:cNvPr id="5" name="TextBox 4"/>
-          <p:cNvSpPr txBox="1"/>
-          <p:nvPr/>
-        </p:nvSpPr>
-        <p:spPr>
-          <a:xfrm>
-            <a:off x="914400" y="9418320"/>
-            <a:ext cx="16459200" cy="777240"/>
-          </a:xfrm>
-          <a:prstGeom prst="rect">
-            <a:avLst/>
-          </a:prstGeom>
-          <a:noFill/>
-        </p:spPr>
-        <p:txBody>
-          <a:bodyPr wrap="square" lIns="109728" rIns="109728" tIns="73152" bIns="73152">
-            <a:noAutofit/>
-          </a:bodyPr>
-          <a:lstStyle/>
-          <a:p>
-            <a:pPr>
-              <a:defRPr sz="1300" b="1" i="0">
-                <a:solidFill>
-                  <a:srgbClr val="8C8C91"/>
-                </a:solidFill>
-                <a:latin typeface="Georgia"/>
-              </a:defRPr>
-            </a:pPr>
-            <a:r>
-              <a:t>Gwangju Filipino Catholic Community</a:t>
-            </a:r>
-          </a:p>
-          <a:p>
-            <a:pPr>
-              <a:spcBef>
-                <a:spcPts val="200"/>
-              </a:spcBef>
-              <a:defRPr sz="1200" b="0" i="0">
-                <a:solidFill>
-                  <a:srgbClr val="FFCC4D"/>
-                </a:solidFill>
-                <a:latin typeface="Georgia"/>
-              </a:defRPr>
-            </a:pPr>
-            <a:r>
-              <a:t>Recessional</a:t>
-            </a:r>
-          </a:p>
-        </p:txBody>
-      </p:sp>
-    </p:spTree>
-  </p:cSld>
-  <p:clrMapOvr>
-    <a:masterClrMapping/>
-  </p:clrMapOvr>
-</p:sld>
-</file>
-
-<file path=ppt/slides/slide76.xml><?xml version="1.0" encoding="utf-8"?>
-<p:sld xmlns:a="http://schemas.openxmlformats.org/drawingml/2006/main" xmlns:p="http://schemas.openxmlformats.org/presentationml/2006/main" xmlns:r="http://schemas.openxmlformats.org/officeDocument/2006/relationships">
-  <p:cSld>
-    <p:bg>
-      <p:bgPr>
-        <a:solidFill>
-          <a:srgbClr val="000000"/>
-        </a:solidFill>
-        <a:effectLst/>
-      </p:bgPr>
-    </p:bg>
-    <p:spTree>
-      <p:nvGrpSpPr>
-        <p:cNvPr id="1" name=""/>
-        <p:cNvGrpSpPr/>
-        <p:nvPr/>
-      </p:nvGrpSpPr>
-      <p:grpSpPr/>
-      <p:pic>
-        <p:nvPicPr>
-          <p:cNvPr id="2" name="Picture 1" descr="community_logo.png"/>
-          <p:cNvPicPr>
-            <a:picLocks noChangeAspect="1"/>
-          </p:cNvPicPr>
-          <p:nvPr/>
-        </p:nvPicPr>
-        <p:blipFill>
-          <a:blip r:embed="rId2"/>
-          <a:stretch>
-            <a:fillRect/>
-          </a:stretch>
-        </p:blipFill>
-        <p:spPr>
-          <a:xfrm>
-            <a:off x="914400" y="256032"/>
-            <a:ext cx="387682" cy="384048"/>
-          </a:xfrm>
-          <a:prstGeom prst="rect">
-            <a:avLst/>
-          </a:prstGeom>
-        </p:spPr>
-      </p:pic>
-      <p:sp>
-        <p:nvSpPr>
-          <p:cNvPr id="3" name="TextBox 2"/>
-          <p:cNvSpPr txBox="1"/>
-          <p:nvPr/>
-        </p:nvSpPr>
-        <p:spPr>
-          <a:xfrm>
-            <a:off x="1430098" y="256032"/>
-            <a:ext cx="15943502" cy="384048"/>
-          </a:xfrm>
-          <a:prstGeom prst="rect">
-            <a:avLst/>
-          </a:prstGeom>
-          <a:noFill/>
-        </p:spPr>
-        <p:txBody>
-          <a:bodyPr wrap="square" lIns="109728" rIns="109728" tIns="73152" bIns="73152" anchor="ctr">
-            <a:noAutofit/>
-          </a:bodyPr>
-          <a:lstStyle/>
-          <a:p>
-            <a:pPr algn="l">
-              <a:defRPr sz="1500" b="1" i="0">
-                <a:solidFill>
-                  <a:srgbClr val="FFFFFF"/>
-                </a:solidFill>
-                <a:latin typeface="Georgia"/>
-              </a:defRPr>
-            </a:pPr>
-            <a:r>
-              <a:t>Gwangju Filipino Catholic Community</a:t>
-            </a:r>
-          </a:p>
-        </p:txBody>
-      </p:sp>
-      <p:sp>
-        <p:nvSpPr>
-          <p:cNvPr id="4" name="TextBox 3"/>
-          <p:cNvSpPr txBox="1"/>
-          <p:nvPr/>
-        </p:nvSpPr>
-        <p:spPr>
-          <a:xfrm>
-            <a:off x="914400" y="1490472"/>
-            <a:ext cx="16459200" cy="7927848"/>
-          </a:xfrm>
-          <a:prstGeom prst="rect">
-            <a:avLst/>
-          </a:prstGeom>
-          <a:noFill/>
-        </p:spPr>
-        <p:txBody>
-          <a:bodyPr wrap="square" lIns="109728" rIns="109728" tIns="73152" bIns="73152" anchor="ctr">
-            <a:noAutofit/>
-          </a:bodyPr>
-          <a:lstStyle/>
-          <a:p>
-            <a:pPr algn="ctr">
-              <a:lnSpc>
-                <a:spcPct val="105000"/>
-              </a:lnSpc>
-              <a:spcAft>
-                <a:spcPts val="1000"/>
-              </a:spcAft>
-              <a:defRPr sz="5000" b="1" i="0">
-                <a:solidFill>
-                  <a:srgbClr val="FFFFFF"/>
-                </a:solidFill>
-                <a:latin typeface="Arial Black"/>
-              </a:defRPr>
-            </a:pPr>
-            <a:r>
-              <a:t>LORD, I COME TO YOUR AWESOME PRESENCE</a:t>
-            </a:r>
-          </a:p>
-          <a:p>
-            <a:pPr algn="ctr">
-              <a:lnSpc>
-                <a:spcPct val="105000"/>
-              </a:lnSpc>
-              <a:spcAft>
-                <a:spcPts val="1000"/>
-              </a:spcAft>
-              <a:defRPr sz="5000" b="1" i="0">
-                <a:solidFill>
-                  <a:srgbClr val="FFFFFF"/>
-                </a:solidFill>
-                <a:latin typeface="Arial Black"/>
-              </a:defRPr>
-            </a:pPr>
-            <a:r>
-              <a:t>FROM THE SHADOWS INTO YOUR RADIANCE</a:t>
-            </a:r>
-          </a:p>
-          <a:p>
-            <a:pPr algn="ctr">
-              <a:lnSpc>
-                <a:spcPct val="105000"/>
-              </a:lnSpc>
-              <a:spcAft>
-                <a:spcPts val="1000"/>
-              </a:spcAft>
-              <a:defRPr sz="5000" b="1" i="0">
-                <a:solidFill>
-                  <a:srgbClr val="FFFFFF"/>
-                </a:solidFill>
-                <a:latin typeface="Arial Black"/>
-              </a:defRPr>
-            </a:pPr>
-            <a:r>
-              <a:t>BY THE BLOOD, I MAY ENTER YOUR BRIGHTNESS</a:t>
-            </a:r>
-          </a:p>
-          <a:p>
-            <a:pPr algn="ctr">
-              <a:lnSpc>
-                <a:spcPct val="105000"/>
-              </a:lnSpc>
-              <a:spcAft>
-                <a:spcPts val="1000"/>
-              </a:spcAft>
-              <a:defRPr sz="5000" b="1" i="0">
-                <a:solidFill>
-                  <a:srgbClr val="FFFFFF"/>
-                </a:solidFill>
-                <a:latin typeface="Arial Black"/>
-              </a:defRPr>
-            </a:pPr>
-            <a:r>
-              <a:t>SEARCH ME, TRY ME, CONSUME ALL MY DARKNESS</a:t>
-            </a:r>
-          </a:p>
-          <a:p>
-            <a:pPr algn="ctr">
-              <a:lnSpc>
-                <a:spcPct val="105000"/>
-              </a:lnSpc>
-              <a:spcAft>
-                <a:spcPts val="1000"/>
-              </a:spcAft>
-              <a:defRPr sz="5000" b="1" i="0">
-                <a:solidFill>
-                  <a:srgbClr val="FFFFFF"/>
-                </a:solidFill>
-                <a:latin typeface="Arial Black"/>
-              </a:defRPr>
-            </a:pPr>
-            <a:r>
-              <a:t>SHINE ON ME, SHINE ON ME</a:t>
-            </a:r>
-          </a:p>
-        </p:txBody>
-      </p:sp>
-      <p:sp>
-        <p:nvSpPr>
-          <p:cNvPr id="5" name="TextBox 4"/>
-          <p:cNvSpPr txBox="1"/>
-          <p:nvPr/>
-        </p:nvSpPr>
-        <p:spPr>
-          <a:xfrm>
-            <a:off x="914400" y="9418320"/>
-            <a:ext cx="16459200" cy="777240"/>
-          </a:xfrm>
-          <a:prstGeom prst="rect">
-            <a:avLst/>
-          </a:prstGeom>
-          <a:noFill/>
-        </p:spPr>
-        <p:txBody>
-          <a:bodyPr wrap="square" lIns="109728" rIns="109728" tIns="73152" bIns="73152">
-            <a:noAutofit/>
-          </a:bodyPr>
-          <a:lstStyle/>
-          <a:p>
-            <a:pPr>
-              <a:defRPr sz="1300" b="1" i="0">
-                <a:solidFill>
-                  <a:srgbClr val="8C8C91"/>
-                </a:solidFill>
-                <a:latin typeface="Georgia"/>
-              </a:defRPr>
-            </a:pPr>
-            <a:r>
-              <a:t>Gwangju Filipino Catholic Community</a:t>
-            </a:r>
-          </a:p>
-          <a:p>
-            <a:pPr>
-              <a:spcBef>
-                <a:spcPts val="200"/>
-              </a:spcBef>
-              <a:defRPr sz="1200" b="0" i="0">
-                <a:solidFill>
-                  <a:srgbClr val="FFCC4D"/>
-                </a:solidFill>
-                <a:latin typeface="Georgia"/>
-              </a:defRPr>
-            </a:pPr>
-            <a:r>
-              <a:t>Recessional</a:t>
-            </a:r>
-          </a:p>
-        </p:txBody>
-      </p:sp>
-    </p:spTree>
-  </p:cSld>
-  <p:clrMapOvr>
-    <a:masterClrMapping/>
-  </p:clrMapOvr>
-</p:sld>
-</file>
-
-<file path=ppt/slides/slide77.xml><?xml version="1.0" encoding="utf-8"?>
-<p:sld xmlns:a="http://schemas.openxmlformats.org/drawingml/2006/main" xmlns:p="http://schemas.openxmlformats.org/presentationml/2006/main" xmlns:r="http://schemas.openxmlformats.org/officeDocument/2006/relationships">
-  <p:cSld>
-    <p:bg>
-      <p:bgPr>
-        <a:solidFill>
-          <a:srgbClr val="000000"/>
-        </a:solidFill>
-        <a:effectLst/>
-      </p:bgPr>
-    </p:bg>
-    <p:spTree>
-      <p:nvGrpSpPr>
-        <p:cNvPr id="1" name=""/>
-        <p:cNvGrpSpPr/>
-        <p:nvPr/>
-      </p:nvGrpSpPr>
-      <p:grpSpPr/>
-      <p:pic>
-        <p:nvPicPr>
-          <p:cNvPr id="2" name="Picture 1" descr="community_logo.png"/>
-          <p:cNvPicPr>
-            <a:picLocks noChangeAspect="1"/>
-          </p:cNvPicPr>
-          <p:nvPr/>
-        </p:nvPicPr>
-        <p:blipFill>
-          <a:blip r:embed="rId2"/>
-          <a:stretch>
-            <a:fillRect/>
-          </a:stretch>
-        </p:blipFill>
-        <p:spPr>
-          <a:xfrm>
-            <a:off x="914400" y="256032"/>
-            <a:ext cx="387682" cy="384048"/>
-          </a:xfrm>
-          <a:prstGeom prst="rect">
-            <a:avLst/>
-          </a:prstGeom>
-        </p:spPr>
-      </p:pic>
-      <p:sp>
-        <p:nvSpPr>
-          <p:cNvPr id="3" name="TextBox 2"/>
-          <p:cNvSpPr txBox="1"/>
-          <p:nvPr/>
-        </p:nvSpPr>
-        <p:spPr>
-          <a:xfrm>
-            <a:off x="1430098" y="256032"/>
-            <a:ext cx="15943502" cy="384048"/>
-          </a:xfrm>
-          <a:prstGeom prst="rect">
-            <a:avLst/>
-          </a:prstGeom>
-          <a:noFill/>
-        </p:spPr>
-        <p:txBody>
-          <a:bodyPr wrap="square" lIns="109728" rIns="109728" tIns="73152" bIns="73152" anchor="ctr">
-            <a:noAutofit/>
-          </a:bodyPr>
-          <a:lstStyle/>
-          <a:p>
-            <a:pPr algn="l">
-              <a:defRPr sz="1500" b="1" i="0">
-                <a:solidFill>
-                  <a:srgbClr val="FFFFFF"/>
-                </a:solidFill>
-                <a:latin typeface="Georgia"/>
-              </a:defRPr>
-            </a:pPr>
-            <a:r>
-              <a:t>Gwangju Filipino Catholic Community</a:t>
-            </a:r>
-          </a:p>
-        </p:txBody>
-      </p:sp>
-      <p:sp>
-        <p:nvSpPr>
-          <p:cNvPr id="4" name="TextBox 3"/>
-          <p:cNvSpPr txBox="1"/>
-          <p:nvPr/>
-        </p:nvSpPr>
-        <p:spPr>
-          <a:xfrm>
-            <a:off x="914400" y="1490472"/>
-            <a:ext cx="16459200" cy="7927848"/>
-          </a:xfrm>
-          <a:prstGeom prst="rect">
-            <a:avLst/>
-          </a:prstGeom>
-          <a:noFill/>
-        </p:spPr>
-        <p:txBody>
-          <a:bodyPr wrap="square" lIns="109728" rIns="109728" tIns="73152" bIns="73152" anchor="ctr">
-            <a:noAutofit/>
-          </a:bodyPr>
-          <a:lstStyle/>
-          <a:p>
-            <a:pPr algn="ctr">
-              <a:lnSpc>
-                <a:spcPct val="105000"/>
-              </a:lnSpc>
-              <a:spcAft>
-                <a:spcPts val="1000"/>
-              </a:spcAft>
-              <a:defRPr sz="3800" b="1" i="0">
-                <a:solidFill>
-                  <a:srgbClr val="FFFFFF"/>
-                </a:solidFill>
-                <a:latin typeface="Arial Black"/>
-              </a:defRPr>
-            </a:pPr>
-            <a:r>
-              <a:t>SHINE, JESUS, SHINE, FILL THIS LAND WITH THE FATHER'S GLORY</a:t>
-            </a:r>
-          </a:p>
-          <a:p>
-            <a:pPr algn="ctr">
-              <a:lnSpc>
-                <a:spcPct val="105000"/>
-              </a:lnSpc>
-              <a:spcAft>
-                <a:spcPts val="1000"/>
-              </a:spcAft>
-              <a:defRPr sz="3800" b="1" i="0">
-                <a:solidFill>
-                  <a:srgbClr val="FFFFFF"/>
-                </a:solidFill>
-                <a:latin typeface="Arial Black"/>
-              </a:defRPr>
-            </a:pPr>
-            <a:r>
-              <a:t>BLAZE, SPIRIT, BLAZE, SET OUR HEARTS ON FIRE</a:t>
-            </a:r>
-          </a:p>
-          <a:p>
-            <a:pPr algn="ctr">
-              <a:lnSpc>
-                <a:spcPct val="105000"/>
-              </a:lnSpc>
-              <a:spcAft>
-                <a:spcPts val="1000"/>
-              </a:spcAft>
-              <a:defRPr sz="3800" b="1" i="0">
-                <a:solidFill>
-                  <a:srgbClr val="FFFFFF"/>
-                </a:solidFill>
-                <a:latin typeface="Arial Black"/>
-              </a:defRPr>
-            </a:pPr>
-            <a:r>
-              <a:t>FLOW, RIVER, FLOW, FLOOD THE NATIONS WITH GRACE AND MERCY</a:t>
-            </a:r>
-          </a:p>
-          <a:p>
-            <a:pPr algn="ctr">
-              <a:lnSpc>
-                <a:spcPct val="105000"/>
-              </a:lnSpc>
-              <a:spcAft>
-                <a:spcPts val="1000"/>
-              </a:spcAft>
-              <a:defRPr sz="3800" b="1" i="0">
-                <a:solidFill>
-                  <a:srgbClr val="FFFFFF"/>
-                </a:solidFill>
-                <a:latin typeface="Arial Black"/>
-              </a:defRPr>
-            </a:pPr>
-            <a:r>
-              <a:t>SEND FORTH YOUR WORD, LORD, AND LET THERE BE LIGHT</a:t>
-            </a:r>
-          </a:p>
-        </p:txBody>
-      </p:sp>
-      <p:sp>
-        <p:nvSpPr>
-          <p:cNvPr id="5" name="TextBox 4"/>
-          <p:cNvSpPr txBox="1"/>
-          <p:nvPr/>
-        </p:nvSpPr>
-        <p:spPr>
-          <a:xfrm>
-            <a:off x="914400" y="9418320"/>
-            <a:ext cx="16459200" cy="777240"/>
-          </a:xfrm>
-          <a:prstGeom prst="rect">
-            <a:avLst/>
-          </a:prstGeom>
-          <a:noFill/>
-        </p:spPr>
-        <p:txBody>
-          <a:bodyPr wrap="square" lIns="109728" rIns="109728" tIns="73152" bIns="73152">
-            <a:noAutofit/>
-          </a:bodyPr>
-          <a:lstStyle/>
-          <a:p>
-            <a:pPr>
-              <a:defRPr sz="1300" b="1" i="0">
-                <a:solidFill>
-                  <a:srgbClr val="8C8C91"/>
-                </a:solidFill>
-                <a:latin typeface="Georgia"/>
-              </a:defRPr>
-            </a:pPr>
-            <a:r>
-              <a:t>Gwangju Filipino Catholic Community</a:t>
-            </a:r>
-          </a:p>
-          <a:p>
-            <a:pPr>
-              <a:spcBef>
-                <a:spcPts val="200"/>
-              </a:spcBef>
-              <a:defRPr sz="1200" b="0" i="0">
-                <a:solidFill>
-                  <a:srgbClr val="FFCC4D"/>
-                </a:solidFill>
-                <a:latin typeface="Georgia"/>
-              </a:defRPr>
-            </a:pPr>
-            <a:r>
-              <a:t>Recessional</a:t>
-            </a:r>
-          </a:p>
-        </p:txBody>
-      </p:sp>
-    </p:spTree>
-  </p:cSld>
-  <p:clrMapOvr>
-    <a:masterClrMapping/>
-  </p:clrMapOvr>
-</p:sld>
-</file>
-
-<file path=ppt/slides/slide78.xml><?xml version="1.0" encoding="utf-8"?>
-<p:sld xmlns:a="http://schemas.openxmlformats.org/drawingml/2006/main" xmlns:p="http://schemas.openxmlformats.org/presentationml/2006/main" xmlns:r="http://schemas.openxmlformats.org/officeDocument/2006/relationships">
-  <p:cSld>
-    <p:bg>
-      <p:bgPr>
-        <a:solidFill>
-          <a:srgbClr val="000000"/>
-        </a:solidFill>
-        <a:effectLst/>
-      </p:bgPr>
-    </p:bg>
-    <p:spTree>
-      <p:nvGrpSpPr>
-        <p:cNvPr id="1" name=""/>
-        <p:cNvGrpSpPr/>
-        <p:nvPr/>
-      </p:nvGrpSpPr>
-      <p:grpSpPr/>
-      <p:pic>
-        <p:nvPicPr>
-          <p:cNvPr id="2" name="Picture 1" descr="community_logo.png"/>
-          <p:cNvPicPr>
-            <a:picLocks noChangeAspect="1"/>
-          </p:cNvPicPr>
-          <p:nvPr/>
-        </p:nvPicPr>
-        <p:blipFill>
-          <a:blip r:embed="rId2"/>
-          <a:stretch>
-            <a:fillRect/>
-          </a:stretch>
-        </p:blipFill>
-        <p:spPr>
-          <a:xfrm>
-            <a:off x="914400" y="256032"/>
-            <a:ext cx="387682" cy="384048"/>
-          </a:xfrm>
-          <a:prstGeom prst="rect">
-            <a:avLst/>
-          </a:prstGeom>
-        </p:spPr>
-      </p:pic>
-      <p:sp>
-        <p:nvSpPr>
-          <p:cNvPr id="3" name="TextBox 2"/>
-          <p:cNvSpPr txBox="1"/>
-          <p:nvPr/>
-        </p:nvSpPr>
-        <p:spPr>
-          <a:xfrm>
-            <a:off x="1430098" y="256032"/>
-            <a:ext cx="15943502" cy="384048"/>
-          </a:xfrm>
-          <a:prstGeom prst="rect">
-            <a:avLst/>
-          </a:prstGeom>
-          <a:noFill/>
-        </p:spPr>
-        <p:txBody>
-          <a:bodyPr wrap="square" lIns="109728" rIns="109728" tIns="73152" bIns="73152" anchor="ctr">
-            <a:noAutofit/>
-          </a:bodyPr>
-          <a:lstStyle/>
-          <a:p>
-            <a:pPr algn="l">
-              <a:defRPr sz="1500" b="1" i="0">
-                <a:solidFill>
-                  <a:srgbClr val="FFFFFF"/>
-                </a:solidFill>
-                <a:latin typeface="Georgia"/>
-              </a:defRPr>
-            </a:pPr>
-            <a:r>
-              <a:t>Gwangju Filipino Catholic Community</a:t>
-            </a:r>
-          </a:p>
-        </p:txBody>
-      </p:sp>
-      <p:sp>
-        <p:nvSpPr>
-          <p:cNvPr id="4" name="TextBox 3"/>
-          <p:cNvSpPr txBox="1"/>
-          <p:nvPr/>
-        </p:nvSpPr>
-        <p:spPr>
-          <a:xfrm>
-            <a:off x="914400" y="1490472"/>
-            <a:ext cx="16459200" cy="7927848"/>
-          </a:xfrm>
-          <a:prstGeom prst="rect">
-            <a:avLst/>
-          </a:prstGeom>
-          <a:noFill/>
-        </p:spPr>
-        <p:txBody>
-          <a:bodyPr wrap="square" lIns="109728" rIns="109728" tIns="73152" bIns="73152" anchor="ctr">
-            <a:noAutofit/>
-          </a:bodyPr>
-          <a:lstStyle/>
-          <a:p>
-            <a:pPr algn="ctr">
-              <a:lnSpc>
-                <a:spcPct val="105000"/>
-              </a:lnSpc>
-              <a:spcAft>
-                <a:spcPts val="1000"/>
-              </a:spcAft>
-              <a:defRPr sz="5000" b="1" i="0">
-                <a:solidFill>
-                  <a:srgbClr val="FFFFFF"/>
-                </a:solidFill>
-                <a:latin typeface="Arial Black"/>
-              </a:defRPr>
-            </a:pPr>
-            <a:r>
-              <a:t>VERSE 3 COPY</a:t>
-            </a:r>
-          </a:p>
-          <a:p>
-            <a:pPr algn="ctr">
-              <a:lnSpc>
-                <a:spcPct val="105000"/>
-              </a:lnSpc>
-              <a:spcAft>
-                <a:spcPts val="1000"/>
-              </a:spcAft>
-              <a:defRPr sz="5000" b="1" i="0">
-                <a:solidFill>
-                  <a:srgbClr val="FFFFFF"/>
-                </a:solidFill>
-                <a:latin typeface="Arial Black"/>
-              </a:defRPr>
-            </a:pPr>
-            <a:r>
-              <a:t>AS WE GAZE ON YOUR KINGLY BRIGHTNESS</a:t>
-            </a:r>
-          </a:p>
-          <a:p>
-            <a:pPr algn="ctr">
-              <a:lnSpc>
-                <a:spcPct val="105000"/>
-              </a:lnSpc>
-              <a:spcAft>
-                <a:spcPts val="1000"/>
-              </a:spcAft>
-              <a:defRPr sz="5000" b="1" i="0">
-                <a:solidFill>
-                  <a:srgbClr val="FFFFFF"/>
-                </a:solidFill>
-                <a:latin typeface="Arial Black"/>
-              </a:defRPr>
-            </a:pPr>
-            <a:r>
-              <a:t>SO OUR FACES DISPLAY YOUR LIKENESS</a:t>
-            </a:r>
-          </a:p>
-          <a:p>
-            <a:pPr algn="ctr">
-              <a:lnSpc>
-                <a:spcPct val="105000"/>
-              </a:lnSpc>
-              <a:spcAft>
-                <a:spcPts val="1000"/>
-              </a:spcAft>
-              <a:defRPr sz="5000" b="1" i="0">
-                <a:solidFill>
-                  <a:srgbClr val="FFFFFF"/>
-                </a:solidFill>
-                <a:latin typeface="Arial Black"/>
-              </a:defRPr>
-            </a:pPr>
-            <a:r>
-              <a:t>EVER CHANGING FROM GLORY TO GLORY</a:t>
-            </a:r>
-          </a:p>
-          <a:p>
-            <a:pPr algn="ctr">
-              <a:lnSpc>
-                <a:spcPct val="105000"/>
-              </a:lnSpc>
-              <a:spcAft>
-                <a:spcPts val="1000"/>
-              </a:spcAft>
-              <a:defRPr sz="5000" b="1" i="0">
-                <a:solidFill>
-                  <a:srgbClr val="FFFFFF"/>
-                </a:solidFill>
-                <a:latin typeface="Arial Black"/>
-              </a:defRPr>
-            </a:pPr>
-            <a:r>
-              <a:t>MIRRORED HERE, MAY OUR LIVES TELL YOUR STORY</a:t>
-            </a:r>
-          </a:p>
-          <a:p>
-            <a:pPr algn="ctr">
-              <a:lnSpc>
-                <a:spcPct val="105000"/>
-              </a:lnSpc>
-              <a:spcAft>
-                <a:spcPts val="1000"/>
-              </a:spcAft>
-              <a:defRPr sz="5000" b="1" i="0">
-                <a:solidFill>
-                  <a:srgbClr val="FFFFFF"/>
-                </a:solidFill>
-                <a:latin typeface="Arial Black"/>
-              </a:defRPr>
-            </a:pPr>
-            <a:r>
-              <a:t>SHINE ON ME, SHINE ON ME</a:t>
-            </a:r>
-          </a:p>
-        </p:txBody>
-      </p:sp>
-      <p:sp>
-        <p:nvSpPr>
-          <p:cNvPr id="5" name="TextBox 4"/>
-          <p:cNvSpPr txBox="1"/>
-          <p:nvPr/>
-        </p:nvSpPr>
-        <p:spPr>
-          <a:xfrm>
-            <a:off x="914400" y="9418320"/>
-            <a:ext cx="16459200" cy="777240"/>
-          </a:xfrm>
-          <a:prstGeom prst="rect">
-            <a:avLst/>
-          </a:prstGeom>
-          <a:noFill/>
-        </p:spPr>
-        <p:txBody>
-          <a:bodyPr wrap="square" lIns="109728" rIns="109728" tIns="73152" bIns="73152">
-            <a:noAutofit/>
-          </a:bodyPr>
-          <a:lstStyle/>
-          <a:p>
-            <a:pPr>
-              <a:defRPr sz="1300" b="1" i="0">
-                <a:solidFill>
-                  <a:srgbClr val="8C8C91"/>
-                </a:solidFill>
-                <a:latin typeface="Georgia"/>
-              </a:defRPr>
-            </a:pPr>
-            <a:r>
-              <a:t>Gwangju Filipino Catholic Community</a:t>
-            </a:r>
-          </a:p>
-          <a:p>
-            <a:pPr>
-              <a:spcBef>
-                <a:spcPts val="200"/>
-              </a:spcBef>
-              <a:defRPr sz="1200" b="0" i="0">
-                <a:solidFill>
-                  <a:srgbClr val="FFCC4D"/>
-                </a:solidFill>
-                <a:latin typeface="Georgia"/>
-              </a:defRPr>
-            </a:pPr>
-            <a:r>
-              <a:t>Recessional</a:t>
-            </a:r>
-          </a:p>
-        </p:txBody>
-      </p:sp>
-    </p:spTree>
-  </p:cSld>
-  <p:clrMapOvr>
-    <a:masterClrMapping/>
-  </p:clrMapOvr>
-</p:sld>
-</file>
-
-<file path=ppt/slides/slide79.xml><?xml version="1.0" encoding="utf-8"?>
-<p:sld xmlns:a="http://schemas.openxmlformats.org/drawingml/2006/main" xmlns:p="http://schemas.openxmlformats.org/presentationml/2006/main" xmlns:r="http://schemas.openxmlformats.org/officeDocument/2006/relationships">
-  <p:cSld>
-    <p:bg>
-      <p:bgPr>
-        <a:solidFill>
-          <a:srgbClr val="000000"/>
-        </a:solidFill>
-        <a:effectLst/>
-      </p:bgPr>
-    </p:bg>
-    <p:spTree>
-      <p:nvGrpSpPr>
-        <p:cNvPr id="1" name=""/>
-        <p:cNvGrpSpPr/>
-        <p:nvPr/>
-      </p:nvGrpSpPr>
-      <p:grpSpPr/>
-      <p:pic>
-        <p:nvPicPr>
-          <p:cNvPr id="2" name="Picture 1" descr="community_logo.png"/>
-          <p:cNvPicPr>
-            <a:picLocks noChangeAspect="1"/>
-          </p:cNvPicPr>
-          <p:nvPr/>
-        </p:nvPicPr>
-        <p:blipFill>
-          <a:blip r:embed="rId2"/>
-          <a:stretch>
-            <a:fillRect/>
-          </a:stretch>
-        </p:blipFill>
-        <p:spPr>
-          <a:xfrm>
-            <a:off x="914400" y="256032"/>
-            <a:ext cx="387682" cy="384048"/>
-          </a:xfrm>
-          <a:prstGeom prst="rect">
-            <a:avLst/>
-          </a:prstGeom>
-        </p:spPr>
-      </p:pic>
-      <p:sp>
-        <p:nvSpPr>
-          <p:cNvPr id="3" name="TextBox 2"/>
-          <p:cNvSpPr txBox="1"/>
-          <p:nvPr/>
-        </p:nvSpPr>
-        <p:spPr>
-          <a:xfrm>
-            <a:off x="1430098" y="256032"/>
-            <a:ext cx="15943502" cy="384048"/>
-          </a:xfrm>
-          <a:prstGeom prst="rect">
-            <a:avLst/>
-          </a:prstGeom>
-          <a:noFill/>
-        </p:spPr>
-        <p:txBody>
-          <a:bodyPr wrap="square" lIns="109728" rIns="109728" tIns="73152" bIns="73152" anchor="ctr">
-            <a:noAutofit/>
-          </a:bodyPr>
-          <a:lstStyle/>
-          <a:p>
-            <a:pPr algn="l">
-              <a:defRPr sz="1500" b="1" i="0">
-                <a:solidFill>
-                  <a:srgbClr val="FFFFFF"/>
-                </a:solidFill>
-                <a:latin typeface="Georgia"/>
-              </a:defRPr>
-            </a:pPr>
-            <a:r>
-              <a:t>Gwangju Filipino Catholic Community</a:t>
-            </a:r>
-          </a:p>
-        </p:txBody>
-      </p:sp>
-      <p:sp>
-        <p:nvSpPr>
-          <p:cNvPr id="4" name="TextBox 3"/>
-          <p:cNvSpPr txBox="1"/>
-          <p:nvPr/>
-        </p:nvSpPr>
-        <p:spPr>
-          <a:xfrm>
-            <a:off x="914400" y="1490472"/>
-            <a:ext cx="16459200" cy="7927848"/>
-          </a:xfrm>
-          <a:prstGeom prst="rect">
-            <a:avLst/>
-          </a:prstGeom>
-          <a:noFill/>
-        </p:spPr>
-        <p:txBody>
-          <a:bodyPr wrap="square" lIns="109728" rIns="109728" tIns="73152" bIns="73152" anchor="ctr">
-            <a:noAutofit/>
-          </a:bodyPr>
-          <a:lstStyle/>
-          <a:p>
-            <a:pPr algn="ctr">
-              <a:lnSpc>
-                <a:spcPct val="105000"/>
-              </a:lnSpc>
-              <a:spcAft>
-                <a:spcPts val="1000"/>
-              </a:spcAft>
-              <a:defRPr sz="3800" b="1" i="0">
-                <a:solidFill>
-                  <a:srgbClr val="FFFFFF"/>
-                </a:solidFill>
-                <a:latin typeface="Arial Black"/>
-              </a:defRPr>
-            </a:pPr>
-            <a:r>
-              <a:t>SHINE, JESUS, SHINE, FILL THIS LAND WITH THE FATHER'S GLORY</a:t>
-            </a:r>
-          </a:p>
-          <a:p>
-            <a:pPr algn="ctr">
-              <a:lnSpc>
-                <a:spcPct val="105000"/>
-              </a:lnSpc>
-              <a:spcAft>
-                <a:spcPts val="1000"/>
-              </a:spcAft>
-              <a:defRPr sz="3800" b="1" i="0">
-                <a:solidFill>
-                  <a:srgbClr val="FFFFFF"/>
-                </a:solidFill>
-                <a:latin typeface="Arial Black"/>
-              </a:defRPr>
-            </a:pPr>
-            <a:r>
-              <a:t>BLAZE, SPIRIT, BLAZE, SET OUR HEARTS ON FIRE</a:t>
-            </a:r>
-          </a:p>
-          <a:p>
-            <a:pPr algn="ctr">
-              <a:lnSpc>
-                <a:spcPct val="105000"/>
-              </a:lnSpc>
-              <a:spcAft>
-                <a:spcPts val="1000"/>
-              </a:spcAft>
-              <a:defRPr sz="3800" b="1" i="0">
-                <a:solidFill>
-                  <a:srgbClr val="FFFFFF"/>
-                </a:solidFill>
-                <a:latin typeface="Arial Black"/>
-              </a:defRPr>
-            </a:pPr>
-            <a:r>
-              <a:t>FLOW, RIVER, FLOW, FLOOD THE NATIONS WITH GRACE AND MERCY</a:t>
-            </a:r>
-          </a:p>
-          <a:p>
-            <a:pPr algn="ctr">
-              <a:lnSpc>
-                <a:spcPct val="105000"/>
-              </a:lnSpc>
-              <a:spcAft>
-                <a:spcPts val="1000"/>
-              </a:spcAft>
-              <a:defRPr sz="3800" b="1" i="0">
-                <a:solidFill>
-                  <a:srgbClr val="FFFFFF"/>
-                </a:solidFill>
-                <a:latin typeface="Arial Black"/>
-              </a:defRPr>
-            </a:pPr>
-            <a:r>
-              <a:t>SEND FORTH YOUR WORD, LORD, AND LET, LET THERE BE LIGHT</a:t>
-            </a:r>
-          </a:p>
-          <a:p>
-            <a:pPr algn="ctr">
-              <a:lnSpc>
-                <a:spcPct val="105000"/>
-              </a:lnSpc>
-              <a:spcAft>
-                <a:spcPts val="1000"/>
-              </a:spcAft>
-              <a:defRPr sz="3800" b="1" i="0">
-                <a:solidFill>
-                  <a:srgbClr val="FFFFFF"/>
-                </a:solidFill>
-                <a:latin typeface="Arial Black"/>
-              </a:defRPr>
-            </a:pPr>
-            <a:r>
-              <a:t>SHINE, JESUS, SHINE, FILL THIS LAND WITH THE FATHER'S GLORY</a:t>
-            </a:r>
-          </a:p>
-          <a:p>
-            <a:pPr algn="ctr">
-              <a:lnSpc>
-                <a:spcPct val="105000"/>
-              </a:lnSpc>
-              <a:spcAft>
-                <a:spcPts val="1000"/>
-              </a:spcAft>
-              <a:defRPr sz="3800" b="1" i="0">
-                <a:solidFill>
-                  <a:srgbClr val="FFFFFF"/>
-                </a:solidFill>
-                <a:latin typeface="Arial Black"/>
-              </a:defRPr>
-            </a:pPr>
-            <a:r>
-              <a:t>BLAZE, SPIRIT, BLAZE, SET OUR HEARTS, SET THEM ON FIRE</a:t>
-            </a:r>
-          </a:p>
-        </p:txBody>
-      </p:sp>
-      <p:sp>
-        <p:nvSpPr>
-          <p:cNvPr id="5" name="TextBox 4"/>
-          <p:cNvSpPr txBox="1"/>
-          <p:nvPr/>
-        </p:nvSpPr>
-        <p:spPr>
-          <a:xfrm>
-            <a:off x="914400" y="9418320"/>
-            <a:ext cx="16459200" cy="777240"/>
-          </a:xfrm>
-          <a:prstGeom prst="rect">
-            <a:avLst/>
-          </a:prstGeom>
-          <a:noFill/>
-        </p:spPr>
-        <p:txBody>
-          <a:bodyPr wrap="square" lIns="109728" rIns="109728" tIns="73152" bIns="73152">
-            <a:noAutofit/>
-          </a:bodyPr>
-          <a:lstStyle/>
-          <a:p>
-            <a:pPr>
-              <a:defRPr sz="1300" b="1" i="0">
-                <a:solidFill>
-                  <a:srgbClr val="8C8C91"/>
-                </a:solidFill>
-                <a:latin typeface="Georgia"/>
-              </a:defRPr>
-            </a:pPr>
-            <a:r>
-              <a:t>Gwangju Filipino Catholic Community</a:t>
-            </a:r>
-          </a:p>
-          <a:p>
-            <a:pPr>
-              <a:spcBef>
-                <a:spcPts val="200"/>
-              </a:spcBef>
-              <a:defRPr sz="1200" b="0" i="0">
-                <a:solidFill>
-                  <a:srgbClr val="FFCC4D"/>
-                </a:solidFill>
-                <a:latin typeface="Georgia"/>
-              </a:defRPr>
-            </a:pPr>
-            <a:r>
-              <a:t>Recessional</a:t>
+              <a:t>Scripture note</a:t>
             </a:r>
           </a:p>
         </p:txBody>
@@ -23003,963 +21174,6 @@
             </a:pPr>
             <a:r>
               <a:t>Mass poster / divider</a:t>
-            </a:r>
-          </a:p>
-        </p:txBody>
-      </p:sp>
-    </p:spTree>
-  </p:cSld>
-  <p:clrMapOvr>
-    <a:masterClrMapping/>
-  </p:clrMapOvr>
-</p:sld>
-</file>
-
-<file path=ppt/slides/slide80.xml><?xml version="1.0" encoding="utf-8"?>
-<p:sld xmlns:a="http://schemas.openxmlformats.org/drawingml/2006/main" xmlns:p="http://schemas.openxmlformats.org/presentationml/2006/main" xmlns:r="http://schemas.openxmlformats.org/officeDocument/2006/relationships">
-  <p:cSld>
-    <p:bg>
-      <p:bgPr>
-        <a:solidFill>
-          <a:srgbClr val="000000"/>
-        </a:solidFill>
-        <a:effectLst/>
-      </p:bgPr>
-    </p:bg>
-    <p:spTree>
-      <p:nvGrpSpPr>
-        <p:cNvPr id="1" name=""/>
-        <p:cNvGrpSpPr/>
-        <p:nvPr/>
-      </p:nvGrpSpPr>
-      <p:grpSpPr/>
-      <p:pic>
-        <p:nvPicPr>
-          <p:cNvPr id="2" name="Picture 1" descr="community_logo.png"/>
-          <p:cNvPicPr>
-            <a:picLocks noChangeAspect="1"/>
-          </p:cNvPicPr>
-          <p:nvPr/>
-        </p:nvPicPr>
-        <p:blipFill>
-          <a:blip r:embed="rId2"/>
-          <a:stretch>
-            <a:fillRect/>
-          </a:stretch>
-        </p:blipFill>
-        <p:spPr>
-          <a:xfrm>
-            <a:off x="914400" y="256032"/>
-            <a:ext cx="387682" cy="384048"/>
-          </a:xfrm>
-          <a:prstGeom prst="rect">
-            <a:avLst/>
-          </a:prstGeom>
-        </p:spPr>
-      </p:pic>
-      <p:sp>
-        <p:nvSpPr>
-          <p:cNvPr id="3" name="TextBox 2"/>
-          <p:cNvSpPr txBox="1"/>
-          <p:nvPr/>
-        </p:nvSpPr>
-        <p:spPr>
-          <a:xfrm>
-            <a:off x="1430098" y="256032"/>
-            <a:ext cx="15943502" cy="384048"/>
-          </a:xfrm>
-          <a:prstGeom prst="rect">
-            <a:avLst/>
-          </a:prstGeom>
-          <a:noFill/>
-        </p:spPr>
-        <p:txBody>
-          <a:bodyPr wrap="square" lIns="109728" rIns="109728" tIns="73152" bIns="73152" anchor="ctr">
-            <a:noAutofit/>
-          </a:bodyPr>
-          <a:lstStyle/>
-          <a:p>
-            <a:pPr algn="l">
-              <a:defRPr sz="1500" b="1" i="0">
-                <a:solidFill>
-                  <a:srgbClr val="FFFFFF"/>
-                </a:solidFill>
-                <a:latin typeface="Georgia"/>
-              </a:defRPr>
-            </a:pPr>
-            <a:r>
-              <a:t>Gwangju Filipino Catholic Community</a:t>
-            </a:r>
-          </a:p>
-        </p:txBody>
-      </p:sp>
-      <p:sp>
-        <p:nvSpPr>
-          <p:cNvPr id="4" name="TextBox 3"/>
-          <p:cNvSpPr txBox="1"/>
-          <p:nvPr/>
-        </p:nvSpPr>
-        <p:spPr>
-          <a:xfrm>
-            <a:off x="914400" y="1490472"/>
-            <a:ext cx="16459200" cy="7927848"/>
-          </a:xfrm>
-          <a:prstGeom prst="rect">
-            <a:avLst/>
-          </a:prstGeom>
-          <a:noFill/>
-        </p:spPr>
-        <p:txBody>
-          <a:bodyPr wrap="square" lIns="109728" rIns="109728" tIns="73152" bIns="73152" anchor="ctr">
-            <a:noAutofit/>
-          </a:bodyPr>
-          <a:lstStyle/>
-          <a:p>
-            <a:pPr algn="ctr">
-              <a:lnSpc>
-                <a:spcPct val="105000"/>
-              </a:lnSpc>
-              <a:spcAft>
-                <a:spcPts val="1000"/>
-              </a:spcAft>
-              <a:defRPr sz="3800" b="1" i="0">
-                <a:solidFill>
-                  <a:srgbClr val="FFFFFF"/>
-                </a:solidFill>
-                <a:latin typeface="Arial Black"/>
-              </a:defRPr>
-            </a:pPr>
-            <a:r>
-              <a:t>FLOW, RIVER, FLOW, FLOOD THE NATIONS WITH GRACE AND MERCY</a:t>
-            </a:r>
-          </a:p>
-          <a:p>
-            <a:pPr algn="ctr">
-              <a:lnSpc>
-                <a:spcPct val="105000"/>
-              </a:lnSpc>
-              <a:spcAft>
-                <a:spcPts val="1000"/>
-              </a:spcAft>
-              <a:defRPr sz="3800" b="1" i="0">
-                <a:solidFill>
-                  <a:srgbClr val="FFFFFF"/>
-                </a:solidFill>
-                <a:latin typeface="Arial Black"/>
-              </a:defRPr>
-            </a:pPr>
-            <a:r>
-              <a:t>SEND FORTH YOUR WORD, LORD, AND LET THERE BE LIGHT!</a:t>
-            </a:r>
-          </a:p>
-        </p:txBody>
-      </p:sp>
-      <p:sp>
-        <p:nvSpPr>
-          <p:cNvPr id="5" name="TextBox 4"/>
-          <p:cNvSpPr txBox="1"/>
-          <p:nvPr/>
-        </p:nvSpPr>
-        <p:spPr>
-          <a:xfrm>
-            <a:off x="914400" y="9418320"/>
-            <a:ext cx="16459200" cy="777240"/>
-          </a:xfrm>
-          <a:prstGeom prst="rect">
-            <a:avLst/>
-          </a:prstGeom>
-          <a:noFill/>
-        </p:spPr>
-        <p:txBody>
-          <a:bodyPr wrap="square" lIns="109728" rIns="109728" tIns="73152" bIns="73152">
-            <a:noAutofit/>
-          </a:bodyPr>
-          <a:lstStyle/>
-          <a:p>
-            <a:pPr>
-              <a:defRPr sz="1300" b="1" i="0">
-                <a:solidFill>
-                  <a:srgbClr val="8C8C91"/>
-                </a:solidFill>
-                <a:latin typeface="Georgia"/>
-              </a:defRPr>
-            </a:pPr>
-            <a:r>
-              <a:t>Gwangju Filipino Catholic Community</a:t>
-            </a:r>
-          </a:p>
-          <a:p>
-            <a:pPr>
-              <a:spcBef>
-                <a:spcPts val="200"/>
-              </a:spcBef>
-              <a:defRPr sz="1200" b="0" i="0">
-                <a:solidFill>
-                  <a:srgbClr val="FFCC4D"/>
-                </a:solidFill>
-                <a:latin typeface="Georgia"/>
-              </a:defRPr>
-            </a:pPr>
-            <a:r>
-              <a:t>Recessional</a:t>
-            </a:r>
-          </a:p>
-        </p:txBody>
-      </p:sp>
-    </p:spTree>
-  </p:cSld>
-  <p:clrMapOvr>
-    <a:masterClrMapping/>
-  </p:clrMapOvr>
-</p:sld>
-</file>
-
-<file path=ppt/slides/slide81.xml><?xml version="1.0" encoding="utf-8"?>
-<p:sld xmlns:a="http://schemas.openxmlformats.org/drawingml/2006/main" xmlns:p="http://schemas.openxmlformats.org/presentationml/2006/main" xmlns:r="http://schemas.openxmlformats.org/officeDocument/2006/relationships">
-  <p:cSld>
-    <p:bg>
-      <p:bgPr>
-        <a:solidFill>
-          <a:srgbClr val="000000"/>
-        </a:solidFill>
-        <a:effectLst/>
-      </p:bgPr>
-    </p:bg>
-    <p:spTree>
-      <p:nvGrpSpPr>
-        <p:cNvPr id="1" name=""/>
-        <p:cNvGrpSpPr/>
-        <p:nvPr/>
-      </p:nvGrpSpPr>
-      <p:grpSpPr/>
-      <p:pic>
-        <p:nvPicPr>
-          <p:cNvPr id="2" name="Picture 1" descr="community_logo.png"/>
-          <p:cNvPicPr>
-            <a:picLocks noChangeAspect="1"/>
-          </p:cNvPicPr>
-          <p:nvPr/>
-        </p:nvPicPr>
-        <p:blipFill>
-          <a:blip r:embed="rId2"/>
-          <a:stretch>
-            <a:fillRect/>
-          </a:stretch>
-        </p:blipFill>
-        <p:spPr>
-          <a:xfrm>
-            <a:off x="914400" y="256032"/>
-            <a:ext cx="387682" cy="384048"/>
-          </a:xfrm>
-          <a:prstGeom prst="rect">
-            <a:avLst/>
-          </a:prstGeom>
-        </p:spPr>
-      </p:pic>
-      <p:sp>
-        <p:nvSpPr>
-          <p:cNvPr id="3" name="TextBox 2"/>
-          <p:cNvSpPr txBox="1"/>
-          <p:nvPr/>
-        </p:nvSpPr>
-        <p:spPr>
-          <a:xfrm>
-            <a:off x="1430098" y="256032"/>
-            <a:ext cx="15943502" cy="384048"/>
-          </a:xfrm>
-          <a:prstGeom prst="rect">
-            <a:avLst/>
-          </a:prstGeom>
-          <a:noFill/>
-        </p:spPr>
-        <p:txBody>
-          <a:bodyPr wrap="square" lIns="109728" rIns="109728" tIns="73152" bIns="73152" anchor="ctr">
-            <a:noAutofit/>
-          </a:bodyPr>
-          <a:lstStyle/>
-          <a:p>
-            <a:pPr algn="l">
-              <a:defRPr sz="1500" b="1" i="0">
-                <a:solidFill>
-                  <a:srgbClr val="FFFFFF"/>
-                </a:solidFill>
-                <a:latin typeface="Georgia"/>
-              </a:defRPr>
-            </a:pPr>
-            <a:r>
-              <a:t>Gwangju Filipino Catholic Community</a:t>
-            </a:r>
-          </a:p>
-        </p:txBody>
-      </p:sp>
-      <p:sp>
-        <p:nvSpPr>
-          <p:cNvPr id="4" name="TextBox 3"/>
-          <p:cNvSpPr txBox="1"/>
-          <p:nvPr/>
-        </p:nvSpPr>
-        <p:spPr>
-          <a:xfrm>
-            <a:off x="914400" y="1490472"/>
-            <a:ext cx="16459200" cy="7927848"/>
-          </a:xfrm>
-          <a:prstGeom prst="rect">
-            <a:avLst/>
-          </a:prstGeom>
-          <a:noFill/>
-        </p:spPr>
-        <p:txBody>
-          <a:bodyPr wrap="square" lIns="109728" rIns="109728" tIns="73152" bIns="73152" anchor="ctr">
-            <a:noAutofit/>
-          </a:bodyPr>
-          <a:lstStyle/>
-          <a:p>
-            <a:pPr algn="ctr">
-              <a:lnSpc>
-                <a:spcPct val="105000"/>
-              </a:lnSpc>
-              <a:spcAft>
-                <a:spcPts val="1000"/>
-              </a:spcAft>
-              <a:defRPr sz="5500" b="1" i="0">
-                <a:solidFill>
-                  <a:srgbClr val="FFFFFF"/>
-                </a:solidFill>
-                <a:latin typeface="Arial Black"/>
-              </a:defRPr>
-            </a:pPr>
-            <a:r>
-              <a:t>LORD, LET THERE BE LIGHT!</a:t>
-            </a:r>
-          </a:p>
-          <a:p>
-            <a:pPr algn="ctr">
-              <a:lnSpc>
-                <a:spcPct val="105000"/>
-              </a:lnSpc>
-              <a:spcAft>
-                <a:spcPts val="1000"/>
-              </a:spcAft>
-              <a:defRPr sz="5500" b="1" i="0">
-                <a:solidFill>
-                  <a:srgbClr val="FFFFFF"/>
-                </a:solidFill>
-                <a:latin typeface="Arial Black"/>
-              </a:defRPr>
-            </a:pPr>
-            <a:r>
-              <a:t>LET THERE BE LIGHT!</a:t>
-            </a:r>
-          </a:p>
-        </p:txBody>
-      </p:sp>
-      <p:sp>
-        <p:nvSpPr>
-          <p:cNvPr id="5" name="TextBox 4"/>
-          <p:cNvSpPr txBox="1"/>
-          <p:nvPr/>
-        </p:nvSpPr>
-        <p:spPr>
-          <a:xfrm>
-            <a:off x="914400" y="9418320"/>
-            <a:ext cx="16459200" cy="777240"/>
-          </a:xfrm>
-          <a:prstGeom prst="rect">
-            <a:avLst/>
-          </a:prstGeom>
-          <a:noFill/>
-        </p:spPr>
-        <p:txBody>
-          <a:bodyPr wrap="square" lIns="109728" rIns="109728" tIns="73152" bIns="73152">
-            <a:noAutofit/>
-          </a:bodyPr>
-          <a:lstStyle/>
-          <a:p>
-            <a:pPr>
-              <a:defRPr sz="1300" b="1" i="0">
-                <a:solidFill>
-                  <a:srgbClr val="8C8C91"/>
-                </a:solidFill>
-                <a:latin typeface="Georgia"/>
-              </a:defRPr>
-            </a:pPr>
-            <a:r>
-              <a:t>Gwangju Filipino Catholic Community</a:t>
-            </a:r>
-          </a:p>
-          <a:p>
-            <a:pPr>
-              <a:spcBef>
-                <a:spcPts val="200"/>
-              </a:spcBef>
-              <a:defRPr sz="1200" b="0" i="0">
-                <a:solidFill>
-                  <a:srgbClr val="FFCC4D"/>
-                </a:solidFill>
-                <a:latin typeface="Georgia"/>
-              </a:defRPr>
-            </a:pPr>
-            <a:r>
-              <a:t>Recessional</a:t>
-            </a:r>
-          </a:p>
-        </p:txBody>
-      </p:sp>
-    </p:spTree>
-  </p:cSld>
-  <p:clrMapOvr>
-    <a:masterClrMapping/>
-  </p:clrMapOvr>
-</p:sld>
-</file>
-
-<file path=ppt/slides/slide82.xml><?xml version="1.0" encoding="utf-8"?>
-<p:sld xmlns:a="http://schemas.openxmlformats.org/drawingml/2006/main" xmlns:p="http://schemas.openxmlformats.org/presentationml/2006/main" xmlns:r="http://schemas.openxmlformats.org/officeDocument/2006/relationships">
-  <p:cSld>
-    <p:spTree>
-      <p:nvGrpSpPr>
-        <p:cNvPr id="1" name=""/>
-        <p:cNvGrpSpPr/>
-        <p:nvPr/>
-      </p:nvGrpSpPr>
-      <p:grpSpPr/>
-      <p:pic>
-        <p:nvPicPr>
-          <p:cNvPr id="2" name="Picture 1" descr="GFCC17May2026_Eastertide_16x9.png"/>
-          <p:cNvPicPr>
-            <a:picLocks noChangeAspect="1"/>
-          </p:cNvPicPr>
-          <p:nvPr/>
-        </p:nvPicPr>
-        <p:blipFill>
-          <a:blip r:embed="rId2"/>
-          <a:stretch>
-            <a:fillRect/>
-          </a:stretch>
-        </p:blipFill>
-        <p:spPr>
-          <a:xfrm>
-            <a:off x="0" y="0"/>
-            <a:ext cx="18288000" cy="10287000"/>
-          </a:xfrm>
-          <a:prstGeom prst="rect">
-            <a:avLst/>
-          </a:prstGeom>
-        </p:spPr>
-      </p:pic>
-      <p:pic>
-        <p:nvPicPr>
-          <p:cNvPr id="3" name="Picture 2" descr="community_logo.png"/>
-          <p:cNvPicPr>
-            <a:picLocks noChangeAspect="1"/>
-          </p:cNvPicPr>
-          <p:nvPr/>
-        </p:nvPicPr>
-        <p:blipFill>
-          <a:blip r:embed="rId3"/>
-          <a:stretch>
-            <a:fillRect/>
-          </a:stretch>
-        </p:blipFill>
-        <p:spPr>
-          <a:xfrm>
-            <a:off x="914400" y="256032"/>
-            <a:ext cx="387682" cy="384048"/>
-          </a:xfrm>
-          <a:prstGeom prst="rect">
-            <a:avLst/>
-          </a:prstGeom>
-        </p:spPr>
-      </p:pic>
-      <p:sp>
-        <p:nvSpPr>
-          <p:cNvPr id="4" name="TextBox 3"/>
-          <p:cNvSpPr txBox="1"/>
-          <p:nvPr/>
-        </p:nvSpPr>
-        <p:spPr>
-          <a:xfrm>
-            <a:off x="1430098" y="256032"/>
-            <a:ext cx="15943502" cy="384048"/>
-          </a:xfrm>
-          <a:prstGeom prst="rect">
-            <a:avLst/>
-          </a:prstGeom>
-          <a:noFill/>
-        </p:spPr>
-        <p:txBody>
-          <a:bodyPr wrap="square" lIns="109728" rIns="109728" tIns="73152" bIns="73152" anchor="ctr">
-            <a:noAutofit/>
-          </a:bodyPr>
-          <a:lstStyle/>
-          <a:p>
-            <a:pPr algn="l">
-              <a:defRPr sz="1500" b="1" i="0">
-                <a:solidFill>
-                  <a:srgbClr val="FFFFFF"/>
-                </a:solidFill>
-                <a:latin typeface="Georgia"/>
-              </a:defRPr>
-            </a:pPr>
-            <a:r>
-              <a:t>Gwangju Filipino Catholic Community</a:t>
-            </a:r>
-          </a:p>
-        </p:txBody>
-      </p:sp>
-      <p:sp>
-        <p:nvSpPr>
-          <p:cNvPr id="5" name="TextBox 4"/>
-          <p:cNvSpPr txBox="1"/>
-          <p:nvPr/>
-        </p:nvSpPr>
-        <p:spPr>
-          <a:xfrm>
-            <a:off x="914400" y="1810512"/>
-            <a:ext cx="16459200" cy="5943600"/>
-          </a:xfrm>
-          <a:prstGeom prst="rect">
-            <a:avLst/>
-          </a:prstGeom>
-          <a:noFill/>
-        </p:spPr>
-        <p:txBody>
-          <a:bodyPr wrap="square" lIns="109728" rIns="109728" tIns="73152" bIns="73152">
-            <a:noAutofit/>
-          </a:bodyPr>
-          <a:lstStyle/>
-          <a:p>
-            <a:pPr>
-              <a:spcAft>
-                <a:spcPts val="300"/>
-              </a:spcAft>
-              <a:defRPr sz="2100" b="1" i="0">
-                <a:solidFill>
-                  <a:srgbClr val="D8B4FE"/>
-                </a:solidFill>
-                <a:latin typeface="Georgia"/>
-              </a:defRPr>
-            </a:pPr>
-            <a:r>
-              <a:t>MASS CELEBRANT:</a:t>
-            </a:r>
-          </a:p>
-          <a:p>
-            <a:pPr>
-              <a:spcAft>
-                <a:spcPts val="300"/>
-              </a:spcAft>
-              <a:defRPr sz="2100" b="0" i="0">
-                <a:solidFill>
-                  <a:srgbClr val="FFFFFF"/>
-                </a:solidFill>
-                <a:latin typeface="Georgia"/>
-              </a:defRPr>
-            </a:pPr>
-            <a:r>
-              <a:t>Rev. Fr. Jonrey Lauron, RCJ</a:t>
-            </a:r>
-          </a:p>
-          <a:p>
-            <a:pPr>
-              <a:spcAft>
-                <a:spcPts val="300"/>
-              </a:spcAft>
-              <a:defRPr sz="2100" b="0" i="0">
-                <a:solidFill>
-                  <a:srgbClr val="FFFFFF"/>
-                </a:solidFill>
-                <a:latin typeface="Georgia"/>
-              </a:defRPr>
-            </a:pPr>
-          </a:p>
-          <a:p>
-            <a:pPr>
-              <a:spcAft>
-                <a:spcPts val="300"/>
-              </a:spcAft>
-              <a:defRPr sz="2100" b="0" i="0">
-                <a:solidFill>
-                  <a:srgbClr val="FFFFFF"/>
-                </a:solidFill>
-                <a:latin typeface="Georgia"/>
-              </a:defRPr>
-            </a:pPr>
-            <a:r>
-              <a:t>Gwangju</a:t>
-            </a:r>
-            <a:br/>
-            <a:r>
-              <a:t>Filipino</a:t>
-            </a:r>
-            <a:br/>
-            <a:r>
-              <a:t>Catholic</a:t>
-            </a:r>
-            <a:br/>
-            <a:r>
-              <a:t>Community</a:t>
-            </a:r>
-          </a:p>
-          <a:p>
-            <a:pPr>
-              <a:spcAft>
-                <a:spcPts val="300"/>
-              </a:spcAft>
-              <a:defRPr sz="2100" b="0" i="0">
-                <a:solidFill>
-                  <a:srgbClr val="FFFFFF"/>
-                </a:solidFill>
-                <a:latin typeface="Georgia"/>
-              </a:defRPr>
-            </a:pPr>
-          </a:p>
-          <a:p>
-            <a:pPr>
-              <a:spcAft>
-                <a:spcPts val="300"/>
-              </a:spcAft>
-              <a:defRPr sz="2100" b="0" i="0">
-                <a:solidFill>
-                  <a:srgbClr val="FFFFFF"/>
-                </a:solidFill>
-                <a:latin typeface="Georgia"/>
-              </a:defRPr>
-            </a:pPr>
-            <a:r>
-              <a:t>Gospel (Matthew 28:16-20)</a:t>
-            </a:r>
-          </a:p>
-          <a:p>
-            <a:pPr>
-              <a:spcAft>
-                <a:spcPts val="300"/>
-              </a:spcAft>
-              <a:defRPr sz="2100" b="0" i="0">
-                <a:solidFill>
-                  <a:srgbClr val="FFFFFF"/>
-                </a:solidFill>
-                <a:latin typeface="Georgia"/>
-              </a:defRPr>
-            </a:pPr>
-            <a:r>
-              <a:t>“All authority has been given to me in heaven and on earth.”</a:t>
-            </a:r>
-          </a:p>
-          <a:p>
-            <a:pPr>
-              <a:spcAft>
-                <a:spcPts val="300"/>
-              </a:spcAft>
-              <a:defRPr sz="2100" b="0" i="0">
-                <a:solidFill>
-                  <a:srgbClr val="FFFFFF"/>
-                </a:solidFill>
-                <a:latin typeface="Georgia"/>
-              </a:defRPr>
-            </a:pPr>
-          </a:p>
-          <a:p>
-            <a:pPr>
-              <a:spcAft>
-                <a:spcPts val="300"/>
-              </a:spcAft>
-              <a:defRPr sz="2100" b="0" i="0">
-                <a:solidFill>
-                  <a:srgbClr val="FFFFFF"/>
-                </a:solidFill>
-                <a:latin typeface="Georgia"/>
-              </a:defRPr>
-            </a:pPr>
-            <a:r>
-              <a:t>YEAR A</a:t>
-            </a:r>
-          </a:p>
-          <a:p>
-            <a:pPr>
-              <a:spcAft>
-                <a:spcPts val="300"/>
-              </a:spcAft>
-              <a:defRPr sz="2100" b="0" i="0">
-                <a:solidFill>
-                  <a:srgbClr val="FFFFFF"/>
-                </a:solidFill>
-                <a:latin typeface="Georgia"/>
-              </a:defRPr>
-            </a:pPr>
-            <a:r>
-              <a:t>2026-05-17 · Eastertide</a:t>
-            </a:r>
-          </a:p>
-        </p:txBody>
-      </p:sp>
-      <p:sp>
-        <p:nvSpPr>
-          <p:cNvPr id="6" name="TextBox 5"/>
-          <p:cNvSpPr txBox="1"/>
-          <p:nvPr/>
-        </p:nvSpPr>
-        <p:spPr>
-          <a:xfrm>
-            <a:off x="914400" y="9418320"/>
-            <a:ext cx="16459200" cy="777240"/>
-          </a:xfrm>
-          <a:prstGeom prst="rect">
-            <a:avLst/>
-          </a:prstGeom>
-          <a:noFill/>
-        </p:spPr>
-        <p:txBody>
-          <a:bodyPr wrap="square" lIns="109728" rIns="109728" tIns="73152" bIns="73152">
-            <a:noAutofit/>
-          </a:bodyPr>
-          <a:lstStyle/>
-          <a:p>
-            <a:pPr>
-              <a:defRPr sz="1300" b="1" i="0">
-                <a:solidFill>
-                  <a:srgbClr val="F8C66A"/>
-                </a:solidFill>
-                <a:latin typeface="Georgia"/>
-              </a:defRPr>
-            </a:pPr>
-            <a:r>
-              <a:t>Gwangju Filipino Catholic Community</a:t>
-            </a:r>
-          </a:p>
-          <a:p>
-            <a:pPr>
-              <a:spcBef>
-                <a:spcPts val="200"/>
-              </a:spcBef>
-              <a:defRPr sz="1200" b="0" i="0">
-                <a:solidFill>
-                  <a:srgbClr val="D8B4FE"/>
-                </a:solidFill>
-                <a:latin typeface="Georgia"/>
-              </a:defRPr>
-            </a:pPr>
-            <a:r>
-              <a:t>Mass poster / divider</a:t>
-            </a:r>
-          </a:p>
-        </p:txBody>
-      </p:sp>
-    </p:spTree>
-  </p:cSld>
-  <p:clrMapOvr>
-    <a:masterClrMapping/>
-  </p:clrMapOvr>
-</p:sld>
-</file>
-
-<file path=ppt/slides/slide83.xml><?xml version="1.0" encoding="utf-8"?>
-<p:sld xmlns:a="http://schemas.openxmlformats.org/drawingml/2006/main" xmlns:p="http://schemas.openxmlformats.org/presentationml/2006/main" xmlns:r="http://schemas.openxmlformats.org/officeDocument/2006/relationships">
-  <p:cSld>
-    <p:spTree>
-      <p:nvGrpSpPr>
-        <p:cNvPr id="1" name=""/>
-        <p:cNvGrpSpPr/>
-        <p:nvPr/>
-      </p:nvGrpSpPr>
-      <p:grpSpPr/>
-      <p:pic>
-        <p:nvPicPr>
-          <p:cNvPr id="2" name="Picture 1" descr="GFCC17May2026_Eastertide_16x9.png"/>
-          <p:cNvPicPr>
-            <a:picLocks noChangeAspect="1"/>
-          </p:cNvPicPr>
-          <p:nvPr/>
-        </p:nvPicPr>
-        <p:blipFill>
-          <a:blip r:embed="rId2"/>
-          <a:stretch>
-            <a:fillRect/>
-          </a:stretch>
-        </p:blipFill>
-        <p:spPr>
-          <a:xfrm>
-            <a:off x="0" y="0"/>
-            <a:ext cx="18288000" cy="10287000"/>
-          </a:xfrm>
-          <a:prstGeom prst="rect">
-            <a:avLst/>
-          </a:prstGeom>
-        </p:spPr>
-      </p:pic>
-    </p:spTree>
-  </p:cSld>
-  <p:clrMapOvr>
-    <a:masterClrMapping/>
-  </p:clrMapOvr>
-</p:sld>
-</file>
-
-<file path=ppt/slides/slide84.xml><?xml version="1.0" encoding="utf-8"?>
-<p:sld xmlns:a="http://schemas.openxmlformats.org/drawingml/2006/main" xmlns:p="http://schemas.openxmlformats.org/presentationml/2006/main" xmlns:r="http://schemas.openxmlformats.org/officeDocument/2006/relationships">
-  <p:cSld>
-    <p:bg>
-      <p:bgPr>
-        <a:solidFill>
-          <a:srgbClr val="211733"/>
-        </a:solidFill>
-        <a:effectLst/>
-      </p:bgPr>
-    </p:bg>
-    <p:spTree>
-      <p:nvGrpSpPr>
-        <p:cNvPr id="1" name=""/>
-        <p:cNvGrpSpPr/>
-        <p:nvPr/>
-      </p:nvGrpSpPr>
-      <p:grpSpPr/>
-      <p:pic>
-        <p:nvPicPr>
-          <p:cNvPr id="2" name="Picture 1" descr="community_logo.png"/>
-          <p:cNvPicPr>
-            <a:picLocks noChangeAspect="1"/>
-          </p:cNvPicPr>
-          <p:nvPr/>
-        </p:nvPicPr>
-        <p:blipFill>
-          <a:blip r:embed="rId2"/>
-          <a:stretch>
-            <a:fillRect/>
-          </a:stretch>
-        </p:blipFill>
-        <p:spPr>
-          <a:xfrm>
-            <a:off x="914400" y="256032"/>
-            <a:ext cx="387682" cy="384048"/>
-          </a:xfrm>
-          <a:prstGeom prst="rect">
-            <a:avLst/>
-          </a:prstGeom>
-        </p:spPr>
-      </p:pic>
-      <p:sp>
-        <p:nvSpPr>
-          <p:cNvPr id="3" name="TextBox 2"/>
-          <p:cNvSpPr txBox="1"/>
-          <p:nvPr/>
-        </p:nvSpPr>
-        <p:spPr>
-          <a:xfrm>
-            <a:off x="1430098" y="256032"/>
-            <a:ext cx="15943502" cy="384048"/>
-          </a:xfrm>
-          <a:prstGeom prst="rect">
-            <a:avLst/>
-          </a:prstGeom>
-          <a:noFill/>
-        </p:spPr>
-        <p:txBody>
-          <a:bodyPr wrap="square" lIns="109728" rIns="109728" tIns="73152" bIns="73152" anchor="ctr">
-            <a:noAutofit/>
-          </a:bodyPr>
-          <a:lstStyle/>
-          <a:p>
-            <a:pPr algn="l">
-              <a:defRPr sz="1500" b="1" i="0">
-                <a:solidFill>
-                  <a:srgbClr val="FFFFFF"/>
-                </a:solidFill>
-                <a:latin typeface="Georgia"/>
-              </a:defRPr>
-            </a:pPr>
-            <a:r>
-              <a:t>Gwangju Filipino Catholic Community</a:t>
-            </a:r>
-          </a:p>
-        </p:txBody>
-      </p:sp>
-      <p:sp>
-        <p:nvSpPr>
-          <p:cNvPr id="4" name="TextBox 3"/>
-          <p:cNvSpPr txBox="1"/>
-          <p:nvPr/>
-        </p:nvSpPr>
-        <p:spPr>
-          <a:xfrm>
-            <a:off x="914400" y="1490472"/>
-            <a:ext cx="16459200" cy="7790688"/>
-          </a:xfrm>
-          <a:prstGeom prst="rect">
-            <a:avLst/>
-          </a:prstGeom>
-          <a:noFill/>
-        </p:spPr>
-        <p:txBody>
-          <a:bodyPr wrap="square" lIns="109728" rIns="109728" tIns="73152" bIns="73152">
-            <a:noAutofit/>
-          </a:bodyPr>
-          <a:lstStyle/>
-          <a:p>
-            <a:pPr algn="ctr">
-              <a:spcAft>
-                <a:spcPts val="500"/>
-              </a:spcAft>
-              <a:defRPr sz="1500" b="0" i="1">
-                <a:solidFill>
-                  <a:srgbClr val="D8B4FE"/>
-                </a:solidFill>
-                <a:latin typeface="Georgia"/>
-              </a:defRPr>
-            </a:pPr>
-            <a:r>
-              <a:t>Below: World English Bible (WEB) fallback — verify NABRE on bible.usccb.org.</a:t>
-            </a:r>
-          </a:p>
-        </p:txBody>
-      </p:sp>
-      <p:sp>
-        <p:nvSpPr>
-          <p:cNvPr id="5" name="TextBox 4"/>
-          <p:cNvSpPr txBox="1"/>
-          <p:nvPr/>
-        </p:nvSpPr>
-        <p:spPr>
-          <a:xfrm>
-            <a:off x="914400" y="9418320"/>
-            <a:ext cx="16459200" cy="777240"/>
-          </a:xfrm>
-          <a:prstGeom prst="rect">
-            <a:avLst/>
-          </a:prstGeom>
-          <a:noFill/>
-        </p:spPr>
-        <p:txBody>
-          <a:bodyPr wrap="square" lIns="109728" rIns="109728" tIns="73152" bIns="73152">
-            <a:noAutofit/>
-          </a:bodyPr>
-          <a:lstStyle/>
-          <a:p>
-            <a:pPr>
-              <a:defRPr sz="1300" b="1" i="0">
-                <a:solidFill>
-                  <a:srgbClr val="F8C66A"/>
-                </a:solidFill>
-                <a:latin typeface="Georgia"/>
-              </a:defRPr>
-            </a:pPr>
-            <a:r>
-              <a:t>Gwangju Filipino Catholic Community</a:t>
-            </a:r>
-          </a:p>
-          <a:p>
-            <a:pPr>
-              <a:spcBef>
-                <a:spcPts val="200"/>
-              </a:spcBef>
-              <a:defRPr sz="1200" b="0" i="0">
-                <a:solidFill>
-                  <a:srgbClr val="D8B4FE"/>
-                </a:solidFill>
-                <a:latin typeface="Georgia"/>
-              </a:defRPr>
-            </a:pPr>
-            <a:r>
-              <a:t>Scripture note</a:t>
             </a:r>
           </a:p>
         </p:txBody>
